--- a/MALIHUB POWERPOINT PRESENTATION.pptx
+++ b/MALIHUB POWERPOINT PRESENTATION.pptx
@@ -17,10 +17,12 @@
     <p:sldId id="262" r:id="rId10"/>
     <p:sldId id="263" r:id="rId11"/>
     <p:sldId id="264" r:id="rId12"/>
-    <p:sldId id="265" r:id="rId13"/>
-    <p:sldId id="266" r:id="rId14"/>
-    <p:sldId id="267" r:id="rId15"/>
-    <p:sldId id="268" r:id="rId16"/>
+    <p:sldId id="270" r:id="rId13"/>
+    <p:sldId id="271" r:id="rId14"/>
+    <p:sldId id="265" r:id="rId15"/>
+    <p:sldId id="266" r:id="rId16"/>
+    <p:sldId id="267" r:id="rId17"/>
+    <p:sldId id="268" r:id="rId18"/>
   </p:sldIdLst>
   <p:sldSz cx="12192000" cy="6858000"/>
   <p:notesSz cx="6858000" cy="9144000"/>
@@ -122,12 +124,12 @@
   <p:extLst>
     <p:ext uri="{EFAFB233-063F-42B5-8137-9DF3F51BA10A}">
       <p15:sldGuideLst xmlns:p15="http://schemas.microsoft.com/office/powerpoint/2012/main">
-        <p15:guide id="1" orient="horz" pos="2170" userDrawn="1">
+        <p15:guide id="1" orient="horz" pos="2176" userDrawn="1">
           <p15:clr>
             <a:srgbClr val="A4A3A4"/>
           </p15:clr>
         </p15:guide>
-        <p15:guide id="2" pos="3833" userDrawn="1">
+        <p15:guide id="2" pos="3840" userDrawn="1">
           <p15:clr>
             <a:srgbClr val="A4A3A4"/>
           </p15:clr>
@@ -3782,142 +3784,97 @@
         <p:cNvGrpSpPr/>
         <p:nvPr/>
       </p:nvGrpSpPr>
-      <p:grpSpPr>
-        <a:xfrm>
-          <a:off x="0" y="0"/>
-          <a:ext cx="0" cy="0"/>
-          <a:chOff x="0" y="0"/>
-          <a:chExt cx="0" cy="0"/>
-        </a:xfrm>
-      </p:grpSpPr>
-      <p:sp>
-        <p:nvSpPr>
-          <p:cNvPr id="2" name="TextBox 1"/>
-          <p:cNvSpPr txBox="1"/>
-          <p:nvPr/>
+      <p:grpSpPr/>
+      <p:sp>
+        <p:nvSpPr>
+          <p:cNvPr id="4" name="Title 3"/>
+          <p:cNvSpPr>
+            <a:spLocks noGrp="1"/>
+          </p:cNvSpPr>
+          <p:nvPr>
+            <p:ph type="title"/>
+          </p:nvPr>
         </p:nvSpPr>
         <p:spPr>
           <a:xfrm>
-            <a:off x="546100" y="317500"/>
-            <a:ext cx="10820400" cy="4831080"/>
+            <a:off x="838200" y="203200"/>
+            <a:ext cx="10515600" cy="688340"/>
           </a:xfrm>
-          <a:prstGeom prst="rect">
-            <a:avLst/>
-          </a:prstGeom>
-          <a:noFill/>
         </p:spPr>
         <p:txBody>
-          <a:bodyPr wrap="square" rtlCol="0">
-            <a:spAutoFit/>
+          <a:bodyPr/>
+          <a:p>
+            <a:r>
+              <a:rPr lang="en-GB" altLang="en-US" sz="3200" b="1">
+                <a:latin typeface="Times New Roman" panose="02020603050405020304" charset="0"/>
+                <a:cs typeface="Times New Roman" panose="02020603050405020304" charset="0"/>
+              </a:rPr>
+              <a:t>DATABASE RELATIONSHIPS</a:t>
+            </a:r>
+            <a:endParaRPr lang="en-GB" altLang="en-US" sz="3200" b="1">
+              <a:latin typeface="Times New Roman" panose="02020603050405020304" charset="0"/>
+              <a:cs typeface="Times New Roman" panose="02020603050405020304" charset="0"/>
+            </a:endParaRPr>
+          </a:p>
+        </p:txBody>
+      </p:sp>
+      <p:sp>
+        <p:nvSpPr>
+          <p:cNvPr id="5" name="Content Placeholder 4"/>
+          <p:cNvSpPr>
+            <a:spLocks noGrp="1"/>
+          </p:cNvSpPr>
+          <p:nvPr>
+            <p:ph idx="1"/>
+          </p:nvPr>
+        </p:nvSpPr>
+        <p:spPr>
+          <a:xfrm>
+            <a:off x="213360" y="890905"/>
+            <a:ext cx="11743055" cy="5842000"/>
+          </a:xfrm>
+        </p:spPr>
+        <p:txBody>
+          <a:bodyPr>
+            <a:noAutofit/>
           </a:bodyPr>
-          <a:lstStyle/>
-          <a:p>
-            <a:r>
-              <a:rPr lang="en-US" sz="2800" b="1" u="sng" dirty="0">
-                <a:latin typeface="Times New Roman" panose="02020603050405020304" charset="0"/>
-                <a:cs typeface="Times New Roman" panose="02020603050405020304" charset="0"/>
-              </a:rPr>
-              <a:t>Design System</a:t>
-            </a:r>
-            <a:endParaRPr lang="en-US" sz="2800" b="1" u="sng" dirty="0">
-              <a:latin typeface="Times New Roman" panose="02020603050405020304" charset="0"/>
-              <a:cs typeface="Times New Roman" panose="02020603050405020304" charset="0"/>
-            </a:endParaRPr>
-          </a:p>
-          <a:p>
-            <a:endParaRPr lang="en-US" sz="2800" b="1" u="sng" dirty="0">
-              <a:latin typeface="Times New Roman" panose="02020603050405020304" charset="0"/>
-              <a:cs typeface="Times New Roman" panose="02020603050405020304" charset="0"/>
-            </a:endParaRPr>
-          </a:p>
-          <a:p>
-            <a:r>
-              <a:rPr lang="en-US" sz="2800" b="1" dirty="0">
-                <a:latin typeface="Times New Roman" panose="02020603050405020304" charset="0"/>
-                <a:cs typeface="Times New Roman" panose="02020603050405020304" charset="0"/>
-              </a:rPr>
-              <a:t>Visual Direction:</a:t>
-            </a:r>
-            <a:r>
-              <a:rPr lang="en-US" sz="2800" dirty="0">
-                <a:latin typeface="Times New Roman" panose="02020603050405020304" charset="0"/>
-                <a:cs typeface="Times New Roman" panose="02020603050405020304" charset="0"/>
-              </a:rPr>
-              <a:t> Kept clean and minimalist to focus completely on readability.</a:t>
-            </a:r>
-            <a:endParaRPr lang="en-US" sz="2800" dirty="0">
-              <a:latin typeface="Times New Roman" panose="02020603050405020304" charset="0"/>
-              <a:cs typeface="Times New Roman" panose="02020603050405020304" charset="0"/>
-            </a:endParaRPr>
-          </a:p>
-          <a:p>
-            <a:endParaRPr lang="en-US" sz="2800" dirty="0">
-              <a:latin typeface="Times New Roman" panose="02020603050405020304" charset="0"/>
-              <a:cs typeface="Times New Roman" panose="02020603050405020304" charset="0"/>
-            </a:endParaRPr>
-          </a:p>
-          <a:p>
-            <a:r>
-              <a:rPr lang="en-US" sz="2800" b="1" u="sng" dirty="0">
-                <a:latin typeface="Times New Roman" panose="02020603050405020304" charset="0"/>
-                <a:cs typeface="Times New Roman" panose="02020603050405020304" charset="0"/>
-              </a:rPr>
-              <a:t>Color Palette Rules</a:t>
-            </a:r>
-            <a:endParaRPr lang="en-US" sz="2800" b="1" u="sng" dirty="0">
-              <a:latin typeface="Times New Roman" panose="02020603050405020304" charset="0"/>
-              <a:cs typeface="Times New Roman" panose="02020603050405020304" charset="0"/>
-            </a:endParaRPr>
-          </a:p>
-          <a:p>
-            <a:r>
-              <a:rPr lang="en-US" sz="2800" dirty="0">
-                <a:latin typeface="Times New Roman" panose="02020603050405020304" charset="0"/>
-                <a:cs typeface="Times New Roman" panose="02020603050405020304" charset="0"/>
-              </a:rPr>
-              <a:t>Green: Used intentionally for positive balances and income logs.</a:t>
-            </a:r>
-            <a:endParaRPr lang="en-US" sz="2800" dirty="0">
-              <a:latin typeface="Times New Roman" panose="02020603050405020304" charset="0"/>
-              <a:cs typeface="Times New Roman" panose="02020603050405020304" charset="0"/>
-            </a:endParaRPr>
-          </a:p>
-          <a:p>
-            <a:r>
-              <a:rPr lang="en-US" sz="2800" dirty="0">
-                <a:latin typeface="Times New Roman" panose="02020603050405020304" charset="0"/>
-                <a:cs typeface="Times New Roman" panose="02020603050405020304" charset="0"/>
-              </a:rPr>
-              <a:t>Red: Used to highlight expenses and budget limits.</a:t>
-            </a:r>
-            <a:endParaRPr lang="en-US" sz="2800" dirty="0">
-              <a:latin typeface="Times New Roman" panose="02020603050405020304" charset="0"/>
-              <a:cs typeface="Times New Roman" panose="02020603050405020304" charset="0"/>
-            </a:endParaRPr>
-          </a:p>
-          <a:p>
-            <a:pPr lvl="1"/>
-            <a:endParaRPr lang="en-US" sz="2800" dirty="0">
-              <a:latin typeface="Times New Roman" panose="02020603050405020304" charset="0"/>
-              <a:cs typeface="Times New Roman" panose="02020603050405020304" charset="0"/>
-            </a:endParaRPr>
-          </a:p>
-          <a:p>
-            <a:r>
-              <a:rPr lang="en-US" sz="2800" b="1" dirty="0">
-                <a:latin typeface="Times New Roman" panose="02020603050405020304" charset="0"/>
-                <a:cs typeface="Times New Roman" panose="02020603050405020304" charset="0"/>
-              </a:rPr>
-              <a:t>Typography:</a:t>
-            </a:r>
-            <a:r>
-              <a:rPr lang="en-US" sz="2800" dirty="0">
-                <a:latin typeface="Times New Roman" panose="02020603050405020304" charset="0"/>
-                <a:cs typeface="Times New Roman" panose="02020603050405020304" charset="0"/>
-              </a:rPr>
-              <a:t> Uses standard, highly legible text sizes for clear data scanning on mobile screens.</a:t>
-            </a:r>
-            <a:endParaRPr lang="en-US" sz="2800" dirty="0">
+          <a:p>
+            <a:pPr marL="0" indent="0">
+              <a:buNone/>
+            </a:pPr>
+            <a:r>
+              <a:rPr lang="en-US" altLang="en-US" sz="3600">
+                <a:latin typeface="Times New Roman" panose="02020603050405020304" charset="0"/>
+                <a:cs typeface="Times New Roman" panose="02020603050405020304" charset="0"/>
+              </a:rPr>
+              <a:t>Each User may own zero or many Accounts, though every Account belongs to exactly one User. Similarly, each User may define zero or many personal Categories though default (system) Categories aren't tied to any particular User. </a:t>
+            </a:r>
+            <a:endParaRPr lang="en-US" altLang="en-US" sz="3600">
+              <a:latin typeface="Times New Roman" panose="02020603050405020304" charset="0"/>
+              <a:cs typeface="Times New Roman" panose="02020603050405020304" charset="0"/>
+            </a:endParaRPr>
+          </a:p>
+          <a:p>
+            <a:pPr marL="0" indent="0">
+              <a:buNone/>
+            </a:pPr>
+            <a:r>
+              <a:rPr lang="en-US" altLang="en-US" sz="3600">
+                <a:latin typeface="Times New Roman" panose="02020603050405020304" charset="0"/>
+                <a:cs typeface="Times New Roman" panose="02020603050405020304" charset="0"/>
+              </a:rPr>
+              <a:t>Each User may also set zero or many Budgets, with each Budget belonging to exactly one User, and each User may have zero or many Financial Goals, each of which belongs to exactly one User. Notifications follow the same pattern: a User may receive zero or many Notifications, and each Notification belongs to exactly one User.</a:t>
+            </a:r>
+            <a:endParaRPr lang="en-US" altLang="en-US" sz="3600">
+              <a:latin typeface="Times New Roman" panose="02020603050405020304" charset="0"/>
+              <a:cs typeface="Times New Roman" panose="02020603050405020304" charset="0"/>
+            </a:endParaRPr>
+          </a:p>
+          <a:p>
+            <a:pPr marL="0" indent="0">
+              <a:buNone/>
+            </a:pPr>
+            <a:endParaRPr lang="en-US" altLang="en-US" sz="3600">
               <a:latin typeface="Times New Roman" panose="02020603050405020304" charset="0"/>
               <a:cs typeface="Times New Roman" panose="02020603050405020304" charset="0"/>
             </a:endParaRPr>
@@ -3929,18 +3886,6 @@
   <p:clrMapOvr>
     <a:masterClrMapping/>
   </p:clrMapOvr>
-  <mc:AlternateContent xmlns:mc="http://schemas.openxmlformats.org/markup-compatibility/2006">
-    <mc:Choice xmlns:p14="http://schemas.microsoft.com/office/powerpoint/2010/main" Requires="p14">
-      <p:transition spd="slow" p14:dur="3400">
-        <p14:reveal/>
-      </p:transition>
-    </mc:Choice>
-    <mc:Fallback>
-      <p:transition spd="slow">
-        <p:fade/>
-      </p:transition>
-    </mc:Fallback>
-  </mc:AlternateContent>
 </p:sld>
 </file>
 
@@ -3953,181 +3898,83 @@
         <p:cNvGrpSpPr/>
         <p:nvPr/>
       </p:nvGrpSpPr>
-      <p:grpSpPr>
-        <a:xfrm>
-          <a:off x="0" y="0"/>
-          <a:ext cx="0" cy="0"/>
-          <a:chOff x="0" y="0"/>
-          <a:chExt cx="0" cy="0"/>
-        </a:xfrm>
-      </p:grpSpPr>
-      <p:sp>
-        <p:nvSpPr>
-          <p:cNvPr id="2" name="TextBox 1"/>
-          <p:cNvSpPr txBox="1"/>
-          <p:nvPr/>
+      <p:grpSpPr/>
+      <p:sp>
+        <p:nvSpPr>
+          <p:cNvPr id="5" name="Content Placeholder 4"/>
+          <p:cNvSpPr>
+            <a:spLocks noGrp="1"/>
+          </p:cNvSpPr>
+          <p:nvPr>
+            <p:ph idx="1"/>
+          </p:nvPr>
         </p:nvSpPr>
         <p:spPr>
           <a:xfrm>
-            <a:off x="101600" y="0"/>
-            <a:ext cx="11988800" cy="6433820"/>
+            <a:off x="433705" y="342265"/>
+            <a:ext cx="11325225" cy="6275070"/>
           </a:xfrm>
-          <a:prstGeom prst="rect">
-            <a:avLst/>
-          </a:prstGeom>
-          <a:noFill/>
         </p:spPr>
         <p:txBody>
-          <a:bodyPr wrap="square" rtlCol="0">
-            <a:noAutofit/>
+          <a:bodyPr>
+            <a:normAutofit/>
           </a:bodyPr>
-          <a:lstStyle/>
-          <a:p>
-            <a:endParaRPr lang="en-US" sz="2400" b="1" u="sng" dirty="0">
-              <a:latin typeface="Times New Roman" panose="02020603050405020304" charset="0"/>
-              <a:cs typeface="Times New Roman" panose="02020603050405020304" charset="0"/>
-            </a:endParaRPr>
-          </a:p>
-          <a:p>
-            <a:r>
-              <a:rPr lang="en-US" sz="2400" b="1" u="sng" dirty="0">
-                <a:latin typeface="Times New Roman" panose="02020603050405020304" charset="0"/>
-                <a:cs typeface="Times New Roman" panose="02020603050405020304" charset="0"/>
-              </a:rPr>
-              <a:t>Technical Challenges &amp; Solutions</a:t>
-            </a:r>
-            <a:endParaRPr lang="en-US" sz="2400" b="1" u="sng" dirty="0">
-              <a:latin typeface="Times New Roman" panose="02020603050405020304" charset="0"/>
-              <a:cs typeface="Times New Roman" panose="02020603050405020304" charset="0"/>
-            </a:endParaRPr>
-          </a:p>
-          <a:p>
-            <a:endParaRPr lang="en-US" sz="2400" b="1" u="sng" dirty="0">
-              <a:latin typeface="Times New Roman" panose="02020603050405020304" charset="0"/>
-              <a:cs typeface="Times New Roman" panose="02020603050405020304" charset="0"/>
-            </a:endParaRPr>
-          </a:p>
-          <a:p>
-            <a:r>
-              <a:rPr lang="en-US" sz="2400" b="1" u="sng" dirty="0">
-                <a:latin typeface="Times New Roman" panose="02020603050405020304" charset="0"/>
-                <a:cs typeface="Times New Roman" panose="02020603050405020304" charset="0"/>
-              </a:rPr>
-              <a:t>Challenge: High Hardware Resource Demand</a:t>
-            </a:r>
-            <a:endParaRPr lang="en-US" sz="2400" b="1" u="sng" dirty="0">
-              <a:latin typeface="Times New Roman" panose="02020603050405020304" charset="0"/>
-              <a:cs typeface="Times New Roman" panose="02020603050405020304" charset="0"/>
-            </a:endParaRPr>
-          </a:p>
-          <a:p>
-            <a:r>
-              <a:rPr lang="en-US" sz="2400" dirty="0">
-                <a:latin typeface="Times New Roman" panose="02020603050405020304" charset="0"/>
-                <a:cs typeface="Times New Roman" panose="02020603050405020304" charset="0"/>
-              </a:rPr>
-              <a:t>Running the Android Studio</a:t>
-            </a:r>
-            <a:r>
-              <a:rPr lang="en-GB" altLang="en-US" sz="2400" dirty="0">
-                <a:latin typeface="Times New Roman" panose="02020603050405020304" charset="0"/>
-                <a:cs typeface="Times New Roman" panose="02020603050405020304" charset="0"/>
-              </a:rPr>
-              <a:t>’s </a:t>
-            </a:r>
-            <a:r>
-              <a:rPr lang="en-US" sz="2400" dirty="0">
-                <a:latin typeface="Times New Roman" panose="02020603050405020304" charset="0"/>
-                <a:cs typeface="Times New Roman" panose="02020603050405020304" charset="0"/>
-              </a:rPr>
-              <a:t>IDE alongside heavy virtual mobile devices (Android Emulators) took up massive amounts of memory and resources on our laptops. This slowed down development and caused frequent system freezes.</a:t>
-            </a:r>
-            <a:endParaRPr lang="en-US" sz="2400" dirty="0">
-              <a:latin typeface="Times New Roman" panose="02020603050405020304" charset="0"/>
-              <a:cs typeface="Times New Roman" panose="02020603050405020304" charset="0"/>
-            </a:endParaRPr>
-          </a:p>
-          <a:p>
-            <a:r>
-              <a:rPr lang="en-GB" altLang="en-US" sz="2400" dirty="0">
-                <a:latin typeface="Times New Roman" panose="02020603050405020304" charset="0"/>
-                <a:cs typeface="Times New Roman" panose="02020603050405020304" charset="0"/>
-              </a:rPr>
-              <a:t>As a solution,</a:t>
-            </a:r>
-            <a:r>
-              <a:rPr lang="en-US" sz="2400" dirty="0">
-                <a:latin typeface="Times New Roman" panose="02020603050405020304" charset="0"/>
-                <a:cs typeface="Times New Roman" panose="02020603050405020304" charset="0"/>
-              </a:rPr>
-              <a:t> shifted to testing and running the Flutter applications directly on our physical mobile devices via USB debugging. This bypassed the emulators entirely, freed up computer resources, and significantly sped up our code testing loop.</a:t>
-            </a:r>
-            <a:endParaRPr lang="en-US" sz="2400" dirty="0">
-              <a:latin typeface="Times New Roman" panose="02020603050405020304" charset="0"/>
-              <a:cs typeface="Times New Roman" panose="02020603050405020304" charset="0"/>
-            </a:endParaRPr>
-          </a:p>
-          <a:p>
-            <a:endParaRPr lang="en-US" sz="2400" dirty="0">
-              <a:latin typeface="Times New Roman" panose="02020603050405020304" charset="0"/>
-              <a:cs typeface="Times New Roman" panose="02020603050405020304" charset="0"/>
-            </a:endParaRPr>
-          </a:p>
-          <a:p>
-            <a:r>
-              <a:rPr lang="en-US" sz="2400" b="1" u="sng" dirty="0">
-                <a:latin typeface="Times New Roman" panose="02020603050405020304" charset="0"/>
-                <a:cs typeface="Times New Roman" panose="02020603050405020304" charset="0"/>
-              </a:rPr>
-              <a:t>Challenge: Team Database Schema Synchronization</a:t>
-            </a:r>
-            <a:r>
-              <a:rPr lang="en-GB" altLang="en-US" sz="2400" b="1" u="sng" dirty="0">
-                <a:latin typeface="Times New Roman" panose="02020603050405020304" charset="0"/>
-                <a:cs typeface="Times New Roman" panose="02020603050405020304" charset="0"/>
-              </a:rPr>
-              <a:t> </a:t>
-            </a:r>
-            <a:endParaRPr lang="en-US" sz="2400" b="1" u="sng" dirty="0">
-              <a:latin typeface="Times New Roman" panose="02020603050405020304" charset="0"/>
-              <a:cs typeface="Times New Roman" panose="02020603050405020304" charset="0"/>
-            </a:endParaRPr>
-          </a:p>
-          <a:p>
-            <a:r>
-              <a:rPr lang="en-US" sz="2400" dirty="0">
-                <a:latin typeface="Times New Roman" panose="02020603050405020304" charset="0"/>
-                <a:cs typeface="Times New Roman" panose="02020603050405020304" charset="0"/>
-              </a:rPr>
-              <a:t>Merging different git branches occasionally caused local database states to go out of sync.</a:t>
-            </a:r>
-            <a:endParaRPr lang="en-US" sz="2400" dirty="0">
-              <a:latin typeface="Times New Roman" panose="02020603050405020304" charset="0"/>
-              <a:cs typeface="Times New Roman" panose="02020603050405020304" charset="0"/>
-            </a:endParaRPr>
-          </a:p>
-          <a:p>
-            <a:r>
-              <a:rPr lang="en-GB" altLang="en-US" sz="2400" dirty="0">
-                <a:latin typeface="Times New Roman" panose="02020603050405020304" charset="0"/>
-                <a:cs typeface="Times New Roman" panose="02020603050405020304" charset="0"/>
-              </a:rPr>
-              <a:t>As a troubleshoot, we</a:t>
-            </a:r>
-            <a:r>
-              <a:rPr lang="en-US" sz="2400" dirty="0">
-                <a:latin typeface="Times New Roman" panose="02020603050405020304" charset="0"/>
-                <a:cs typeface="Times New Roman" panose="02020603050405020304" charset="0"/>
-              </a:rPr>
-              <a:t> established a strict protocol where team members ran Prisma migration synchronization commands immediately after pulling code updates.</a:t>
-            </a:r>
-            <a:endParaRPr lang="en-US" sz="2400" dirty="0">
-              <a:latin typeface="Times New Roman" panose="02020603050405020304" charset="0"/>
-              <a:cs typeface="Times New Roman" panose="02020603050405020304" charset="0"/>
-            </a:endParaRPr>
-          </a:p>
-          <a:p>
-            <a:endParaRPr lang="en-US" dirty="0">
+          <a:p>
+            <a:pPr marL="0" indent="0">
+              <a:buNone/>
+            </a:pPr>
+            <a:r>
+              <a:rPr lang="en-US" altLang="en-US" sz="3600">
+                <a:latin typeface="Times New Roman" panose="02020603050405020304" charset="0"/>
+                <a:cs typeface="Times New Roman" panose="02020603050405020304" charset="0"/>
+                <a:sym typeface="+mn-ea"/>
+              </a:rPr>
+              <a:t>Moving down a level, each Account may contain zero or many Transactions, with every Transaction belonging to exactly one Account. Categories relate to Transactions more loosely</a:t>
+            </a:r>
+            <a:r>
+              <a:rPr lang="en-GB" altLang="en-US" sz="3600">
+                <a:latin typeface="Times New Roman" panose="02020603050405020304" charset="0"/>
+                <a:cs typeface="Times New Roman" panose="02020603050405020304" charset="0"/>
+                <a:sym typeface="+mn-ea"/>
+              </a:rPr>
+              <a:t>,</a:t>
+            </a:r>
+            <a:r>
+              <a:rPr lang="en-US" altLang="en-US" sz="3600">
+                <a:latin typeface="Times New Roman" panose="02020603050405020304" charset="0"/>
+                <a:cs typeface="Times New Roman" panose="02020603050405020304" charset="0"/>
+                <a:sym typeface="+mn-ea"/>
+              </a:rPr>
+              <a:t> a Category may classify zero or many Transactions, but a Transaction only optionally belongs to a Category, meaning it can exist uncategorized. </a:t>
+            </a:r>
+            <a:endParaRPr lang="en-US" altLang="en-US" sz="3600">
+              <a:latin typeface="Times New Roman" panose="02020603050405020304" charset="0"/>
+              <a:cs typeface="Times New Roman" panose="02020603050405020304" charset="0"/>
+              <a:sym typeface="+mn-ea"/>
+            </a:endParaRPr>
+          </a:p>
+          <a:p>
+            <a:pPr marL="0" indent="0">
+              <a:buNone/>
+            </a:pPr>
+            <a:r>
+              <a:rPr lang="en-US" altLang="en-US" sz="3600">
+                <a:latin typeface="Times New Roman" panose="02020603050405020304" charset="0"/>
+                <a:cs typeface="Times New Roman" panose="02020603050405020304" charset="0"/>
+                <a:sym typeface="+mn-ea"/>
+              </a:rPr>
+              <a:t>Finally, Categories and Budgets have an optional one-to-one relationship: a Category may optionally scope one Budget, and a Budget may optionally scope to one Category — where a NULL value indicates the Budget is an overall budget rather than one tied to a specific category.</a:t>
+            </a:r>
+            <a:endParaRPr lang="en-US" altLang="en-US" sz="3600">
+              <a:latin typeface="Times New Roman" panose="02020603050405020304" charset="0"/>
+              <a:cs typeface="Times New Roman" panose="02020603050405020304" charset="0"/>
+            </a:endParaRPr>
+          </a:p>
+          <a:p>
+            <a:pPr marL="0" indent="0">
+              <a:buNone/>
+            </a:pPr>
+            <a:endParaRPr lang="en-US" sz="3600">
               <a:latin typeface="Times New Roman" panose="02020603050405020304" charset="0"/>
               <a:cs typeface="Times New Roman" panose="02020603050405020304" charset="0"/>
             </a:endParaRPr>
@@ -4139,18 +3986,6 @@
   <p:clrMapOvr>
     <a:masterClrMapping/>
   </p:clrMapOvr>
-  <mc:AlternateContent xmlns:mc="http://schemas.openxmlformats.org/markup-compatibility/2006">
-    <mc:Choice xmlns:p14="http://schemas.microsoft.com/office/powerpoint/2010/main" Requires="p14">
-      <p:transition spd="slow" p14:dur="3400">
-        <p14:reveal/>
-      </p:transition>
-    </mc:Choice>
-    <mc:Fallback>
-      <p:transition spd="slow">
-        <p:fade/>
-      </p:transition>
-    </mc:Fallback>
-  </mc:AlternateContent>
 </p:sld>
 </file>
 
@@ -4179,8 +4014,8 @@
         </p:nvSpPr>
         <p:spPr>
           <a:xfrm>
-            <a:off x="228600" y="160020"/>
-            <a:ext cx="11544300" cy="6438900"/>
+            <a:off x="546100" y="317500"/>
+            <a:ext cx="10820400" cy="4831080"/>
           </a:xfrm>
           <a:prstGeom prst="rect">
             <a:avLst/>
@@ -4189,314 +4024,116 @@
         </p:spPr>
         <p:txBody>
           <a:bodyPr wrap="square" rtlCol="0">
-            <a:noAutofit/>
+            <a:spAutoFit/>
           </a:bodyPr>
           <a:lstStyle/>
           <a:p>
             <a:r>
-              <a:rPr lang="en-US" altLang="en-US" sz="2800" b="1" u="sng" dirty="0">
-                <a:latin typeface="Times New Roman" panose="02020603050405020304" charset="0"/>
-                <a:cs typeface="Times New Roman" panose="02020603050405020304" charset="0"/>
-              </a:rPr>
-              <a:t>Future Considerations</a:t>
-            </a:r>
-            <a:endParaRPr lang="en-US" altLang="en-US" sz="2800" dirty="0">
-              <a:latin typeface="Times New Roman" panose="02020603050405020304" charset="0"/>
-              <a:cs typeface="Times New Roman" panose="02020603050405020304" charset="0"/>
-            </a:endParaRPr>
-          </a:p>
-          <a:p>
-            <a:r>
-              <a:rPr lang="en-US" altLang="en-US" sz="2800" b="1" dirty="0">
-                <a:latin typeface="Times New Roman" panose="02020603050405020304" charset="0"/>
-                <a:cs typeface="Times New Roman" panose="02020603050405020304" charset="0"/>
-              </a:rPr>
-              <a:t>Scalability</a:t>
-            </a:r>
-            <a:r>
-              <a:rPr lang="en-GB" altLang="en-US" sz="2800" b="1" dirty="0">
-                <a:latin typeface="Times New Roman" panose="02020603050405020304" charset="0"/>
-                <a:cs typeface="Times New Roman" panose="02020603050405020304" charset="0"/>
-              </a:rPr>
-              <a:t> and </a:t>
-            </a:r>
-            <a:r>
-              <a:rPr lang="en-US" altLang="en-US" sz="2800" b="1" dirty="0">
-                <a:latin typeface="Times New Roman" panose="02020603050405020304" charset="0"/>
-                <a:cs typeface="Times New Roman" panose="02020603050405020304" charset="0"/>
-              </a:rPr>
-              <a:t>Containerization</a:t>
-            </a:r>
-            <a:r>
-              <a:rPr lang="en-GB" altLang="en-US" sz="2800" b="1" dirty="0">
-                <a:latin typeface="Times New Roman" panose="02020603050405020304" charset="0"/>
-                <a:cs typeface="Times New Roman" panose="02020603050405020304" charset="0"/>
-              </a:rPr>
-              <a:t>. </a:t>
-            </a:r>
-            <a:r>
-              <a:rPr lang="en-US" altLang="en-US" sz="2800" dirty="0">
-                <a:latin typeface="Times New Roman" panose="02020603050405020304" charset="0"/>
-                <a:cs typeface="Times New Roman" panose="02020603050405020304" charset="0"/>
-              </a:rPr>
-              <a:t>Package backend services in Docker to standardize the runtime environment and simplify moving between hosting providers</a:t>
-            </a:r>
-            <a:r>
-              <a:rPr lang="en-GB" altLang="en-US" sz="2800" dirty="0">
-                <a:latin typeface="Times New Roman" panose="02020603050405020304" charset="0"/>
-                <a:cs typeface="Times New Roman" panose="02020603050405020304" charset="0"/>
-              </a:rPr>
-              <a:t>.</a:t>
-            </a:r>
-            <a:endParaRPr lang="en-US" altLang="en-US" sz="2800" dirty="0">
-              <a:latin typeface="Times New Roman" panose="02020603050405020304" charset="0"/>
-              <a:cs typeface="Times New Roman" panose="02020603050405020304" charset="0"/>
-            </a:endParaRPr>
-          </a:p>
-          <a:p>
-            <a:r>
-              <a:rPr lang="en-US" altLang="en-US" sz="2800" b="1" dirty="0">
-                <a:latin typeface="Times New Roman" panose="02020603050405020304" charset="0"/>
-                <a:cs typeface="Times New Roman" panose="02020603050405020304" charset="0"/>
-              </a:rPr>
-              <a:t>Tech Stack </a:t>
-            </a:r>
-            <a:r>
-              <a:rPr lang="en-GB" altLang="en-US" sz="2800" b="1" dirty="0">
-                <a:latin typeface="Times New Roman" panose="02020603050405020304" charset="0"/>
-                <a:cs typeface="Times New Roman" panose="02020603050405020304" charset="0"/>
-              </a:rPr>
-              <a:t>changes and evolution. </a:t>
-            </a:r>
-            <a:r>
-              <a:rPr lang="en-US" altLang="en-US" sz="2800" dirty="0">
-                <a:latin typeface="Times New Roman" panose="02020603050405020304" charset="0"/>
-                <a:cs typeface="Times New Roman" panose="02020603050405020304" charset="0"/>
-              </a:rPr>
-              <a:t>Migrate</a:t>
-            </a:r>
-            <a:r>
-              <a:rPr lang="en-GB" altLang="en-US" sz="2800" dirty="0">
-                <a:latin typeface="Times New Roman" panose="02020603050405020304" charset="0"/>
-                <a:cs typeface="Times New Roman" panose="02020603050405020304" charset="0"/>
-              </a:rPr>
-              <a:t> from</a:t>
-            </a:r>
-            <a:r>
-              <a:rPr lang="en-US" altLang="en-US" sz="2800" dirty="0">
-                <a:latin typeface="Times New Roman" panose="02020603050405020304" charset="0"/>
-                <a:cs typeface="Times New Roman" panose="02020603050405020304" charset="0"/>
-              </a:rPr>
-              <a:t> MySQL</a:t>
-            </a:r>
-            <a:r>
-              <a:rPr lang="en-GB" altLang="en-US" sz="2800" dirty="0">
-                <a:latin typeface="Times New Roman" panose="02020603050405020304" charset="0"/>
-                <a:cs typeface="Times New Roman" panose="02020603050405020304" charset="0"/>
-              </a:rPr>
-              <a:t> to </a:t>
-            </a:r>
-            <a:r>
-              <a:rPr lang="en-US" altLang="en-US" sz="2800" dirty="0">
-                <a:latin typeface="Times New Roman" panose="02020603050405020304" charset="0"/>
-                <a:cs typeface="Times New Roman" panose="02020603050405020304" charset="0"/>
-              </a:rPr>
-              <a:t>PostgreSQL for better performance on growing transaction history; evaluate Postgres-native hosts (Render, Supabase</a:t>
-            </a:r>
-            <a:r>
-              <a:rPr lang="en-GB" altLang="en-US" sz="2800" dirty="0">
-                <a:latin typeface="Times New Roman" panose="02020603050405020304" charset="0"/>
-                <a:cs typeface="Times New Roman" panose="02020603050405020304" charset="0"/>
-              </a:rPr>
-              <a:t>, Firebase</a:t>
-            </a:r>
-            <a:r>
-              <a:rPr lang="en-US" altLang="en-US" sz="2800" dirty="0">
-                <a:latin typeface="Times New Roman" panose="02020603050405020304" charset="0"/>
-                <a:cs typeface="Times New Roman" panose="02020603050405020304" charset="0"/>
-              </a:rPr>
-              <a:t>) as Railway alternatives</a:t>
-            </a:r>
-            <a:r>
-              <a:rPr lang="en-GB" altLang="en-US" sz="2800" dirty="0">
-                <a:latin typeface="Times New Roman" panose="02020603050405020304" charset="0"/>
-                <a:cs typeface="Times New Roman" panose="02020603050405020304" charset="0"/>
-              </a:rPr>
-              <a:t> for backend hosting.</a:t>
-            </a:r>
-            <a:endParaRPr lang="en-US" altLang="en-US" sz="2800" dirty="0">
-              <a:latin typeface="Times New Roman" panose="02020603050405020304" charset="0"/>
-              <a:cs typeface="Times New Roman" panose="02020603050405020304" charset="0"/>
-            </a:endParaRPr>
-          </a:p>
-          <a:p>
-            <a:r>
-              <a:rPr lang="en-US" altLang="en-US" sz="2800" b="1" dirty="0">
-                <a:latin typeface="Times New Roman" panose="02020603050405020304" charset="0"/>
-                <a:cs typeface="Times New Roman" panose="02020603050405020304" charset="0"/>
-              </a:rPr>
-              <a:t>App Distribution</a:t>
-            </a:r>
-            <a:r>
-              <a:rPr lang="en-GB" altLang="en-US" sz="2800" b="1" dirty="0">
-                <a:latin typeface="Times New Roman" panose="02020603050405020304" charset="0"/>
-                <a:cs typeface="Times New Roman" panose="02020603050405020304" charset="0"/>
-              </a:rPr>
-              <a:t>.</a:t>
-            </a:r>
-            <a:r>
-              <a:rPr lang="en-US" altLang="en-US" sz="2800" dirty="0">
-                <a:latin typeface="Times New Roman" panose="02020603050405020304" charset="0"/>
-                <a:cs typeface="Times New Roman" panose="02020603050405020304" charset="0"/>
-              </a:rPr>
-              <a:t> Move from </a:t>
-            </a:r>
-            <a:r>
-              <a:rPr lang="en-GB" altLang="en-US" sz="2800" dirty="0">
-                <a:latin typeface="Times New Roman" panose="02020603050405020304" charset="0"/>
-                <a:cs typeface="Times New Roman" panose="02020603050405020304" charset="0"/>
-              </a:rPr>
-              <a:t>usb-debuging</a:t>
-            </a:r>
-            <a:r>
-              <a:rPr lang="en-US" altLang="en-US" sz="2800" dirty="0">
-                <a:latin typeface="Times New Roman" panose="02020603050405020304" charset="0"/>
-                <a:cs typeface="Times New Roman" panose="02020603050405020304" charset="0"/>
-              </a:rPr>
-              <a:t> </a:t>
-            </a:r>
-            <a:r>
-              <a:rPr lang="en-GB" altLang="en-US" sz="2800" dirty="0">
-                <a:latin typeface="Times New Roman" panose="02020603050405020304" charset="0"/>
-                <a:cs typeface="Times New Roman" panose="02020603050405020304" charset="0"/>
-              </a:rPr>
-              <a:t>for installation</a:t>
-            </a:r>
-            <a:r>
-              <a:rPr lang="en-US" altLang="en-US" sz="2800" dirty="0">
-                <a:latin typeface="Times New Roman" panose="02020603050405020304" charset="0"/>
-                <a:cs typeface="Times New Roman" panose="02020603050405020304" charset="0"/>
-              </a:rPr>
-              <a:t> to direct APK distribution (Firebase App Distribution </a:t>
-            </a:r>
-            <a:r>
-              <a:rPr lang="en-GB" altLang="en-US" sz="2800" dirty="0">
-                <a:latin typeface="Times New Roman" panose="02020603050405020304" charset="0"/>
-                <a:cs typeface="Times New Roman" panose="02020603050405020304" charset="0"/>
-              </a:rPr>
-              <a:t>or even</a:t>
-            </a:r>
-            <a:r>
-              <a:rPr lang="en-US" altLang="en-US" sz="2800" dirty="0">
-                <a:latin typeface="Times New Roman" panose="02020603050405020304" charset="0"/>
-                <a:cs typeface="Times New Roman" panose="02020603050405020304" charset="0"/>
-              </a:rPr>
-              <a:t> Google Play internal testing) so users can install Malihub on </a:t>
-            </a:r>
-            <a:r>
-              <a:rPr lang="en-GB" altLang="en-US" sz="2800" dirty="0">
-                <a:latin typeface="Times New Roman" panose="02020603050405020304" charset="0"/>
-                <a:cs typeface="Times New Roman" panose="02020603050405020304" charset="0"/>
-              </a:rPr>
-              <a:t>their</a:t>
-            </a:r>
-            <a:r>
-              <a:rPr lang="en-US" altLang="en-US" sz="2800" dirty="0">
-                <a:latin typeface="Times New Roman" panose="02020603050405020304" charset="0"/>
-                <a:cs typeface="Times New Roman" panose="02020603050405020304" charset="0"/>
-              </a:rPr>
-              <a:t> device</a:t>
-            </a:r>
-            <a:r>
-              <a:rPr lang="en-GB" altLang="en-US" sz="2800" dirty="0">
-                <a:latin typeface="Times New Roman" panose="02020603050405020304" charset="0"/>
-                <a:cs typeface="Times New Roman" panose="02020603050405020304" charset="0"/>
-              </a:rPr>
-              <a:t>s</a:t>
-            </a:r>
-            <a:r>
-              <a:rPr lang="en-US" altLang="en-US" sz="2800" dirty="0">
-                <a:latin typeface="Times New Roman" panose="02020603050405020304" charset="0"/>
-                <a:cs typeface="Times New Roman" panose="02020603050405020304" charset="0"/>
-              </a:rPr>
-              <a:t> </a:t>
-            </a:r>
-            <a:r>
-              <a:rPr lang="en-GB" sz="2800" dirty="0">
-                <a:latin typeface="Times New Roman" panose="02020603050405020304" charset="0"/>
-                <a:cs typeface="Times New Roman" panose="02020603050405020304" charset="0"/>
-              </a:rPr>
-              <a:t>conveniently.</a:t>
-            </a:r>
-            <a:endParaRPr lang="en-US" altLang="en-US" sz="2800" dirty="0">
-              <a:latin typeface="Times New Roman" panose="02020603050405020304" charset="0"/>
-              <a:cs typeface="Times New Roman" panose="02020603050405020304" charset="0"/>
-            </a:endParaRPr>
-          </a:p>
-          <a:p>
-            <a:r>
-              <a:rPr lang="en-US" altLang="en-US" sz="2800" b="1" dirty="0">
-                <a:latin typeface="Times New Roman" panose="02020603050405020304" charset="0"/>
-                <a:cs typeface="Times New Roman" panose="02020603050405020304" charset="0"/>
-              </a:rPr>
-              <a:t>Automated Safeguards</a:t>
-            </a:r>
-            <a:r>
-              <a:rPr lang="en-US" altLang="en-US" sz="2800" dirty="0">
-                <a:latin typeface="Times New Roman" panose="02020603050405020304" charset="0"/>
-                <a:cs typeface="Times New Roman" panose="02020603050405020304" charset="0"/>
-              </a:rPr>
-              <a:t>: Introduce unit and integration tests for financial calculations, run automatically before every deployment</a:t>
-            </a:r>
-            <a:r>
-              <a:rPr lang="en-GB" altLang="en-US" sz="2800" dirty="0">
-                <a:latin typeface="Times New Roman" panose="02020603050405020304" charset="0"/>
-                <a:cs typeface="Times New Roman" panose="02020603050405020304" charset="0"/>
-              </a:rPr>
-              <a:t>.</a:t>
-            </a:r>
-            <a:endParaRPr lang="en-GB" altLang="en-US" sz="2800" dirty="0">
-              <a:latin typeface="Times New Roman" panose="02020603050405020304" charset="0"/>
-              <a:cs typeface="Times New Roman" panose="02020603050405020304" charset="0"/>
-            </a:endParaRPr>
-          </a:p>
-          <a:p>
-            <a:r>
-              <a:rPr lang="en-US" altLang="en-US" sz="2800" b="1" dirty="0">
-                <a:latin typeface="Times New Roman" panose="02020603050405020304" charset="0"/>
-                <a:cs typeface="Times New Roman" panose="02020603050405020304" charset="0"/>
-              </a:rPr>
-              <a:t>Automated Insights</a:t>
-            </a:r>
-            <a:r>
-              <a:rPr lang="en-US" altLang="en-US" sz="2800" dirty="0">
-                <a:latin typeface="Times New Roman" panose="02020603050405020304" charset="0"/>
-                <a:cs typeface="Times New Roman" panose="02020603050405020304" charset="0"/>
-              </a:rPr>
-              <a:t>: Analyze historical transaction data to auto-generate spending summaries, budget</a:t>
-            </a:r>
-            <a:r>
-              <a:rPr lang="en-GB" altLang="en-US" sz="2800" dirty="0">
-                <a:latin typeface="Times New Roman" panose="02020603050405020304" charset="0"/>
-                <a:cs typeface="Times New Roman" panose="02020603050405020304" charset="0"/>
-              </a:rPr>
-              <a:t> against </a:t>
-            </a:r>
-            <a:r>
-              <a:rPr lang="en-US" altLang="en-US" sz="2800" dirty="0">
-                <a:latin typeface="Times New Roman" panose="02020603050405020304" charset="0"/>
-                <a:cs typeface="Times New Roman" panose="02020603050405020304" charset="0"/>
-              </a:rPr>
-              <a:t>actual alerts, and goal progress forecasts</a:t>
-            </a:r>
-            <a:r>
-              <a:rPr lang="en-GB" altLang="en-US" sz="2800" dirty="0">
-                <a:latin typeface="Times New Roman" panose="02020603050405020304" charset="0"/>
-                <a:cs typeface="Times New Roman" panose="02020603050405020304" charset="0"/>
-              </a:rPr>
-              <a:t>.</a:t>
-            </a:r>
-            <a:endParaRPr lang="en-GB" altLang="en-US" sz="2800" dirty="0">
+              <a:rPr lang="en-US" sz="2800" b="1" u="sng" dirty="0">
+                <a:latin typeface="Times New Roman" panose="02020603050405020304" charset="0"/>
+                <a:cs typeface="Times New Roman" panose="02020603050405020304" charset="0"/>
+              </a:rPr>
+              <a:t>Design System</a:t>
+            </a:r>
+            <a:endParaRPr lang="en-US" sz="2800" b="1" u="sng" dirty="0">
+              <a:latin typeface="Times New Roman" panose="02020603050405020304" charset="0"/>
+              <a:cs typeface="Times New Roman" panose="02020603050405020304" charset="0"/>
+            </a:endParaRPr>
+          </a:p>
+          <a:p>
+            <a:endParaRPr lang="en-US" sz="2800" b="1" u="sng" dirty="0">
+              <a:latin typeface="Times New Roman" panose="02020603050405020304" charset="0"/>
+              <a:cs typeface="Times New Roman" panose="02020603050405020304" charset="0"/>
+            </a:endParaRPr>
+          </a:p>
+          <a:p>
+            <a:r>
+              <a:rPr lang="en-US" sz="2800" b="1" dirty="0">
+                <a:latin typeface="Times New Roman" panose="02020603050405020304" charset="0"/>
+                <a:cs typeface="Times New Roman" panose="02020603050405020304" charset="0"/>
+              </a:rPr>
+              <a:t>Visual Direction:</a:t>
+            </a:r>
+            <a:r>
+              <a:rPr lang="en-US" sz="2800" dirty="0">
+                <a:latin typeface="Times New Roman" panose="02020603050405020304" charset="0"/>
+                <a:cs typeface="Times New Roman" panose="02020603050405020304" charset="0"/>
+              </a:rPr>
+              <a:t> Kept clean and minimalist to focus completely on readability.</a:t>
+            </a:r>
+            <a:endParaRPr lang="en-US" sz="2800" dirty="0">
+              <a:latin typeface="Times New Roman" panose="02020603050405020304" charset="0"/>
+              <a:cs typeface="Times New Roman" panose="02020603050405020304" charset="0"/>
+            </a:endParaRPr>
+          </a:p>
+          <a:p>
+            <a:endParaRPr lang="en-US" sz="2800" dirty="0">
+              <a:latin typeface="Times New Roman" panose="02020603050405020304" charset="0"/>
+              <a:cs typeface="Times New Roman" panose="02020603050405020304" charset="0"/>
+            </a:endParaRPr>
+          </a:p>
+          <a:p>
+            <a:r>
+              <a:rPr lang="en-US" sz="2800" b="1" u="sng" dirty="0">
+                <a:latin typeface="Times New Roman" panose="02020603050405020304" charset="0"/>
+                <a:cs typeface="Times New Roman" panose="02020603050405020304" charset="0"/>
+              </a:rPr>
+              <a:t>Color Palette Rules</a:t>
+            </a:r>
+            <a:endParaRPr lang="en-US" sz="2800" b="1" u="sng" dirty="0">
+              <a:latin typeface="Times New Roman" panose="02020603050405020304" charset="0"/>
+              <a:cs typeface="Times New Roman" panose="02020603050405020304" charset="0"/>
+            </a:endParaRPr>
+          </a:p>
+          <a:p>
+            <a:r>
+              <a:rPr lang="en-US" sz="2800" dirty="0">
+                <a:latin typeface="Times New Roman" panose="02020603050405020304" charset="0"/>
+                <a:cs typeface="Times New Roman" panose="02020603050405020304" charset="0"/>
+              </a:rPr>
+              <a:t>Green: Used intentionally for positive balances and income logs.</a:t>
+            </a:r>
+            <a:endParaRPr lang="en-US" sz="2800" dirty="0">
+              <a:latin typeface="Times New Roman" panose="02020603050405020304" charset="0"/>
+              <a:cs typeface="Times New Roman" panose="02020603050405020304" charset="0"/>
+            </a:endParaRPr>
+          </a:p>
+          <a:p>
+            <a:r>
+              <a:rPr lang="en-US" sz="2800" dirty="0">
+                <a:latin typeface="Times New Roman" panose="02020603050405020304" charset="0"/>
+                <a:cs typeface="Times New Roman" panose="02020603050405020304" charset="0"/>
+              </a:rPr>
+              <a:t>Red: Used to highlight expenses and budget limits.</a:t>
+            </a:r>
+            <a:endParaRPr lang="en-US" sz="2800" dirty="0">
+              <a:latin typeface="Times New Roman" panose="02020603050405020304" charset="0"/>
+              <a:cs typeface="Times New Roman" panose="02020603050405020304" charset="0"/>
+            </a:endParaRPr>
+          </a:p>
+          <a:p>
+            <a:pPr lvl="1"/>
+            <a:endParaRPr lang="en-US" sz="2800" dirty="0">
+              <a:latin typeface="Times New Roman" panose="02020603050405020304" charset="0"/>
+              <a:cs typeface="Times New Roman" panose="02020603050405020304" charset="0"/>
+            </a:endParaRPr>
+          </a:p>
+          <a:p>
+            <a:r>
+              <a:rPr lang="en-US" sz="2800" b="1" dirty="0">
+                <a:latin typeface="Times New Roman" panose="02020603050405020304" charset="0"/>
+                <a:cs typeface="Times New Roman" panose="02020603050405020304" charset="0"/>
+              </a:rPr>
+              <a:t>Typography:</a:t>
+            </a:r>
+            <a:r>
+              <a:rPr lang="en-US" sz="2800" dirty="0">
+                <a:latin typeface="Times New Roman" panose="02020603050405020304" charset="0"/>
+                <a:cs typeface="Times New Roman" panose="02020603050405020304" charset="0"/>
+              </a:rPr>
+              <a:t> Uses standard, highly legible text sizes for clear data scanning on mobile screens.</a:t>
+            </a:r>
+            <a:endParaRPr lang="en-US" sz="2800" dirty="0">
               <a:latin typeface="Times New Roman" panose="02020603050405020304" charset="0"/>
               <a:cs typeface="Times New Roman" panose="02020603050405020304" charset="0"/>
             </a:endParaRPr>
@@ -4524,6 +4161,585 @@
 </file>
 
 <file path=ppt/slides/slide13.xml><?xml version="1.0" encoding="utf-8"?>
+<p:sld xmlns:a="http://schemas.openxmlformats.org/drawingml/2006/main" xmlns:r="http://schemas.openxmlformats.org/officeDocument/2006/relationships" xmlns:p="http://schemas.openxmlformats.org/presentationml/2006/main">
+  <p:cSld>
+    <p:spTree>
+      <p:nvGrpSpPr>
+        <p:cNvPr id="1" name=""/>
+        <p:cNvGrpSpPr/>
+        <p:nvPr/>
+      </p:nvGrpSpPr>
+      <p:grpSpPr>
+        <a:xfrm>
+          <a:off x="0" y="0"/>
+          <a:ext cx="0" cy="0"/>
+          <a:chOff x="0" y="0"/>
+          <a:chExt cx="0" cy="0"/>
+        </a:xfrm>
+      </p:grpSpPr>
+      <p:sp>
+        <p:nvSpPr>
+          <p:cNvPr id="2" name="TextBox 1"/>
+          <p:cNvSpPr txBox="1"/>
+          <p:nvPr/>
+        </p:nvSpPr>
+        <p:spPr>
+          <a:xfrm>
+            <a:off x="101600" y="0"/>
+            <a:ext cx="11988800" cy="6433820"/>
+          </a:xfrm>
+          <a:prstGeom prst="rect">
+            <a:avLst/>
+          </a:prstGeom>
+          <a:noFill/>
+        </p:spPr>
+        <p:txBody>
+          <a:bodyPr wrap="square" rtlCol="0">
+            <a:noAutofit/>
+          </a:bodyPr>
+          <a:lstStyle/>
+          <a:p>
+            <a:endParaRPr lang="en-US" sz="2400" b="1" u="sng" dirty="0">
+              <a:latin typeface="Times New Roman" panose="02020603050405020304" charset="0"/>
+              <a:cs typeface="Times New Roman" panose="02020603050405020304" charset="0"/>
+            </a:endParaRPr>
+          </a:p>
+          <a:p>
+            <a:r>
+              <a:rPr lang="en-US" sz="2400" b="1" u="sng" dirty="0">
+                <a:latin typeface="Times New Roman" panose="02020603050405020304" charset="0"/>
+                <a:cs typeface="Times New Roman" panose="02020603050405020304" charset="0"/>
+              </a:rPr>
+              <a:t>Technical Challenges &amp; Solutions</a:t>
+            </a:r>
+            <a:endParaRPr lang="en-US" sz="2400" b="1" u="sng" dirty="0">
+              <a:latin typeface="Times New Roman" panose="02020603050405020304" charset="0"/>
+              <a:cs typeface="Times New Roman" panose="02020603050405020304" charset="0"/>
+            </a:endParaRPr>
+          </a:p>
+          <a:p>
+            <a:endParaRPr lang="en-US" sz="2400" b="1" u="sng" dirty="0">
+              <a:latin typeface="Times New Roman" panose="02020603050405020304" charset="0"/>
+              <a:cs typeface="Times New Roman" panose="02020603050405020304" charset="0"/>
+            </a:endParaRPr>
+          </a:p>
+          <a:p>
+            <a:r>
+              <a:rPr lang="en-US" sz="2400" b="1" u="sng" dirty="0">
+                <a:latin typeface="Times New Roman" panose="02020603050405020304" charset="0"/>
+                <a:cs typeface="Times New Roman" panose="02020603050405020304" charset="0"/>
+              </a:rPr>
+              <a:t>Challenge: High Hardware Resource Demand</a:t>
+            </a:r>
+            <a:endParaRPr lang="en-US" sz="2400" b="1" u="sng" dirty="0">
+              <a:latin typeface="Times New Roman" panose="02020603050405020304" charset="0"/>
+              <a:cs typeface="Times New Roman" panose="02020603050405020304" charset="0"/>
+            </a:endParaRPr>
+          </a:p>
+          <a:p>
+            <a:r>
+              <a:rPr lang="en-US" sz="2400" dirty="0">
+                <a:latin typeface="Times New Roman" panose="02020603050405020304" charset="0"/>
+                <a:cs typeface="Times New Roman" panose="02020603050405020304" charset="0"/>
+              </a:rPr>
+              <a:t>Running the Android Studio</a:t>
+            </a:r>
+            <a:r>
+              <a:rPr lang="en-GB" altLang="en-US" sz="2400" dirty="0">
+                <a:latin typeface="Times New Roman" panose="02020603050405020304" charset="0"/>
+                <a:cs typeface="Times New Roman" panose="02020603050405020304" charset="0"/>
+              </a:rPr>
+              <a:t>’s </a:t>
+            </a:r>
+            <a:r>
+              <a:rPr lang="en-US" sz="2400" dirty="0">
+                <a:latin typeface="Times New Roman" panose="02020603050405020304" charset="0"/>
+                <a:cs typeface="Times New Roman" panose="02020603050405020304" charset="0"/>
+              </a:rPr>
+              <a:t>IDE alongside heavy virtual mobile devices (Android Emulators) took up massive amounts of memory and resources on our laptops. This slowed down development and caused frequent system freezes.</a:t>
+            </a:r>
+            <a:endParaRPr lang="en-US" sz="2400" dirty="0">
+              <a:latin typeface="Times New Roman" panose="02020603050405020304" charset="0"/>
+              <a:cs typeface="Times New Roman" panose="02020603050405020304" charset="0"/>
+            </a:endParaRPr>
+          </a:p>
+          <a:p>
+            <a:r>
+              <a:rPr lang="en-GB" altLang="en-US" sz="2400" dirty="0">
+                <a:latin typeface="Times New Roman" panose="02020603050405020304" charset="0"/>
+                <a:cs typeface="Times New Roman" panose="02020603050405020304" charset="0"/>
+              </a:rPr>
+              <a:t>As a solution,</a:t>
+            </a:r>
+            <a:r>
+              <a:rPr lang="en-US" sz="2400" dirty="0">
+                <a:latin typeface="Times New Roman" panose="02020603050405020304" charset="0"/>
+                <a:cs typeface="Times New Roman" panose="02020603050405020304" charset="0"/>
+              </a:rPr>
+              <a:t> shifted to testing and running the Flutter applications directly on our physical mobile devices via USB debugging. This bypassed the emulators entirely, freed up computer resources, and significantly sped up our code testing loop.</a:t>
+            </a:r>
+            <a:endParaRPr lang="en-US" sz="2400" dirty="0">
+              <a:latin typeface="Times New Roman" panose="02020603050405020304" charset="0"/>
+              <a:cs typeface="Times New Roman" panose="02020603050405020304" charset="0"/>
+            </a:endParaRPr>
+          </a:p>
+          <a:p>
+            <a:endParaRPr lang="en-US" sz="2400" dirty="0">
+              <a:latin typeface="Times New Roman" panose="02020603050405020304" charset="0"/>
+              <a:cs typeface="Times New Roman" panose="02020603050405020304" charset="0"/>
+            </a:endParaRPr>
+          </a:p>
+          <a:p>
+            <a:r>
+              <a:rPr lang="en-US" sz="2400" b="1" u="sng" dirty="0">
+                <a:latin typeface="Times New Roman" panose="02020603050405020304" charset="0"/>
+                <a:cs typeface="Times New Roman" panose="02020603050405020304" charset="0"/>
+              </a:rPr>
+              <a:t>Challenge: Team Database Schema Synchronization</a:t>
+            </a:r>
+            <a:r>
+              <a:rPr lang="en-GB" altLang="en-US" sz="2400" b="1" u="sng" dirty="0">
+                <a:latin typeface="Times New Roman" panose="02020603050405020304" charset="0"/>
+                <a:cs typeface="Times New Roman" panose="02020603050405020304" charset="0"/>
+              </a:rPr>
+              <a:t> </a:t>
+            </a:r>
+            <a:endParaRPr lang="en-US" sz="2400" b="1" u="sng" dirty="0">
+              <a:latin typeface="Times New Roman" panose="02020603050405020304" charset="0"/>
+              <a:cs typeface="Times New Roman" panose="02020603050405020304" charset="0"/>
+            </a:endParaRPr>
+          </a:p>
+          <a:p>
+            <a:r>
+              <a:rPr lang="en-US" sz="2400" dirty="0">
+                <a:latin typeface="Times New Roman" panose="02020603050405020304" charset="0"/>
+                <a:cs typeface="Times New Roman" panose="02020603050405020304" charset="0"/>
+              </a:rPr>
+              <a:t>Merging different git branches occasionally caused local database states to go out of sync.</a:t>
+            </a:r>
+            <a:endParaRPr lang="en-US" sz="2400" dirty="0">
+              <a:latin typeface="Times New Roman" panose="02020603050405020304" charset="0"/>
+              <a:cs typeface="Times New Roman" panose="02020603050405020304" charset="0"/>
+            </a:endParaRPr>
+          </a:p>
+          <a:p>
+            <a:r>
+              <a:rPr lang="en-GB" altLang="en-US" sz="2400" dirty="0">
+                <a:latin typeface="Times New Roman" panose="02020603050405020304" charset="0"/>
+                <a:cs typeface="Times New Roman" panose="02020603050405020304" charset="0"/>
+              </a:rPr>
+              <a:t>As a troubleshoot, we</a:t>
+            </a:r>
+            <a:r>
+              <a:rPr lang="en-US" sz="2400" dirty="0">
+                <a:latin typeface="Times New Roman" panose="02020603050405020304" charset="0"/>
+                <a:cs typeface="Times New Roman" panose="02020603050405020304" charset="0"/>
+              </a:rPr>
+              <a:t> established a strict protocol where team members ran Prisma migration synchronization commands immediately after pulling code updates.</a:t>
+            </a:r>
+            <a:endParaRPr lang="en-US" sz="2400" dirty="0">
+              <a:latin typeface="Times New Roman" panose="02020603050405020304" charset="0"/>
+              <a:cs typeface="Times New Roman" panose="02020603050405020304" charset="0"/>
+            </a:endParaRPr>
+          </a:p>
+          <a:p>
+            <a:endParaRPr lang="en-US" dirty="0">
+              <a:latin typeface="Times New Roman" panose="02020603050405020304" charset="0"/>
+              <a:cs typeface="Times New Roman" panose="02020603050405020304" charset="0"/>
+            </a:endParaRPr>
+          </a:p>
+        </p:txBody>
+      </p:sp>
+    </p:spTree>
+  </p:cSld>
+  <p:clrMapOvr>
+    <a:masterClrMapping/>
+  </p:clrMapOvr>
+  <mc:AlternateContent xmlns:mc="http://schemas.openxmlformats.org/markup-compatibility/2006">
+    <mc:Choice xmlns:p14="http://schemas.microsoft.com/office/powerpoint/2010/main" Requires="p14">
+      <p:transition spd="slow" p14:dur="3400">
+        <p14:reveal/>
+      </p:transition>
+    </mc:Choice>
+    <mc:Fallback>
+      <p:transition spd="slow">
+        <p:fade/>
+      </p:transition>
+    </mc:Fallback>
+  </mc:AlternateContent>
+</p:sld>
+</file>
+
+<file path=ppt/slides/slide14.xml><?xml version="1.0" encoding="utf-8"?>
+<p:sld xmlns:a="http://schemas.openxmlformats.org/drawingml/2006/main" xmlns:r="http://schemas.openxmlformats.org/officeDocument/2006/relationships" xmlns:p="http://schemas.openxmlformats.org/presentationml/2006/main">
+  <p:cSld>
+    <p:spTree>
+      <p:nvGrpSpPr>
+        <p:cNvPr id="1" name=""/>
+        <p:cNvGrpSpPr/>
+        <p:nvPr/>
+      </p:nvGrpSpPr>
+      <p:grpSpPr>
+        <a:xfrm>
+          <a:off x="0" y="0"/>
+          <a:ext cx="0" cy="0"/>
+          <a:chOff x="0" y="0"/>
+          <a:chExt cx="0" cy="0"/>
+        </a:xfrm>
+      </p:grpSpPr>
+      <p:sp>
+        <p:nvSpPr>
+          <p:cNvPr id="2" name="TextBox 1"/>
+          <p:cNvSpPr txBox="1"/>
+          <p:nvPr/>
+        </p:nvSpPr>
+        <p:spPr>
+          <a:xfrm>
+            <a:off x="228600" y="160020"/>
+            <a:ext cx="11544300" cy="6438900"/>
+          </a:xfrm>
+          <a:prstGeom prst="rect">
+            <a:avLst/>
+          </a:prstGeom>
+          <a:noFill/>
+        </p:spPr>
+        <p:txBody>
+          <a:bodyPr wrap="square" rtlCol="0">
+            <a:noAutofit/>
+          </a:bodyPr>
+          <a:lstStyle/>
+          <a:p>
+            <a:r>
+              <a:rPr lang="en-US" altLang="en-US" sz="2800" b="1" u="sng" dirty="0">
+                <a:latin typeface="Times New Roman" panose="02020603050405020304" charset="0"/>
+                <a:cs typeface="Times New Roman" panose="02020603050405020304" charset="0"/>
+              </a:rPr>
+              <a:t>Future Considerations</a:t>
+            </a:r>
+            <a:endParaRPr lang="en-US" altLang="en-US" sz="2800" dirty="0">
+              <a:latin typeface="Times New Roman" panose="02020603050405020304" charset="0"/>
+              <a:cs typeface="Times New Roman" panose="02020603050405020304" charset="0"/>
+            </a:endParaRPr>
+          </a:p>
+          <a:p>
+            <a:r>
+              <a:rPr lang="en-US" altLang="en-US" sz="2800" b="1" dirty="0">
+                <a:latin typeface="Times New Roman" panose="02020603050405020304" charset="0"/>
+                <a:cs typeface="Times New Roman" panose="02020603050405020304" charset="0"/>
+              </a:rPr>
+              <a:t>Scalability</a:t>
+            </a:r>
+            <a:r>
+              <a:rPr lang="en-GB" altLang="en-US" sz="2800" b="1" dirty="0">
+                <a:latin typeface="Times New Roman" panose="02020603050405020304" charset="0"/>
+                <a:cs typeface="Times New Roman" panose="02020603050405020304" charset="0"/>
+              </a:rPr>
+              <a:t> and </a:t>
+            </a:r>
+            <a:r>
+              <a:rPr lang="en-US" altLang="en-US" sz="2800" b="1" dirty="0">
+                <a:latin typeface="Times New Roman" panose="02020603050405020304" charset="0"/>
+                <a:cs typeface="Times New Roman" panose="02020603050405020304" charset="0"/>
+              </a:rPr>
+              <a:t>Containerization</a:t>
+            </a:r>
+            <a:r>
+              <a:rPr lang="en-GB" altLang="en-US" sz="2800" b="1" dirty="0">
+                <a:latin typeface="Times New Roman" panose="02020603050405020304" charset="0"/>
+                <a:cs typeface="Times New Roman" panose="02020603050405020304" charset="0"/>
+              </a:rPr>
+              <a:t>. </a:t>
+            </a:r>
+            <a:r>
+              <a:rPr lang="en-US" altLang="en-US" sz="2800" dirty="0">
+                <a:latin typeface="Times New Roman" panose="02020603050405020304" charset="0"/>
+                <a:cs typeface="Times New Roman" panose="02020603050405020304" charset="0"/>
+              </a:rPr>
+              <a:t>Package backend services in Docker to standardize the runtime environment and simplify moving between hosting providers</a:t>
+            </a:r>
+            <a:r>
+              <a:rPr lang="en-GB" altLang="en-US" sz="2800" dirty="0">
+                <a:latin typeface="Times New Roman" panose="02020603050405020304" charset="0"/>
+                <a:cs typeface="Times New Roman" panose="02020603050405020304" charset="0"/>
+              </a:rPr>
+              <a:t>.</a:t>
+            </a:r>
+            <a:endParaRPr lang="en-US" altLang="en-US" sz="2800" dirty="0">
+              <a:latin typeface="Times New Roman" panose="02020603050405020304" charset="0"/>
+              <a:cs typeface="Times New Roman" panose="02020603050405020304" charset="0"/>
+            </a:endParaRPr>
+          </a:p>
+          <a:p>
+            <a:r>
+              <a:rPr lang="en-US" altLang="en-US" sz="2800" b="1" dirty="0">
+                <a:latin typeface="Times New Roman" panose="02020603050405020304" charset="0"/>
+                <a:cs typeface="Times New Roman" panose="02020603050405020304" charset="0"/>
+              </a:rPr>
+              <a:t>Tech Stack </a:t>
+            </a:r>
+            <a:r>
+              <a:rPr lang="en-GB" altLang="en-US" sz="2800" b="1" dirty="0">
+                <a:latin typeface="Times New Roman" panose="02020603050405020304" charset="0"/>
+                <a:cs typeface="Times New Roman" panose="02020603050405020304" charset="0"/>
+              </a:rPr>
+              <a:t>changes and evolution. </a:t>
+            </a:r>
+            <a:r>
+              <a:rPr lang="en-US" altLang="en-US" sz="2800" dirty="0">
+                <a:latin typeface="Times New Roman" panose="02020603050405020304" charset="0"/>
+                <a:cs typeface="Times New Roman" panose="02020603050405020304" charset="0"/>
+              </a:rPr>
+              <a:t>Migrate</a:t>
+            </a:r>
+            <a:r>
+              <a:rPr lang="en-GB" altLang="en-US" sz="2800" dirty="0">
+                <a:latin typeface="Times New Roman" panose="02020603050405020304" charset="0"/>
+                <a:cs typeface="Times New Roman" panose="02020603050405020304" charset="0"/>
+              </a:rPr>
+              <a:t> from</a:t>
+            </a:r>
+            <a:r>
+              <a:rPr lang="en-US" altLang="en-US" sz="2800" dirty="0">
+                <a:latin typeface="Times New Roman" panose="02020603050405020304" charset="0"/>
+                <a:cs typeface="Times New Roman" panose="02020603050405020304" charset="0"/>
+              </a:rPr>
+              <a:t> MySQL</a:t>
+            </a:r>
+            <a:r>
+              <a:rPr lang="en-GB" altLang="en-US" sz="2800" dirty="0">
+                <a:latin typeface="Times New Roman" panose="02020603050405020304" charset="0"/>
+                <a:cs typeface="Times New Roman" panose="02020603050405020304" charset="0"/>
+              </a:rPr>
+              <a:t> to </a:t>
+            </a:r>
+            <a:r>
+              <a:rPr lang="en-US" altLang="en-US" sz="2800" dirty="0">
+                <a:latin typeface="Times New Roman" panose="02020603050405020304" charset="0"/>
+                <a:cs typeface="Times New Roman" panose="02020603050405020304" charset="0"/>
+              </a:rPr>
+              <a:t>PostgreSQL for better performance on growing transaction history; evaluate Postgres-native hosts (Render, Supabase</a:t>
+            </a:r>
+            <a:r>
+              <a:rPr lang="en-GB" altLang="en-US" sz="2800" dirty="0">
+                <a:latin typeface="Times New Roman" panose="02020603050405020304" charset="0"/>
+                <a:cs typeface="Times New Roman" panose="02020603050405020304" charset="0"/>
+              </a:rPr>
+              <a:t>, Firebase</a:t>
+            </a:r>
+            <a:r>
+              <a:rPr lang="en-US" altLang="en-US" sz="2800" dirty="0">
+                <a:latin typeface="Times New Roman" panose="02020603050405020304" charset="0"/>
+                <a:cs typeface="Times New Roman" panose="02020603050405020304" charset="0"/>
+              </a:rPr>
+              <a:t>) as Railway alternatives</a:t>
+            </a:r>
+            <a:r>
+              <a:rPr lang="en-GB" altLang="en-US" sz="2800" dirty="0">
+                <a:latin typeface="Times New Roman" panose="02020603050405020304" charset="0"/>
+                <a:cs typeface="Times New Roman" panose="02020603050405020304" charset="0"/>
+              </a:rPr>
+              <a:t> for backend hosting.</a:t>
+            </a:r>
+            <a:endParaRPr lang="en-US" altLang="en-US" sz="2800" dirty="0">
+              <a:latin typeface="Times New Roman" panose="02020603050405020304" charset="0"/>
+              <a:cs typeface="Times New Roman" panose="02020603050405020304" charset="0"/>
+            </a:endParaRPr>
+          </a:p>
+          <a:p>
+            <a:r>
+              <a:rPr lang="en-US" altLang="en-US" sz="2800" b="1" dirty="0">
+                <a:latin typeface="Times New Roman" panose="02020603050405020304" charset="0"/>
+                <a:cs typeface="Times New Roman" panose="02020603050405020304" charset="0"/>
+              </a:rPr>
+              <a:t>App Distribution</a:t>
+            </a:r>
+            <a:r>
+              <a:rPr lang="en-GB" altLang="en-US" sz="2800" b="1" dirty="0">
+                <a:latin typeface="Times New Roman" panose="02020603050405020304" charset="0"/>
+                <a:cs typeface="Times New Roman" panose="02020603050405020304" charset="0"/>
+              </a:rPr>
+              <a:t>.</a:t>
+            </a:r>
+            <a:r>
+              <a:rPr lang="en-US" altLang="en-US" sz="2800" dirty="0">
+                <a:latin typeface="Times New Roman" panose="02020603050405020304" charset="0"/>
+                <a:cs typeface="Times New Roman" panose="02020603050405020304" charset="0"/>
+              </a:rPr>
+              <a:t> Move from </a:t>
+            </a:r>
+            <a:r>
+              <a:rPr lang="en-GB" altLang="en-US" sz="2800" dirty="0">
+                <a:latin typeface="Times New Roman" panose="02020603050405020304" charset="0"/>
+                <a:cs typeface="Times New Roman" panose="02020603050405020304" charset="0"/>
+              </a:rPr>
+              <a:t>usb-debuging</a:t>
+            </a:r>
+            <a:r>
+              <a:rPr lang="en-US" altLang="en-US" sz="2800" dirty="0">
+                <a:latin typeface="Times New Roman" panose="02020603050405020304" charset="0"/>
+                <a:cs typeface="Times New Roman" panose="02020603050405020304" charset="0"/>
+              </a:rPr>
+              <a:t> </a:t>
+            </a:r>
+            <a:r>
+              <a:rPr lang="en-GB" altLang="en-US" sz="2800" dirty="0">
+                <a:latin typeface="Times New Roman" panose="02020603050405020304" charset="0"/>
+                <a:cs typeface="Times New Roman" panose="02020603050405020304" charset="0"/>
+              </a:rPr>
+              <a:t>for installation</a:t>
+            </a:r>
+            <a:r>
+              <a:rPr lang="en-US" altLang="en-US" sz="2800" dirty="0">
+                <a:latin typeface="Times New Roman" panose="02020603050405020304" charset="0"/>
+                <a:cs typeface="Times New Roman" panose="02020603050405020304" charset="0"/>
+              </a:rPr>
+              <a:t> to direct APK distribution (Firebase App Distribution </a:t>
+            </a:r>
+            <a:r>
+              <a:rPr lang="en-GB" altLang="en-US" sz="2800" dirty="0">
+                <a:latin typeface="Times New Roman" panose="02020603050405020304" charset="0"/>
+                <a:cs typeface="Times New Roman" panose="02020603050405020304" charset="0"/>
+              </a:rPr>
+              <a:t>or even</a:t>
+            </a:r>
+            <a:r>
+              <a:rPr lang="en-US" altLang="en-US" sz="2800" dirty="0">
+                <a:latin typeface="Times New Roman" panose="02020603050405020304" charset="0"/>
+                <a:cs typeface="Times New Roman" panose="02020603050405020304" charset="0"/>
+              </a:rPr>
+              <a:t> Google Play internal testing) so users can install Malihub on </a:t>
+            </a:r>
+            <a:r>
+              <a:rPr lang="en-GB" altLang="en-US" sz="2800" dirty="0">
+                <a:latin typeface="Times New Roman" panose="02020603050405020304" charset="0"/>
+                <a:cs typeface="Times New Roman" panose="02020603050405020304" charset="0"/>
+              </a:rPr>
+              <a:t>their</a:t>
+            </a:r>
+            <a:r>
+              <a:rPr lang="en-US" altLang="en-US" sz="2800" dirty="0">
+                <a:latin typeface="Times New Roman" panose="02020603050405020304" charset="0"/>
+                <a:cs typeface="Times New Roman" panose="02020603050405020304" charset="0"/>
+              </a:rPr>
+              <a:t> device</a:t>
+            </a:r>
+            <a:r>
+              <a:rPr lang="en-GB" altLang="en-US" sz="2800" dirty="0">
+                <a:latin typeface="Times New Roman" panose="02020603050405020304" charset="0"/>
+                <a:cs typeface="Times New Roman" panose="02020603050405020304" charset="0"/>
+              </a:rPr>
+              <a:t>s</a:t>
+            </a:r>
+            <a:r>
+              <a:rPr lang="en-US" altLang="en-US" sz="2800" dirty="0">
+                <a:latin typeface="Times New Roman" panose="02020603050405020304" charset="0"/>
+                <a:cs typeface="Times New Roman" panose="02020603050405020304" charset="0"/>
+              </a:rPr>
+              <a:t> </a:t>
+            </a:r>
+            <a:r>
+              <a:rPr lang="en-GB" sz="2800" dirty="0">
+                <a:latin typeface="Times New Roman" panose="02020603050405020304" charset="0"/>
+                <a:cs typeface="Times New Roman" panose="02020603050405020304" charset="0"/>
+              </a:rPr>
+              <a:t>conveniently.</a:t>
+            </a:r>
+            <a:endParaRPr lang="en-US" altLang="en-US" sz="2800" dirty="0">
+              <a:latin typeface="Times New Roman" panose="02020603050405020304" charset="0"/>
+              <a:cs typeface="Times New Roman" panose="02020603050405020304" charset="0"/>
+            </a:endParaRPr>
+          </a:p>
+          <a:p>
+            <a:r>
+              <a:rPr lang="en-US" altLang="en-US" sz="2800" b="1" dirty="0">
+                <a:latin typeface="Times New Roman" panose="02020603050405020304" charset="0"/>
+                <a:cs typeface="Times New Roman" panose="02020603050405020304" charset="0"/>
+              </a:rPr>
+              <a:t>Automated Safeguards</a:t>
+            </a:r>
+            <a:r>
+              <a:rPr lang="en-US" altLang="en-US" sz="2800" dirty="0">
+                <a:latin typeface="Times New Roman" panose="02020603050405020304" charset="0"/>
+                <a:cs typeface="Times New Roman" panose="02020603050405020304" charset="0"/>
+              </a:rPr>
+              <a:t>: Introduce unit and integration tests for financial calculations, run automatically before every deployment</a:t>
+            </a:r>
+            <a:r>
+              <a:rPr lang="en-GB" altLang="en-US" sz="2800" dirty="0">
+                <a:latin typeface="Times New Roman" panose="02020603050405020304" charset="0"/>
+                <a:cs typeface="Times New Roman" panose="02020603050405020304" charset="0"/>
+              </a:rPr>
+              <a:t>.</a:t>
+            </a:r>
+            <a:endParaRPr lang="en-GB" altLang="en-US" sz="2800" dirty="0">
+              <a:latin typeface="Times New Roman" panose="02020603050405020304" charset="0"/>
+              <a:cs typeface="Times New Roman" panose="02020603050405020304" charset="0"/>
+            </a:endParaRPr>
+          </a:p>
+          <a:p>
+            <a:r>
+              <a:rPr lang="en-US" altLang="en-US" sz="2800" b="1" dirty="0">
+                <a:latin typeface="Times New Roman" panose="02020603050405020304" charset="0"/>
+                <a:cs typeface="Times New Roman" panose="02020603050405020304" charset="0"/>
+              </a:rPr>
+              <a:t>Automated Insights</a:t>
+            </a:r>
+            <a:r>
+              <a:rPr lang="en-US" altLang="en-US" sz="2800" dirty="0">
+                <a:latin typeface="Times New Roman" panose="02020603050405020304" charset="0"/>
+                <a:cs typeface="Times New Roman" panose="02020603050405020304" charset="0"/>
+              </a:rPr>
+              <a:t>: Analyze historical transaction data to auto-generate spending summaries, budget</a:t>
+            </a:r>
+            <a:r>
+              <a:rPr lang="en-GB" altLang="en-US" sz="2800" dirty="0">
+                <a:latin typeface="Times New Roman" panose="02020603050405020304" charset="0"/>
+                <a:cs typeface="Times New Roman" panose="02020603050405020304" charset="0"/>
+              </a:rPr>
+              <a:t> against </a:t>
+            </a:r>
+            <a:r>
+              <a:rPr lang="en-US" altLang="en-US" sz="2800" dirty="0">
+                <a:latin typeface="Times New Roman" panose="02020603050405020304" charset="0"/>
+                <a:cs typeface="Times New Roman" panose="02020603050405020304" charset="0"/>
+              </a:rPr>
+              <a:t>actual alerts, and goal progress forecasts</a:t>
+            </a:r>
+            <a:r>
+              <a:rPr lang="en-GB" altLang="en-US" sz="2800" dirty="0">
+                <a:latin typeface="Times New Roman" panose="02020603050405020304" charset="0"/>
+                <a:cs typeface="Times New Roman" panose="02020603050405020304" charset="0"/>
+              </a:rPr>
+              <a:t>.</a:t>
+            </a:r>
+            <a:endParaRPr lang="en-GB" altLang="en-US" sz="2800" dirty="0">
+              <a:latin typeface="Times New Roman" panose="02020603050405020304" charset="0"/>
+              <a:cs typeface="Times New Roman" panose="02020603050405020304" charset="0"/>
+            </a:endParaRPr>
+          </a:p>
+        </p:txBody>
+      </p:sp>
+    </p:spTree>
+  </p:cSld>
+  <p:clrMapOvr>
+    <a:masterClrMapping/>
+  </p:clrMapOvr>
+  <mc:AlternateContent xmlns:mc="http://schemas.openxmlformats.org/markup-compatibility/2006">
+    <mc:Choice xmlns:p14="http://schemas.microsoft.com/office/powerpoint/2010/main" Requires="p14">
+      <p:transition spd="slow" p14:dur="3400">
+        <p14:reveal/>
+      </p:transition>
+    </mc:Choice>
+    <mc:Fallback>
+      <p:transition spd="slow">
+        <p:fade/>
+      </p:transition>
+    </mc:Fallback>
+  </mc:AlternateContent>
+</p:sld>
+</file>
+
+<file path=ppt/slides/slide15.xml><?xml version="1.0" encoding="utf-8"?>
 <p:sld xmlns:a="http://schemas.openxmlformats.org/drawingml/2006/main" xmlns:r="http://schemas.openxmlformats.org/officeDocument/2006/relationships" xmlns:p="http://schemas.openxmlformats.org/presentationml/2006/main">
   <p:cSld>
     <p:spTree>

--- a/MALIHUB POWERPOINT PRESENTATION.pptx
+++ b/MALIHUB POWERPOINT PRESENTATION.pptx
@@ -21,8 +21,9 @@
     <p:sldId id="271" r:id="rId14"/>
     <p:sldId id="265" r:id="rId15"/>
     <p:sldId id="266" r:id="rId16"/>
-    <p:sldId id="267" r:id="rId17"/>
-    <p:sldId id="268" r:id="rId18"/>
+    <p:sldId id="272" r:id="rId17"/>
+    <p:sldId id="267" r:id="rId18"/>
+    <p:sldId id="268" r:id="rId19"/>
   </p:sldIdLst>
   <p:sldSz cx="12192000" cy="6858000"/>
   <p:notesSz cx="6858000" cy="9144000"/>
@@ -4379,6 +4380,123 @@
         <p:cNvGrpSpPr/>
         <p:nvPr/>
       </p:nvGrpSpPr>
+      <p:grpSpPr/>
+      <p:sp>
+        <p:nvSpPr>
+          <p:cNvPr id="5" name="Content Placeholder 4"/>
+          <p:cNvSpPr>
+            <a:spLocks noGrp="1"/>
+          </p:cNvSpPr>
+          <p:nvPr>
+            <p:ph idx="1"/>
+          </p:nvPr>
+        </p:nvSpPr>
+        <p:spPr>
+          <a:xfrm>
+            <a:off x="271145" y="417195"/>
+            <a:ext cx="11544935" cy="6002020"/>
+          </a:xfrm>
+        </p:spPr>
+        <p:txBody>
+          <a:bodyPr>
+            <a:noAutofit/>
+          </a:bodyPr>
+          <a:p>
+            <a:r>
+              <a:rPr lang="en-US" altLang="en-US" sz="3200" b="1">
+                <a:latin typeface="Times New Roman" panose="02020603050405020304" charset="0"/>
+                <a:cs typeface="Times New Roman" panose="02020603050405020304" charset="0"/>
+              </a:rPr>
+              <a:t>Challenge: Third-Party Email Delivery on Cloud Hosting</a:t>
+            </a:r>
+            <a:endParaRPr lang="en-US" altLang="en-US" sz="3200" b="1">
+              <a:latin typeface="Times New Roman" panose="02020603050405020304" charset="0"/>
+              <a:cs typeface="Times New Roman" panose="02020603050405020304" charset="0"/>
+            </a:endParaRPr>
+          </a:p>
+          <a:p>
+            <a:endParaRPr lang="en-US" altLang="en-US" sz="3200">
+              <a:latin typeface="Times New Roman" panose="02020603050405020304" charset="0"/>
+              <a:cs typeface="Times New Roman" panose="02020603050405020304" charset="0"/>
+            </a:endParaRPr>
+          </a:p>
+          <a:p>
+            <a:r>
+              <a:rPr lang="en-US" altLang="en-US" sz="3200">
+                <a:latin typeface="Times New Roman" panose="02020603050405020304" charset="0"/>
+                <a:cs typeface="Times New Roman" panose="02020603050405020304" charset="0"/>
+              </a:rPr>
+              <a:t>Built password recovery using Nodemailer over Gmail SMTP</a:t>
+            </a:r>
+            <a:endParaRPr lang="en-US" altLang="en-US" sz="3200">
+              <a:latin typeface="Times New Roman" panose="02020603050405020304" charset="0"/>
+              <a:cs typeface="Times New Roman" panose="02020603050405020304" charset="0"/>
+            </a:endParaRPr>
+          </a:p>
+          <a:p>
+            <a:r>
+              <a:rPr lang="en-US" altLang="en-US" sz="3200">
+                <a:latin typeface="Times New Roman" panose="02020603050405020304" charset="0"/>
+                <a:cs typeface="Times New Roman" panose="02020603050405020304" charset="0"/>
+              </a:rPr>
+              <a:t>Discovered Railway's hosting environment lacks reliable outbound SMTP connectivity (blocked/limited IPv6 egress on standard mail ports)</a:t>
+            </a:r>
+            <a:endParaRPr lang="en-US" altLang="en-US" sz="3200">
+              <a:latin typeface="Times New Roman" panose="02020603050405020304" charset="0"/>
+              <a:cs typeface="Times New Roman" panose="02020603050405020304" charset="0"/>
+            </a:endParaRPr>
+          </a:p>
+          <a:p>
+            <a:r>
+              <a:rPr lang="en-US" altLang="en-US" sz="3200">
+                <a:latin typeface="Times New Roman" panose="02020603050405020304" charset="0"/>
+                <a:cs typeface="Times New Roman" panose="02020603050405020304" charset="0"/>
+              </a:rPr>
+              <a:t>Diagnosing and resolving a hosting-specific networking issue carried real time cost within a tight 3-week timeline</a:t>
+            </a:r>
+            <a:endParaRPr lang="en-US" altLang="en-US" sz="3200">
+              <a:latin typeface="Times New Roman" panose="02020603050405020304" charset="0"/>
+              <a:cs typeface="Times New Roman" panose="02020603050405020304" charset="0"/>
+            </a:endParaRPr>
+          </a:p>
+          <a:p>
+            <a:endParaRPr lang="en-US" altLang="en-US" sz="3200">
+              <a:latin typeface="Times New Roman" panose="02020603050405020304" charset="0"/>
+              <a:cs typeface="Times New Roman" panose="02020603050405020304" charset="0"/>
+            </a:endParaRPr>
+          </a:p>
+          <a:p>
+            <a:r>
+              <a:rPr lang="en-US" altLang="en-US" sz="3200">
+                <a:latin typeface="Times New Roman" panose="02020603050405020304" charset="0"/>
+                <a:cs typeface="Times New Roman" panose="02020603050405020304" charset="0"/>
+              </a:rPr>
+              <a:t>Resolution: Deprioritized in favor of finishing core MVP features (auth, transactions, budgets, goals); scoped in for a future release once the delivery issue can be properly resolved.</a:t>
+            </a:r>
+            <a:endParaRPr lang="en-US" altLang="en-US" sz="3200">
+              <a:latin typeface="Times New Roman" panose="02020603050405020304" charset="0"/>
+              <a:cs typeface="Times New Roman" panose="02020603050405020304" charset="0"/>
+            </a:endParaRPr>
+          </a:p>
+        </p:txBody>
+      </p:sp>
+    </p:spTree>
+  </p:cSld>
+  <p:clrMapOvr>
+    <a:masterClrMapping/>
+  </p:clrMapOvr>
+</p:sld>
+</file>
+
+<file path=ppt/slides/slide15.xml><?xml version="1.0" encoding="utf-8"?>
+<p:sld xmlns:a="http://schemas.openxmlformats.org/drawingml/2006/main" xmlns:r="http://schemas.openxmlformats.org/officeDocument/2006/relationships" xmlns:p="http://schemas.openxmlformats.org/presentationml/2006/main">
+  <p:cSld>
+    <p:spTree>
+      <p:nvGrpSpPr>
+        <p:cNvPr id="1" name=""/>
+        <p:cNvGrpSpPr/>
+        <p:nvPr/>
+      </p:nvGrpSpPr>
       <p:grpSpPr>
         <a:xfrm>
           <a:off x="0" y="0"/>
@@ -4739,7 +4857,7 @@
 </p:sld>
 </file>
 
-<file path=ppt/slides/slide15.xml><?xml version="1.0" encoding="utf-8"?>
+<file path=ppt/slides/slide16.xml><?xml version="1.0" encoding="utf-8"?>
 <p:sld xmlns:a="http://schemas.openxmlformats.org/drawingml/2006/main" xmlns:r="http://schemas.openxmlformats.org/officeDocument/2006/relationships" xmlns:p="http://schemas.openxmlformats.org/presentationml/2006/main">
   <p:cSld>
     <p:spTree>

--- a/MALIHUB POWERPOINT PRESENTATION.pptx
+++ b/MALIHUB POWERPOINT PRESENTATION.pptx
@@ -125,7 +125,7 @@
   <p:extLst>
     <p:ext uri="{EFAFB233-063F-42B5-8137-9DF3F51BA10A}">
       <p15:sldGuideLst xmlns:p15="http://schemas.microsoft.com/office/powerpoint/2012/main">
-        <p15:guide id="1" orient="horz" pos="2176" userDrawn="1">
+        <p15:guide id="1" orient="horz" pos="2192" userDrawn="1">
           <p15:clr>
             <a:srgbClr val="A4A3A4"/>
           </p15:clr>
@@ -554,6 +554,54 @@
             <a:fld id="{1A6D6843-46A3-4A6A-8784-AB866303FBBE}" type="slidenum">
               <a:rPr lang="en-US" smtClean="0"/>
             </a:fld>
+            <a:endParaRPr lang="en-US"/>
+          </a:p>
+        </p:txBody>
+      </p:sp>
+    </p:spTree>
+  </p:cSld>
+  <p:clrMapOvr>
+    <a:masterClrMapping/>
+  </p:clrMapOvr>
+</p:notes>
+</file>
+
+<file path=ppt/notesSlides/notesSlide2.xml><?xml version="1.0" encoding="utf-8"?>
+<p:notes xmlns:a="http://schemas.openxmlformats.org/drawingml/2006/main" xmlns:r="http://schemas.openxmlformats.org/officeDocument/2006/relationships" xmlns:p="http://schemas.openxmlformats.org/presentationml/2006/main">
+  <p:cSld>
+    <p:spTree>
+      <p:nvGrpSpPr>
+        <p:cNvPr id="1" name=""/>
+        <p:cNvGrpSpPr/>
+        <p:nvPr/>
+      </p:nvGrpSpPr>
+      <p:grpSpPr/>
+      <p:sp>
+        <p:nvSpPr>
+          <p:cNvPr id="2" name="Slide Image Placeholder 1"/>
+          <p:cNvSpPr>
+            <a:spLocks noGrp="1"/>
+          </p:cNvSpPr>
+          <p:nvPr>
+            <p:ph type="sldImg" idx="2"/>
+          </p:nvPr>
+        </p:nvSpPr>
+        <p:spPr/>
+      </p:sp>
+      <p:sp>
+        <p:nvSpPr>
+          <p:cNvPr id="3" name="Text Placeholder 2"/>
+          <p:cNvSpPr>
+            <a:spLocks noGrp="1"/>
+          </p:cNvSpPr>
+          <p:nvPr>
+            <p:ph type="body" idx="3"/>
+          </p:nvPr>
+        </p:nvSpPr>
+        <p:spPr/>
+        <p:txBody>
+          <a:bodyPr/>
+          <a:p>
             <a:endParaRPr lang="en-US"/>
           </a:p>
         </p:txBody>
@@ -3964,7 +4012,23 @@
                 <a:cs typeface="Times New Roman" panose="02020603050405020304" charset="0"/>
                 <a:sym typeface="+mn-ea"/>
               </a:rPr>
-              <a:t>Finally, Categories and Budgets have an optional one-to-one relationship: a Category may optionally scope one Budget, and a Budget may optionally scope to one Category — where a NULL value indicates the Budget is an overall budget rather than one tied to a specific category.</a:t>
+              <a:t>Finally, Categories and Budgets have an optional one-to-one relationship: a Category may optionally scope one Budget, and a Budget may optionally scope to one Category</a:t>
+            </a:r>
+            <a:r>
+              <a:rPr lang="en-GB" altLang="en-US" sz="3600">
+                <a:latin typeface="Times New Roman" panose="02020603050405020304" charset="0"/>
+                <a:cs typeface="Times New Roman" panose="02020603050405020304" charset="0"/>
+                <a:sym typeface="+mn-ea"/>
+              </a:rPr>
+              <a:t>, </a:t>
+            </a:r>
+            <a:r>
+              <a:rPr lang="en-US" altLang="en-US" sz="3600">
+                <a:latin typeface="Times New Roman" panose="02020603050405020304" charset="0"/>
+                <a:cs typeface="Times New Roman" panose="02020603050405020304" charset="0"/>
+                <a:sym typeface="+mn-ea"/>
+              </a:rPr>
+              <a:t>where a NULL value indicates the Budget is an overall budget rather than one tied to a specific category.</a:t>
             </a:r>
             <a:endParaRPr lang="en-US" altLang="en-US" sz="3600">
               <a:latin typeface="Times New Roman" panose="02020603050405020304" charset="0"/>

--- a/MALIHUB POWERPOINT PRESENTATION.pptx
+++ b/MALIHUB POWERPOINT PRESENTATION.pptx
@@ -17,13 +17,11 @@
     <p:sldId id="262" r:id="rId10"/>
     <p:sldId id="263" r:id="rId11"/>
     <p:sldId id="264" r:id="rId12"/>
-    <p:sldId id="270" r:id="rId13"/>
-    <p:sldId id="271" r:id="rId14"/>
-    <p:sldId id="265" r:id="rId15"/>
-    <p:sldId id="266" r:id="rId16"/>
-    <p:sldId id="272" r:id="rId17"/>
-    <p:sldId id="267" r:id="rId18"/>
-    <p:sldId id="268" r:id="rId19"/>
+    <p:sldId id="265" r:id="rId13"/>
+    <p:sldId id="266" r:id="rId14"/>
+    <p:sldId id="272" r:id="rId15"/>
+    <p:sldId id="267" r:id="rId16"/>
+    <p:sldId id="268" r:id="rId17"/>
   </p:sldIdLst>
   <p:sldSz cx="12192000" cy="6858000"/>
   <p:notesSz cx="6858000" cy="9144000"/>
@@ -554,54 +552,6 @@
             <a:fld id="{1A6D6843-46A3-4A6A-8784-AB866303FBBE}" type="slidenum">
               <a:rPr lang="en-US" smtClean="0"/>
             </a:fld>
-            <a:endParaRPr lang="en-US"/>
-          </a:p>
-        </p:txBody>
-      </p:sp>
-    </p:spTree>
-  </p:cSld>
-  <p:clrMapOvr>
-    <a:masterClrMapping/>
-  </p:clrMapOvr>
-</p:notes>
-</file>
-
-<file path=ppt/notesSlides/notesSlide2.xml><?xml version="1.0" encoding="utf-8"?>
-<p:notes xmlns:a="http://schemas.openxmlformats.org/drawingml/2006/main" xmlns:r="http://schemas.openxmlformats.org/officeDocument/2006/relationships" xmlns:p="http://schemas.openxmlformats.org/presentationml/2006/main">
-  <p:cSld>
-    <p:spTree>
-      <p:nvGrpSpPr>
-        <p:cNvPr id="1" name=""/>
-        <p:cNvGrpSpPr/>
-        <p:nvPr/>
-      </p:nvGrpSpPr>
-      <p:grpSpPr/>
-      <p:sp>
-        <p:nvSpPr>
-          <p:cNvPr id="2" name="Slide Image Placeholder 1"/>
-          <p:cNvSpPr>
-            <a:spLocks noGrp="1"/>
-          </p:cNvSpPr>
-          <p:nvPr>
-            <p:ph type="sldImg" idx="2"/>
-          </p:nvPr>
-        </p:nvSpPr>
-        <p:spPr/>
-      </p:sp>
-      <p:sp>
-        <p:nvSpPr>
-          <p:cNvPr id="3" name="Text Placeholder 2"/>
-          <p:cNvSpPr>
-            <a:spLocks noGrp="1"/>
-          </p:cNvSpPr>
-          <p:nvPr>
-            <p:ph type="body" idx="3"/>
-          </p:nvPr>
-        </p:nvSpPr>
-        <p:spPr/>
-        <p:txBody>
-          <a:bodyPr/>
-          <a:p>
             <a:endParaRPr lang="en-US"/>
           </a:p>
         </p:txBody>
@@ -3833,236 +3783,6 @@
         <p:cNvGrpSpPr/>
         <p:nvPr/>
       </p:nvGrpSpPr>
-      <p:grpSpPr/>
-      <p:sp>
-        <p:nvSpPr>
-          <p:cNvPr id="4" name="Title 3"/>
-          <p:cNvSpPr>
-            <a:spLocks noGrp="1"/>
-          </p:cNvSpPr>
-          <p:nvPr>
-            <p:ph type="title"/>
-          </p:nvPr>
-        </p:nvSpPr>
-        <p:spPr>
-          <a:xfrm>
-            <a:off x="838200" y="203200"/>
-            <a:ext cx="10515600" cy="688340"/>
-          </a:xfrm>
-        </p:spPr>
-        <p:txBody>
-          <a:bodyPr/>
-          <a:p>
-            <a:r>
-              <a:rPr lang="en-GB" altLang="en-US" sz="3200" b="1">
-                <a:latin typeface="Times New Roman" panose="02020603050405020304" charset="0"/>
-                <a:cs typeface="Times New Roman" panose="02020603050405020304" charset="0"/>
-              </a:rPr>
-              <a:t>DATABASE RELATIONSHIPS</a:t>
-            </a:r>
-            <a:endParaRPr lang="en-GB" altLang="en-US" sz="3200" b="1">
-              <a:latin typeface="Times New Roman" panose="02020603050405020304" charset="0"/>
-              <a:cs typeface="Times New Roman" panose="02020603050405020304" charset="0"/>
-            </a:endParaRPr>
-          </a:p>
-        </p:txBody>
-      </p:sp>
-      <p:sp>
-        <p:nvSpPr>
-          <p:cNvPr id="5" name="Content Placeholder 4"/>
-          <p:cNvSpPr>
-            <a:spLocks noGrp="1"/>
-          </p:cNvSpPr>
-          <p:nvPr>
-            <p:ph idx="1"/>
-          </p:nvPr>
-        </p:nvSpPr>
-        <p:spPr>
-          <a:xfrm>
-            <a:off x="213360" y="890905"/>
-            <a:ext cx="11743055" cy="5842000"/>
-          </a:xfrm>
-        </p:spPr>
-        <p:txBody>
-          <a:bodyPr>
-            <a:noAutofit/>
-          </a:bodyPr>
-          <a:p>
-            <a:pPr marL="0" indent="0">
-              <a:buNone/>
-            </a:pPr>
-            <a:r>
-              <a:rPr lang="en-US" altLang="en-US" sz="3600">
-                <a:latin typeface="Times New Roman" panose="02020603050405020304" charset="0"/>
-                <a:cs typeface="Times New Roman" panose="02020603050405020304" charset="0"/>
-              </a:rPr>
-              <a:t>Each User may own zero or many Accounts, though every Account belongs to exactly one User. Similarly, each User may define zero or many personal Categories though default (system) Categories aren't tied to any particular User. </a:t>
-            </a:r>
-            <a:endParaRPr lang="en-US" altLang="en-US" sz="3600">
-              <a:latin typeface="Times New Roman" panose="02020603050405020304" charset="0"/>
-              <a:cs typeface="Times New Roman" panose="02020603050405020304" charset="0"/>
-            </a:endParaRPr>
-          </a:p>
-          <a:p>
-            <a:pPr marL="0" indent="0">
-              <a:buNone/>
-            </a:pPr>
-            <a:r>
-              <a:rPr lang="en-US" altLang="en-US" sz="3600">
-                <a:latin typeface="Times New Roman" panose="02020603050405020304" charset="0"/>
-                <a:cs typeface="Times New Roman" panose="02020603050405020304" charset="0"/>
-              </a:rPr>
-              <a:t>Each User may also set zero or many Budgets, with each Budget belonging to exactly one User, and each User may have zero or many Financial Goals, each of which belongs to exactly one User. Notifications follow the same pattern: a User may receive zero or many Notifications, and each Notification belongs to exactly one User.</a:t>
-            </a:r>
-            <a:endParaRPr lang="en-US" altLang="en-US" sz="3600">
-              <a:latin typeface="Times New Roman" panose="02020603050405020304" charset="0"/>
-              <a:cs typeface="Times New Roman" panose="02020603050405020304" charset="0"/>
-            </a:endParaRPr>
-          </a:p>
-          <a:p>
-            <a:pPr marL="0" indent="0">
-              <a:buNone/>
-            </a:pPr>
-            <a:endParaRPr lang="en-US" altLang="en-US" sz="3600">
-              <a:latin typeface="Times New Roman" panose="02020603050405020304" charset="0"/>
-              <a:cs typeface="Times New Roman" panose="02020603050405020304" charset="0"/>
-            </a:endParaRPr>
-          </a:p>
-        </p:txBody>
-      </p:sp>
-    </p:spTree>
-  </p:cSld>
-  <p:clrMapOvr>
-    <a:masterClrMapping/>
-  </p:clrMapOvr>
-</p:sld>
-</file>
-
-<file path=ppt/slides/slide11.xml><?xml version="1.0" encoding="utf-8"?>
-<p:sld xmlns:a="http://schemas.openxmlformats.org/drawingml/2006/main" xmlns:r="http://schemas.openxmlformats.org/officeDocument/2006/relationships" xmlns:p="http://schemas.openxmlformats.org/presentationml/2006/main">
-  <p:cSld>
-    <p:spTree>
-      <p:nvGrpSpPr>
-        <p:cNvPr id="1" name=""/>
-        <p:cNvGrpSpPr/>
-        <p:nvPr/>
-      </p:nvGrpSpPr>
-      <p:grpSpPr/>
-      <p:sp>
-        <p:nvSpPr>
-          <p:cNvPr id="5" name="Content Placeholder 4"/>
-          <p:cNvSpPr>
-            <a:spLocks noGrp="1"/>
-          </p:cNvSpPr>
-          <p:nvPr>
-            <p:ph idx="1"/>
-          </p:nvPr>
-        </p:nvSpPr>
-        <p:spPr>
-          <a:xfrm>
-            <a:off x="433705" y="342265"/>
-            <a:ext cx="11325225" cy="6275070"/>
-          </a:xfrm>
-        </p:spPr>
-        <p:txBody>
-          <a:bodyPr>
-            <a:normAutofit/>
-          </a:bodyPr>
-          <a:p>
-            <a:pPr marL="0" indent="0">
-              <a:buNone/>
-            </a:pPr>
-            <a:r>
-              <a:rPr lang="en-US" altLang="en-US" sz="3600">
-                <a:latin typeface="Times New Roman" panose="02020603050405020304" charset="0"/>
-                <a:cs typeface="Times New Roman" panose="02020603050405020304" charset="0"/>
-                <a:sym typeface="+mn-ea"/>
-              </a:rPr>
-              <a:t>Moving down a level, each Account may contain zero or many Transactions, with every Transaction belonging to exactly one Account. Categories relate to Transactions more loosely</a:t>
-            </a:r>
-            <a:r>
-              <a:rPr lang="en-GB" altLang="en-US" sz="3600">
-                <a:latin typeface="Times New Roman" panose="02020603050405020304" charset="0"/>
-                <a:cs typeface="Times New Roman" panose="02020603050405020304" charset="0"/>
-                <a:sym typeface="+mn-ea"/>
-              </a:rPr>
-              <a:t>,</a:t>
-            </a:r>
-            <a:r>
-              <a:rPr lang="en-US" altLang="en-US" sz="3600">
-                <a:latin typeface="Times New Roman" panose="02020603050405020304" charset="0"/>
-                <a:cs typeface="Times New Roman" panose="02020603050405020304" charset="0"/>
-                <a:sym typeface="+mn-ea"/>
-              </a:rPr>
-              <a:t> a Category may classify zero or many Transactions, but a Transaction only optionally belongs to a Category, meaning it can exist uncategorized. </a:t>
-            </a:r>
-            <a:endParaRPr lang="en-US" altLang="en-US" sz="3600">
-              <a:latin typeface="Times New Roman" panose="02020603050405020304" charset="0"/>
-              <a:cs typeface="Times New Roman" panose="02020603050405020304" charset="0"/>
-              <a:sym typeface="+mn-ea"/>
-            </a:endParaRPr>
-          </a:p>
-          <a:p>
-            <a:pPr marL="0" indent="0">
-              <a:buNone/>
-            </a:pPr>
-            <a:r>
-              <a:rPr lang="en-US" altLang="en-US" sz="3600">
-                <a:latin typeface="Times New Roman" panose="02020603050405020304" charset="0"/>
-                <a:cs typeface="Times New Roman" panose="02020603050405020304" charset="0"/>
-                <a:sym typeface="+mn-ea"/>
-              </a:rPr>
-              <a:t>Finally, Categories and Budgets have an optional one-to-one relationship: a Category may optionally scope one Budget, and a Budget may optionally scope to one Category</a:t>
-            </a:r>
-            <a:r>
-              <a:rPr lang="en-GB" altLang="en-US" sz="3600">
-                <a:latin typeface="Times New Roman" panose="02020603050405020304" charset="0"/>
-                <a:cs typeface="Times New Roman" panose="02020603050405020304" charset="0"/>
-                <a:sym typeface="+mn-ea"/>
-              </a:rPr>
-              <a:t>, </a:t>
-            </a:r>
-            <a:r>
-              <a:rPr lang="en-US" altLang="en-US" sz="3600">
-                <a:latin typeface="Times New Roman" panose="02020603050405020304" charset="0"/>
-                <a:cs typeface="Times New Roman" panose="02020603050405020304" charset="0"/>
-                <a:sym typeface="+mn-ea"/>
-              </a:rPr>
-              <a:t>where a NULL value indicates the Budget is an overall budget rather than one tied to a specific category.</a:t>
-            </a:r>
-            <a:endParaRPr lang="en-US" altLang="en-US" sz="3600">
-              <a:latin typeface="Times New Roman" panose="02020603050405020304" charset="0"/>
-              <a:cs typeface="Times New Roman" panose="02020603050405020304" charset="0"/>
-            </a:endParaRPr>
-          </a:p>
-          <a:p>
-            <a:pPr marL="0" indent="0">
-              <a:buNone/>
-            </a:pPr>
-            <a:endParaRPr lang="en-US" sz="3600">
-              <a:latin typeface="Times New Roman" panose="02020603050405020304" charset="0"/>
-              <a:cs typeface="Times New Roman" panose="02020603050405020304" charset="0"/>
-            </a:endParaRPr>
-          </a:p>
-        </p:txBody>
-      </p:sp>
-    </p:spTree>
-  </p:cSld>
-  <p:clrMapOvr>
-    <a:masterClrMapping/>
-  </p:clrMapOvr>
-</p:sld>
-</file>
-
-<file path=ppt/slides/slide12.xml><?xml version="1.0" encoding="utf-8"?>
-<p:sld xmlns:a="http://schemas.openxmlformats.org/drawingml/2006/main" xmlns:r="http://schemas.openxmlformats.org/officeDocument/2006/relationships" xmlns:p="http://schemas.openxmlformats.org/presentationml/2006/main">
-  <p:cSld>
-    <p:spTree>
-      <p:nvGrpSpPr>
-        <p:cNvPr id="1" name=""/>
-        <p:cNvGrpSpPr/>
-        <p:nvPr/>
-      </p:nvGrpSpPr>
       <p:grpSpPr>
         <a:xfrm>
           <a:off x="0" y="0"/>
@@ -4225,6 +3945,333 @@
 </p:sld>
 </file>
 
+<file path=ppt/slides/slide11.xml><?xml version="1.0" encoding="utf-8"?>
+<p:sld xmlns:a="http://schemas.openxmlformats.org/drawingml/2006/main" xmlns:r="http://schemas.openxmlformats.org/officeDocument/2006/relationships" xmlns:p="http://schemas.openxmlformats.org/presentationml/2006/main">
+  <p:cSld>
+    <p:spTree>
+      <p:nvGrpSpPr>
+        <p:cNvPr id="1" name=""/>
+        <p:cNvGrpSpPr/>
+        <p:nvPr/>
+      </p:nvGrpSpPr>
+      <p:grpSpPr>
+        <a:xfrm>
+          <a:off x="0" y="0"/>
+          <a:ext cx="0" cy="0"/>
+          <a:chOff x="0" y="0"/>
+          <a:chExt cx="0" cy="0"/>
+        </a:xfrm>
+      </p:grpSpPr>
+      <p:sp>
+        <p:nvSpPr>
+          <p:cNvPr id="2" name="TextBox 1"/>
+          <p:cNvSpPr txBox="1"/>
+          <p:nvPr/>
+        </p:nvSpPr>
+        <p:spPr>
+          <a:xfrm>
+            <a:off x="101600" y="0"/>
+            <a:ext cx="11988800" cy="6433820"/>
+          </a:xfrm>
+          <a:prstGeom prst="rect">
+            <a:avLst/>
+          </a:prstGeom>
+          <a:noFill/>
+        </p:spPr>
+        <p:txBody>
+          <a:bodyPr wrap="square" rtlCol="0">
+            <a:noAutofit/>
+          </a:bodyPr>
+          <a:lstStyle/>
+          <a:p>
+            <a:endParaRPr lang="en-US" sz="2400" b="1" u="sng" dirty="0">
+              <a:latin typeface="Times New Roman" panose="02020603050405020304" charset="0"/>
+              <a:cs typeface="Times New Roman" panose="02020603050405020304" charset="0"/>
+            </a:endParaRPr>
+          </a:p>
+          <a:p>
+            <a:r>
+              <a:rPr lang="en-US" sz="2400" b="1" u="sng" dirty="0">
+                <a:latin typeface="Times New Roman" panose="02020603050405020304" charset="0"/>
+                <a:cs typeface="Times New Roman" panose="02020603050405020304" charset="0"/>
+              </a:rPr>
+              <a:t>Technical Challenges &amp; Solutions</a:t>
+            </a:r>
+            <a:endParaRPr lang="en-US" sz="2400" b="1" u="sng" dirty="0">
+              <a:latin typeface="Times New Roman" panose="02020603050405020304" charset="0"/>
+              <a:cs typeface="Times New Roman" panose="02020603050405020304" charset="0"/>
+            </a:endParaRPr>
+          </a:p>
+          <a:p>
+            <a:endParaRPr lang="en-US" sz="2400" b="1" u="sng" dirty="0">
+              <a:latin typeface="Times New Roman" panose="02020603050405020304" charset="0"/>
+              <a:cs typeface="Times New Roman" panose="02020603050405020304" charset="0"/>
+            </a:endParaRPr>
+          </a:p>
+          <a:p>
+            <a:r>
+              <a:rPr lang="en-US" sz="2400" b="1" u="sng" dirty="0">
+                <a:latin typeface="Times New Roman" panose="02020603050405020304" charset="0"/>
+                <a:cs typeface="Times New Roman" panose="02020603050405020304" charset="0"/>
+              </a:rPr>
+              <a:t>Challenge: High Hardware Resource Demand</a:t>
+            </a:r>
+            <a:endParaRPr lang="en-US" sz="2400" b="1" u="sng" dirty="0">
+              <a:latin typeface="Times New Roman" panose="02020603050405020304" charset="0"/>
+              <a:cs typeface="Times New Roman" panose="02020603050405020304" charset="0"/>
+            </a:endParaRPr>
+          </a:p>
+          <a:p>
+            <a:r>
+              <a:rPr lang="en-US" sz="2400" dirty="0">
+                <a:latin typeface="Times New Roman" panose="02020603050405020304" charset="0"/>
+                <a:cs typeface="Times New Roman" panose="02020603050405020304" charset="0"/>
+              </a:rPr>
+              <a:t>Running the Android Studio</a:t>
+            </a:r>
+            <a:r>
+              <a:rPr lang="en-GB" altLang="en-US" sz="2400" dirty="0">
+                <a:latin typeface="Times New Roman" panose="02020603050405020304" charset="0"/>
+                <a:cs typeface="Times New Roman" panose="02020603050405020304" charset="0"/>
+              </a:rPr>
+              <a:t>’s </a:t>
+            </a:r>
+            <a:r>
+              <a:rPr lang="en-US" sz="2400" dirty="0">
+                <a:latin typeface="Times New Roman" panose="02020603050405020304" charset="0"/>
+                <a:cs typeface="Times New Roman" panose="02020603050405020304" charset="0"/>
+              </a:rPr>
+              <a:t>IDE alongside heavy virtual mobile devices (Android Emulators) took up massive amounts of memory and resources on our laptops. This slowed down development and caused frequent system freezes.</a:t>
+            </a:r>
+            <a:endParaRPr lang="en-US" sz="2400" dirty="0">
+              <a:latin typeface="Times New Roman" panose="02020603050405020304" charset="0"/>
+              <a:cs typeface="Times New Roman" panose="02020603050405020304" charset="0"/>
+            </a:endParaRPr>
+          </a:p>
+          <a:p>
+            <a:r>
+              <a:rPr lang="en-GB" altLang="en-US" sz="2400" dirty="0">
+                <a:latin typeface="Times New Roman" panose="02020603050405020304" charset="0"/>
+                <a:cs typeface="Times New Roman" panose="02020603050405020304" charset="0"/>
+              </a:rPr>
+              <a:t>As a solution,</a:t>
+            </a:r>
+            <a:r>
+              <a:rPr lang="en-US" sz="2400" dirty="0">
+                <a:latin typeface="Times New Roman" panose="02020603050405020304" charset="0"/>
+                <a:cs typeface="Times New Roman" panose="02020603050405020304" charset="0"/>
+              </a:rPr>
+              <a:t> shifted to testing and running the Flutter applications directly on our physical mobile devices via USB debugging. This bypassed the emulators entirely, freed up computer resources, and significantly sped up our code testing loop.</a:t>
+            </a:r>
+            <a:endParaRPr lang="en-US" sz="2400" dirty="0">
+              <a:latin typeface="Times New Roman" panose="02020603050405020304" charset="0"/>
+              <a:cs typeface="Times New Roman" panose="02020603050405020304" charset="0"/>
+            </a:endParaRPr>
+          </a:p>
+          <a:p>
+            <a:endParaRPr lang="en-US" sz="2400" dirty="0">
+              <a:latin typeface="Times New Roman" panose="02020603050405020304" charset="0"/>
+              <a:cs typeface="Times New Roman" panose="02020603050405020304" charset="0"/>
+            </a:endParaRPr>
+          </a:p>
+          <a:p>
+            <a:r>
+              <a:rPr lang="en-US" sz="2400" b="1" u="sng" dirty="0">
+                <a:latin typeface="Times New Roman" panose="02020603050405020304" charset="0"/>
+                <a:cs typeface="Times New Roman" panose="02020603050405020304" charset="0"/>
+              </a:rPr>
+              <a:t>Challenge: Team Database Schema Synchronization</a:t>
+            </a:r>
+            <a:r>
+              <a:rPr lang="en-GB" altLang="en-US" sz="2400" b="1" u="sng" dirty="0">
+                <a:latin typeface="Times New Roman" panose="02020603050405020304" charset="0"/>
+                <a:cs typeface="Times New Roman" panose="02020603050405020304" charset="0"/>
+              </a:rPr>
+              <a:t> </a:t>
+            </a:r>
+            <a:endParaRPr lang="en-US" sz="2400" b="1" u="sng" dirty="0">
+              <a:latin typeface="Times New Roman" panose="02020603050405020304" charset="0"/>
+              <a:cs typeface="Times New Roman" panose="02020603050405020304" charset="0"/>
+            </a:endParaRPr>
+          </a:p>
+          <a:p>
+            <a:r>
+              <a:rPr lang="en-US" sz="2400" dirty="0">
+                <a:latin typeface="Times New Roman" panose="02020603050405020304" charset="0"/>
+                <a:cs typeface="Times New Roman" panose="02020603050405020304" charset="0"/>
+              </a:rPr>
+              <a:t>Merging different git branches occasionally caused local database states to go out of sync.</a:t>
+            </a:r>
+            <a:endParaRPr lang="en-US" sz="2400" dirty="0">
+              <a:latin typeface="Times New Roman" panose="02020603050405020304" charset="0"/>
+              <a:cs typeface="Times New Roman" panose="02020603050405020304" charset="0"/>
+            </a:endParaRPr>
+          </a:p>
+          <a:p>
+            <a:r>
+              <a:rPr lang="en-GB" altLang="en-US" sz="2400" dirty="0">
+                <a:latin typeface="Times New Roman" panose="02020603050405020304" charset="0"/>
+                <a:cs typeface="Times New Roman" panose="02020603050405020304" charset="0"/>
+              </a:rPr>
+              <a:t>As a troubleshoot, we</a:t>
+            </a:r>
+            <a:r>
+              <a:rPr lang="en-US" sz="2400" dirty="0">
+                <a:latin typeface="Times New Roman" panose="02020603050405020304" charset="0"/>
+                <a:cs typeface="Times New Roman" panose="02020603050405020304" charset="0"/>
+              </a:rPr>
+              <a:t> established a strict protocol where team members ran Prisma migration synchronization commands immediately after pulling code updates.</a:t>
+            </a:r>
+            <a:endParaRPr lang="en-US" sz="2400" dirty="0">
+              <a:latin typeface="Times New Roman" panose="02020603050405020304" charset="0"/>
+              <a:cs typeface="Times New Roman" panose="02020603050405020304" charset="0"/>
+            </a:endParaRPr>
+          </a:p>
+          <a:p>
+            <a:endParaRPr lang="en-US" dirty="0">
+              <a:latin typeface="Times New Roman" panose="02020603050405020304" charset="0"/>
+              <a:cs typeface="Times New Roman" panose="02020603050405020304" charset="0"/>
+            </a:endParaRPr>
+          </a:p>
+        </p:txBody>
+      </p:sp>
+    </p:spTree>
+  </p:cSld>
+  <p:clrMapOvr>
+    <a:masterClrMapping/>
+  </p:clrMapOvr>
+  <mc:AlternateContent xmlns:mc="http://schemas.openxmlformats.org/markup-compatibility/2006">
+    <mc:Choice xmlns:p14="http://schemas.microsoft.com/office/powerpoint/2010/main" Requires="p14">
+      <p:transition spd="slow" p14:dur="3400">
+        <p14:reveal/>
+      </p:transition>
+    </mc:Choice>
+    <mc:Fallback>
+      <p:transition spd="slow">
+        <p:fade/>
+      </p:transition>
+    </mc:Fallback>
+  </mc:AlternateContent>
+</p:sld>
+</file>
+
+<file path=ppt/slides/slide12.xml><?xml version="1.0" encoding="utf-8"?>
+<p:sld xmlns:a="http://schemas.openxmlformats.org/drawingml/2006/main" xmlns:r="http://schemas.openxmlformats.org/officeDocument/2006/relationships" xmlns:p="http://schemas.openxmlformats.org/presentationml/2006/main">
+  <p:cSld>
+    <p:spTree>
+      <p:nvGrpSpPr>
+        <p:cNvPr id="1" name=""/>
+        <p:cNvGrpSpPr/>
+        <p:nvPr/>
+      </p:nvGrpSpPr>
+      <p:grpSpPr/>
+      <p:sp>
+        <p:nvSpPr>
+          <p:cNvPr id="5" name="Content Placeholder 4"/>
+          <p:cNvSpPr>
+            <a:spLocks noGrp="1"/>
+          </p:cNvSpPr>
+          <p:nvPr>
+            <p:ph idx="1"/>
+          </p:nvPr>
+        </p:nvSpPr>
+        <p:spPr>
+          <a:xfrm>
+            <a:off x="271145" y="417195"/>
+            <a:ext cx="11544935" cy="6002020"/>
+          </a:xfrm>
+        </p:spPr>
+        <p:txBody>
+          <a:bodyPr>
+            <a:noAutofit/>
+          </a:bodyPr>
+          <a:p>
+            <a:r>
+              <a:rPr lang="en-US" altLang="en-US" sz="3200" b="1">
+                <a:latin typeface="Times New Roman" panose="02020603050405020304" charset="0"/>
+                <a:cs typeface="Times New Roman" panose="02020603050405020304" charset="0"/>
+              </a:rPr>
+              <a:t>Challenge: Third-Party Email Delivery on Cloud Hosting</a:t>
+            </a:r>
+            <a:endParaRPr lang="en-US" altLang="en-US" sz="3200" b="1">
+              <a:latin typeface="Times New Roman" panose="02020603050405020304" charset="0"/>
+              <a:cs typeface="Times New Roman" panose="02020603050405020304" charset="0"/>
+            </a:endParaRPr>
+          </a:p>
+          <a:p>
+            <a:endParaRPr lang="en-US" altLang="en-US" sz="3200">
+              <a:latin typeface="Times New Roman" panose="02020603050405020304" charset="0"/>
+              <a:cs typeface="Times New Roman" panose="02020603050405020304" charset="0"/>
+            </a:endParaRPr>
+          </a:p>
+          <a:p>
+            <a:r>
+              <a:rPr lang="en-US" altLang="en-US" sz="3200">
+                <a:latin typeface="Times New Roman" panose="02020603050405020304" charset="0"/>
+                <a:cs typeface="Times New Roman" panose="02020603050405020304" charset="0"/>
+              </a:rPr>
+              <a:t>Built password recovery using Nodemailer over Gmail SMTP</a:t>
+            </a:r>
+            <a:endParaRPr lang="en-US" altLang="en-US" sz="3200">
+              <a:latin typeface="Times New Roman" panose="02020603050405020304" charset="0"/>
+              <a:cs typeface="Times New Roman" panose="02020603050405020304" charset="0"/>
+            </a:endParaRPr>
+          </a:p>
+          <a:p>
+            <a:r>
+              <a:rPr lang="en-US" altLang="en-US" sz="3200">
+                <a:latin typeface="Times New Roman" panose="02020603050405020304" charset="0"/>
+                <a:cs typeface="Times New Roman" panose="02020603050405020304" charset="0"/>
+              </a:rPr>
+              <a:t>Discovered Railway's hosting environment lacks reliable outbound SMTP connectivity (blocked/limited IPv6 egress on standard mail ports)</a:t>
+            </a:r>
+            <a:endParaRPr lang="en-US" altLang="en-US" sz="3200">
+              <a:latin typeface="Times New Roman" panose="02020603050405020304" charset="0"/>
+              <a:cs typeface="Times New Roman" panose="02020603050405020304" charset="0"/>
+            </a:endParaRPr>
+          </a:p>
+          <a:p>
+            <a:r>
+              <a:rPr lang="en-US" altLang="en-US" sz="3200">
+                <a:latin typeface="Times New Roman" panose="02020603050405020304" charset="0"/>
+                <a:cs typeface="Times New Roman" panose="02020603050405020304" charset="0"/>
+              </a:rPr>
+              <a:t>Diagnosing and resolving a hosting-specific networking issue carried real time cost within a tight 3-week timeline</a:t>
+            </a:r>
+            <a:endParaRPr lang="en-US" altLang="en-US" sz="3200">
+              <a:latin typeface="Times New Roman" panose="02020603050405020304" charset="0"/>
+              <a:cs typeface="Times New Roman" panose="02020603050405020304" charset="0"/>
+            </a:endParaRPr>
+          </a:p>
+          <a:p>
+            <a:endParaRPr lang="en-US" altLang="en-US" sz="3200">
+              <a:latin typeface="Times New Roman" panose="02020603050405020304" charset="0"/>
+              <a:cs typeface="Times New Roman" panose="02020603050405020304" charset="0"/>
+            </a:endParaRPr>
+          </a:p>
+          <a:p>
+            <a:r>
+              <a:rPr lang="en-US" altLang="en-US" sz="3200">
+                <a:latin typeface="Times New Roman" panose="02020603050405020304" charset="0"/>
+                <a:cs typeface="Times New Roman" panose="02020603050405020304" charset="0"/>
+              </a:rPr>
+              <a:t>Resolution: Deprioritized in favor of finishing core MVP features (auth, transactions, budgets, goals); scoped in for a future release once the delivery issue can be properly resolved.</a:t>
+            </a:r>
+            <a:endParaRPr lang="en-US" altLang="en-US" sz="3200">
+              <a:latin typeface="Times New Roman" panose="02020603050405020304" charset="0"/>
+              <a:cs typeface="Times New Roman" panose="02020603050405020304" charset="0"/>
+            </a:endParaRPr>
+          </a:p>
+        </p:txBody>
+      </p:sp>
+    </p:spTree>
+  </p:cSld>
+  <p:clrMapOvr>
+    <a:masterClrMapping/>
+  </p:clrMapOvr>
+</p:sld>
+</file>
+
 <file path=ppt/slides/slide13.xml><?xml version="1.0" encoding="utf-8"?>
 <p:sld xmlns:a="http://schemas.openxmlformats.org/drawingml/2006/main" xmlns:r="http://schemas.openxmlformats.org/officeDocument/2006/relationships" xmlns:p="http://schemas.openxmlformats.org/presentationml/2006/main">
   <p:cSld>
@@ -4250,8 +4297,8 @@
         </p:nvSpPr>
         <p:spPr>
           <a:xfrm>
-            <a:off x="101600" y="0"/>
-            <a:ext cx="11988800" cy="6433820"/>
+            <a:off x="228600" y="160020"/>
+            <a:ext cx="11544300" cy="6438900"/>
           </a:xfrm>
           <a:prstGeom prst="rect">
             <a:avLst/>
@@ -4264,151 +4311,310 @@
           </a:bodyPr>
           <a:lstStyle/>
           <a:p>
-            <a:endParaRPr lang="en-US" sz="2400" b="1" u="sng" dirty="0">
-              <a:latin typeface="Times New Roman" panose="02020603050405020304" charset="0"/>
-              <a:cs typeface="Times New Roman" panose="02020603050405020304" charset="0"/>
-            </a:endParaRPr>
-          </a:p>
-          <a:p>
-            <a:r>
-              <a:rPr lang="en-US" sz="2400" b="1" u="sng" dirty="0">
-                <a:latin typeface="Times New Roman" panose="02020603050405020304" charset="0"/>
-                <a:cs typeface="Times New Roman" panose="02020603050405020304" charset="0"/>
-              </a:rPr>
-              <a:t>Technical Challenges &amp; Solutions</a:t>
-            </a:r>
-            <a:endParaRPr lang="en-US" sz="2400" b="1" u="sng" dirty="0">
-              <a:latin typeface="Times New Roman" panose="02020603050405020304" charset="0"/>
-              <a:cs typeface="Times New Roman" panose="02020603050405020304" charset="0"/>
-            </a:endParaRPr>
-          </a:p>
-          <a:p>
-            <a:endParaRPr lang="en-US" sz="2400" b="1" u="sng" dirty="0">
-              <a:latin typeface="Times New Roman" panose="02020603050405020304" charset="0"/>
-              <a:cs typeface="Times New Roman" panose="02020603050405020304" charset="0"/>
-            </a:endParaRPr>
-          </a:p>
-          <a:p>
-            <a:r>
-              <a:rPr lang="en-US" sz="2400" b="1" u="sng" dirty="0">
-                <a:latin typeface="Times New Roman" panose="02020603050405020304" charset="0"/>
-                <a:cs typeface="Times New Roman" panose="02020603050405020304" charset="0"/>
-              </a:rPr>
-              <a:t>Challenge: High Hardware Resource Demand</a:t>
-            </a:r>
-            <a:endParaRPr lang="en-US" sz="2400" b="1" u="sng" dirty="0">
-              <a:latin typeface="Times New Roman" panose="02020603050405020304" charset="0"/>
-              <a:cs typeface="Times New Roman" panose="02020603050405020304" charset="0"/>
-            </a:endParaRPr>
-          </a:p>
-          <a:p>
-            <a:r>
-              <a:rPr lang="en-US" sz="2400" dirty="0">
-                <a:latin typeface="Times New Roman" panose="02020603050405020304" charset="0"/>
-                <a:cs typeface="Times New Roman" panose="02020603050405020304" charset="0"/>
-              </a:rPr>
-              <a:t>Running the Android Studio</a:t>
-            </a:r>
-            <a:r>
-              <a:rPr lang="en-GB" altLang="en-US" sz="2400" dirty="0">
-                <a:latin typeface="Times New Roman" panose="02020603050405020304" charset="0"/>
-                <a:cs typeface="Times New Roman" panose="02020603050405020304" charset="0"/>
-              </a:rPr>
-              <a:t>’s </a:t>
-            </a:r>
-            <a:r>
-              <a:rPr lang="en-US" sz="2400" dirty="0">
-                <a:latin typeface="Times New Roman" panose="02020603050405020304" charset="0"/>
-                <a:cs typeface="Times New Roman" panose="02020603050405020304" charset="0"/>
-              </a:rPr>
-              <a:t>IDE alongside heavy virtual mobile devices (Android Emulators) took up massive amounts of memory and resources on our laptops. This slowed down development and caused frequent system freezes.</a:t>
-            </a:r>
-            <a:endParaRPr lang="en-US" sz="2400" dirty="0">
-              <a:latin typeface="Times New Roman" panose="02020603050405020304" charset="0"/>
-              <a:cs typeface="Times New Roman" panose="02020603050405020304" charset="0"/>
-            </a:endParaRPr>
-          </a:p>
-          <a:p>
-            <a:r>
-              <a:rPr lang="en-GB" altLang="en-US" sz="2400" dirty="0">
-                <a:latin typeface="Times New Roman" panose="02020603050405020304" charset="0"/>
-                <a:cs typeface="Times New Roman" panose="02020603050405020304" charset="0"/>
-              </a:rPr>
-              <a:t>As a solution,</a:t>
-            </a:r>
-            <a:r>
-              <a:rPr lang="en-US" sz="2400" dirty="0">
-                <a:latin typeface="Times New Roman" panose="02020603050405020304" charset="0"/>
-                <a:cs typeface="Times New Roman" panose="02020603050405020304" charset="0"/>
-              </a:rPr>
-              <a:t> shifted to testing and running the Flutter applications directly on our physical mobile devices via USB debugging. This bypassed the emulators entirely, freed up computer resources, and significantly sped up our code testing loop.</a:t>
-            </a:r>
-            <a:endParaRPr lang="en-US" sz="2400" dirty="0">
-              <a:latin typeface="Times New Roman" panose="02020603050405020304" charset="0"/>
-              <a:cs typeface="Times New Roman" panose="02020603050405020304" charset="0"/>
-            </a:endParaRPr>
-          </a:p>
-          <a:p>
-            <a:endParaRPr lang="en-US" sz="2400" dirty="0">
-              <a:latin typeface="Times New Roman" panose="02020603050405020304" charset="0"/>
-              <a:cs typeface="Times New Roman" panose="02020603050405020304" charset="0"/>
-            </a:endParaRPr>
-          </a:p>
-          <a:p>
-            <a:r>
-              <a:rPr lang="en-US" sz="2400" b="1" u="sng" dirty="0">
-                <a:latin typeface="Times New Roman" panose="02020603050405020304" charset="0"/>
-                <a:cs typeface="Times New Roman" panose="02020603050405020304" charset="0"/>
-              </a:rPr>
-              <a:t>Challenge: Team Database Schema Synchronization</a:t>
-            </a:r>
-            <a:r>
-              <a:rPr lang="en-GB" altLang="en-US" sz="2400" b="1" u="sng" dirty="0">
+            <a:r>
+              <a:rPr lang="en-US" altLang="en-US" sz="2800" b="1" u="sng" dirty="0">
+                <a:latin typeface="Times New Roman" panose="02020603050405020304" charset="0"/>
+                <a:cs typeface="Times New Roman" panose="02020603050405020304" charset="0"/>
+              </a:rPr>
+              <a:t>Future Considerations</a:t>
+            </a:r>
+            <a:endParaRPr lang="en-US" altLang="en-US" sz="2800" dirty="0">
+              <a:latin typeface="Times New Roman" panose="02020603050405020304" charset="0"/>
+              <a:cs typeface="Times New Roman" panose="02020603050405020304" charset="0"/>
+            </a:endParaRPr>
+          </a:p>
+          <a:p>
+            <a:r>
+              <a:rPr lang="en-US" altLang="en-US" sz="2800" b="1" dirty="0">
+                <a:latin typeface="Times New Roman" panose="02020603050405020304" charset="0"/>
+                <a:cs typeface="Times New Roman" panose="02020603050405020304" charset="0"/>
+              </a:rPr>
+              <a:t>Scalability</a:t>
+            </a:r>
+            <a:r>
+              <a:rPr lang="en-GB" altLang="en-US" sz="2800" b="1" dirty="0">
+                <a:latin typeface="Times New Roman" panose="02020603050405020304" charset="0"/>
+                <a:cs typeface="Times New Roman" panose="02020603050405020304" charset="0"/>
+              </a:rPr>
+              <a:t> and </a:t>
+            </a:r>
+            <a:r>
+              <a:rPr lang="en-US" altLang="en-US" sz="2800" b="1" dirty="0">
+                <a:latin typeface="Times New Roman" panose="02020603050405020304" charset="0"/>
+                <a:cs typeface="Times New Roman" panose="02020603050405020304" charset="0"/>
+              </a:rPr>
+              <a:t>Containerization</a:t>
+            </a:r>
+            <a:r>
+              <a:rPr lang="en-GB" altLang="en-US" sz="2800" b="1" dirty="0">
+                <a:latin typeface="Times New Roman" panose="02020603050405020304" charset="0"/>
+                <a:cs typeface="Times New Roman" panose="02020603050405020304" charset="0"/>
+              </a:rPr>
+              <a:t>. </a:t>
+            </a:r>
+            <a:r>
+              <a:rPr lang="en-US" altLang="en-US" sz="2800" dirty="0">
+                <a:latin typeface="Times New Roman" panose="02020603050405020304" charset="0"/>
+                <a:cs typeface="Times New Roman" panose="02020603050405020304" charset="0"/>
+              </a:rPr>
+              <a:t>Package backend services in Docker to standardize the runtime environment and simplify moving between hosting providers</a:t>
+            </a:r>
+            <a:r>
+              <a:rPr lang="en-GB" altLang="en-US" sz="2800" dirty="0">
+                <a:latin typeface="Times New Roman" panose="02020603050405020304" charset="0"/>
+                <a:cs typeface="Times New Roman" panose="02020603050405020304" charset="0"/>
+              </a:rPr>
+              <a:t>.</a:t>
+            </a:r>
+            <a:endParaRPr lang="en-US" altLang="en-US" sz="2800" dirty="0">
+              <a:latin typeface="Times New Roman" panose="02020603050405020304" charset="0"/>
+              <a:cs typeface="Times New Roman" panose="02020603050405020304" charset="0"/>
+            </a:endParaRPr>
+          </a:p>
+          <a:p>
+            <a:r>
+              <a:rPr lang="en-US" altLang="en-US" sz="2800" b="1" dirty="0">
+                <a:latin typeface="Times New Roman" panose="02020603050405020304" charset="0"/>
+                <a:cs typeface="Times New Roman" panose="02020603050405020304" charset="0"/>
+              </a:rPr>
+              <a:t>Tech Stack </a:t>
+            </a:r>
+            <a:r>
+              <a:rPr lang="en-GB" altLang="en-US" sz="2800" b="1" dirty="0">
+                <a:latin typeface="Times New Roman" panose="02020603050405020304" charset="0"/>
+                <a:cs typeface="Times New Roman" panose="02020603050405020304" charset="0"/>
+              </a:rPr>
+              <a:t>changes and evolution. </a:t>
+            </a:r>
+            <a:r>
+              <a:rPr lang="en-US" altLang="en-US" sz="2800" dirty="0">
+                <a:latin typeface="Times New Roman" panose="02020603050405020304" charset="0"/>
+                <a:cs typeface="Times New Roman" panose="02020603050405020304" charset="0"/>
+              </a:rPr>
+              <a:t>Migrate</a:t>
+            </a:r>
+            <a:r>
+              <a:rPr lang="en-GB" altLang="en-US" sz="2800" dirty="0">
+                <a:latin typeface="Times New Roman" panose="02020603050405020304" charset="0"/>
+                <a:cs typeface="Times New Roman" panose="02020603050405020304" charset="0"/>
+              </a:rPr>
+              <a:t> from</a:t>
+            </a:r>
+            <a:r>
+              <a:rPr lang="en-US" altLang="en-US" sz="2800" dirty="0">
+                <a:latin typeface="Times New Roman" panose="02020603050405020304" charset="0"/>
+                <a:cs typeface="Times New Roman" panose="02020603050405020304" charset="0"/>
+              </a:rPr>
+              <a:t> MySQL</a:t>
+            </a:r>
+            <a:r>
+              <a:rPr lang="en-GB" altLang="en-US" sz="2800" dirty="0">
+                <a:latin typeface="Times New Roman" panose="02020603050405020304" charset="0"/>
+                <a:cs typeface="Times New Roman" panose="02020603050405020304" charset="0"/>
+              </a:rPr>
+              <a:t> to </a:t>
+            </a:r>
+            <a:r>
+              <a:rPr lang="en-US" altLang="en-US" sz="2800" dirty="0">
+                <a:latin typeface="Times New Roman" panose="02020603050405020304" charset="0"/>
+                <a:cs typeface="Times New Roman" panose="02020603050405020304" charset="0"/>
+              </a:rPr>
+              <a:t>PostgreSQL for better performance on growing transaction history; evaluate Postgres-native hosts (Render, Supabase</a:t>
+            </a:r>
+            <a:r>
+              <a:rPr lang="en-GB" altLang="en-US" sz="2800" dirty="0">
+                <a:latin typeface="Times New Roman" panose="02020603050405020304" charset="0"/>
+                <a:cs typeface="Times New Roman" panose="02020603050405020304" charset="0"/>
+              </a:rPr>
+              <a:t>, Firebase</a:t>
+            </a:r>
+            <a:r>
+              <a:rPr lang="en-US" altLang="en-US" sz="2800" dirty="0">
+                <a:latin typeface="Times New Roman" panose="02020603050405020304" charset="0"/>
+                <a:cs typeface="Times New Roman" panose="02020603050405020304" charset="0"/>
+              </a:rPr>
+              <a:t>) as Railway alternatives</a:t>
+            </a:r>
+            <a:r>
+              <a:rPr lang="en-GB" altLang="en-US" sz="2800" dirty="0">
+                <a:latin typeface="Times New Roman" panose="02020603050405020304" charset="0"/>
+                <a:cs typeface="Times New Roman" panose="02020603050405020304" charset="0"/>
+              </a:rPr>
+              <a:t> for backend hosting.</a:t>
+            </a:r>
+            <a:endParaRPr lang="en-US" altLang="en-US" sz="2800" dirty="0">
+              <a:latin typeface="Times New Roman" panose="02020603050405020304" charset="0"/>
+              <a:cs typeface="Times New Roman" panose="02020603050405020304" charset="0"/>
+            </a:endParaRPr>
+          </a:p>
+          <a:p>
+            <a:r>
+              <a:rPr lang="en-US" altLang="en-US" sz="2800" b="1" dirty="0">
+                <a:latin typeface="Times New Roman" panose="02020603050405020304" charset="0"/>
+                <a:cs typeface="Times New Roman" panose="02020603050405020304" charset="0"/>
+              </a:rPr>
+              <a:t>App Distribution</a:t>
+            </a:r>
+            <a:r>
+              <a:rPr lang="en-GB" altLang="en-US" sz="2800" b="1" dirty="0">
+                <a:latin typeface="Times New Roman" panose="02020603050405020304" charset="0"/>
+                <a:cs typeface="Times New Roman" panose="02020603050405020304" charset="0"/>
+              </a:rPr>
+              <a:t>.</a:t>
+            </a:r>
+            <a:r>
+              <a:rPr lang="en-US" altLang="en-US" sz="2800" dirty="0">
+                <a:latin typeface="Times New Roman" panose="02020603050405020304" charset="0"/>
+                <a:cs typeface="Times New Roman" panose="02020603050405020304" charset="0"/>
+              </a:rPr>
+              <a:t> Move from </a:t>
+            </a:r>
+            <a:r>
+              <a:rPr lang="en-GB" altLang="en-US" sz="2800" dirty="0">
+                <a:latin typeface="Times New Roman" panose="02020603050405020304" charset="0"/>
+                <a:cs typeface="Times New Roman" panose="02020603050405020304" charset="0"/>
+              </a:rPr>
+              <a:t>usb-debuging</a:t>
+            </a:r>
+            <a:r>
+              <a:rPr lang="en-US" altLang="en-US" sz="2800" dirty="0">
                 <a:latin typeface="Times New Roman" panose="02020603050405020304" charset="0"/>
                 <a:cs typeface="Times New Roman" panose="02020603050405020304" charset="0"/>
               </a:rPr>
               <a:t> </a:t>
             </a:r>
-            <a:endParaRPr lang="en-US" sz="2400" b="1" u="sng" dirty="0">
-              <a:latin typeface="Times New Roman" panose="02020603050405020304" charset="0"/>
-              <a:cs typeface="Times New Roman" panose="02020603050405020304" charset="0"/>
-            </a:endParaRPr>
-          </a:p>
-          <a:p>
-            <a:r>
-              <a:rPr lang="en-US" sz="2400" dirty="0">
-                <a:latin typeface="Times New Roman" panose="02020603050405020304" charset="0"/>
-                <a:cs typeface="Times New Roman" panose="02020603050405020304" charset="0"/>
-              </a:rPr>
-              <a:t>Merging different git branches occasionally caused local database states to go out of sync.</a:t>
-            </a:r>
-            <a:endParaRPr lang="en-US" sz="2400" dirty="0">
-              <a:latin typeface="Times New Roman" panose="02020603050405020304" charset="0"/>
-              <a:cs typeface="Times New Roman" panose="02020603050405020304" charset="0"/>
-            </a:endParaRPr>
-          </a:p>
-          <a:p>
-            <a:r>
-              <a:rPr lang="en-GB" altLang="en-US" sz="2400" dirty="0">
-                <a:latin typeface="Times New Roman" panose="02020603050405020304" charset="0"/>
-                <a:cs typeface="Times New Roman" panose="02020603050405020304" charset="0"/>
-              </a:rPr>
-              <a:t>As a troubleshoot, we</a:t>
-            </a:r>
-            <a:r>
-              <a:rPr lang="en-US" sz="2400" dirty="0">
-                <a:latin typeface="Times New Roman" panose="02020603050405020304" charset="0"/>
-                <a:cs typeface="Times New Roman" panose="02020603050405020304" charset="0"/>
-              </a:rPr>
-              <a:t> established a strict protocol where team members ran Prisma migration synchronization commands immediately after pulling code updates.</a:t>
-            </a:r>
-            <a:endParaRPr lang="en-US" sz="2400" dirty="0">
-              <a:latin typeface="Times New Roman" panose="02020603050405020304" charset="0"/>
-              <a:cs typeface="Times New Roman" panose="02020603050405020304" charset="0"/>
-            </a:endParaRPr>
-          </a:p>
-          <a:p>
-            <a:endParaRPr lang="en-US" dirty="0">
+            <a:r>
+              <a:rPr lang="en-GB" altLang="en-US" sz="2800" dirty="0">
+                <a:latin typeface="Times New Roman" panose="02020603050405020304" charset="0"/>
+                <a:cs typeface="Times New Roman" panose="02020603050405020304" charset="0"/>
+              </a:rPr>
+              <a:t>for installation</a:t>
+            </a:r>
+            <a:r>
+              <a:rPr lang="en-US" altLang="en-US" sz="2800" dirty="0">
+                <a:latin typeface="Times New Roman" panose="02020603050405020304" charset="0"/>
+                <a:cs typeface="Times New Roman" panose="02020603050405020304" charset="0"/>
+              </a:rPr>
+              <a:t> to direct APK distribution (Firebase App Distribution </a:t>
+            </a:r>
+            <a:r>
+              <a:rPr lang="en-GB" altLang="en-US" sz="2800" dirty="0">
+                <a:latin typeface="Times New Roman" panose="02020603050405020304" charset="0"/>
+                <a:cs typeface="Times New Roman" panose="02020603050405020304" charset="0"/>
+              </a:rPr>
+              <a:t>or even</a:t>
+            </a:r>
+            <a:r>
+              <a:rPr lang="en-US" altLang="en-US" sz="2800" dirty="0">
+                <a:latin typeface="Times New Roman" panose="02020603050405020304" charset="0"/>
+                <a:cs typeface="Times New Roman" panose="02020603050405020304" charset="0"/>
+              </a:rPr>
+              <a:t> Google Play internal testing) so users can install Malihub on </a:t>
+            </a:r>
+            <a:r>
+              <a:rPr lang="en-GB" altLang="en-US" sz="2800" dirty="0">
+                <a:latin typeface="Times New Roman" panose="02020603050405020304" charset="0"/>
+                <a:cs typeface="Times New Roman" panose="02020603050405020304" charset="0"/>
+              </a:rPr>
+              <a:t>their</a:t>
+            </a:r>
+            <a:r>
+              <a:rPr lang="en-US" altLang="en-US" sz="2800" dirty="0">
+                <a:latin typeface="Times New Roman" panose="02020603050405020304" charset="0"/>
+                <a:cs typeface="Times New Roman" panose="02020603050405020304" charset="0"/>
+              </a:rPr>
+              <a:t> device</a:t>
+            </a:r>
+            <a:r>
+              <a:rPr lang="en-GB" altLang="en-US" sz="2800" dirty="0">
+                <a:latin typeface="Times New Roman" panose="02020603050405020304" charset="0"/>
+                <a:cs typeface="Times New Roman" panose="02020603050405020304" charset="0"/>
+              </a:rPr>
+              <a:t>s</a:t>
+            </a:r>
+            <a:r>
+              <a:rPr lang="en-US" altLang="en-US" sz="2800" dirty="0">
+                <a:latin typeface="Times New Roman" panose="02020603050405020304" charset="0"/>
+                <a:cs typeface="Times New Roman" panose="02020603050405020304" charset="0"/>
+              </a:rPr>
+              <a:t> </a:t>
+            </a:r>
+            <a:r>
+              <a:rPr lang="en-GB" sz="2800" dirty="0">
+                <a:latin typeface="Times New Roman" panose="02020603050405020304" charset="0"/>
+                <a:cs typeface="Times New Roman" panose="02020603050405020304" charset="0"/>
+              </a:rPr>
+              <a:t>conveniently.</a:t>
+            </a:r>
+            <a:endParaRPr lang="en-US" altLang="en-US" sz="2800" dirty="0">
+              <a:latin typeface="Times New Roman" panose="02020603050405020304" charset="0"/>
+              <a:cs typeface="Times New Roman" panose="02020603050405020304" charset="0"/>
+            </a:endParaRPr>
+          </a:p>
+          <a:p>
+            <a:r>
+              <a:rPr lang="en-US" altLang="en-US" sz="2800" b="1" dirty="0">
+                <a:latin typeface="Times New Roman" panose="02020603050405020304" charset="0"/>
+                <a:cs typeface="Times New Roman" panose="02020603050405020304" charset="0"/>
+              </a:rPr>
+              <a:t>Automated Safeguards</a:t>
+            </a:r>
+            <a:r>
+              <a:rPr lang="en-US" altLang="en-US" sz="2800" dirty="0">
+                <a:latin typeface="Times New Roman" panose="02020603050405020304" charset="0"/>
+                <a:cs typeface="Times New Roman" panose="02020603050405020304" charset="0"/>
+              </a:rPr>
+              <a:t>: Introduce unit and integration tests for financial calculations, run automatically before every deployment</a:t>
+            </a:r>
+            <a:r>
+              <a:rPr lang="en-GB" altLang="en-US" sz="2800" dirty="0">
+                <a:latin typeface="Times New Roman" panose="02020603050405020304" charset="0"/>
+                <a:cs typeface="Times New Roman" panose="02020603050405020304" charset="0"/>
+              </a:rPr>
+              <a:t>.</a:t>
+            </a:r>
+            <a:endParaRPr lang="en-GB" altLang="en-US" sz="2800" dirty="0">
+              <a:latin typeface="Times New Roman" panose="02020603050405020304" charset="0"/>
+              <a:cs typeface="Times New Roman" panose="02020603050405020304" charset="0"/>
+            </a:endParaRPr>
+          </a:p>
+          <a:p>
+            <a:r>
+              <a:rPr lang="en-US" altLang="en-US" sz="2800" b="1" dirty="0">
+                <a:latin typeface="Times New Roman" panose="02020603050405020304" charset="0"/>
+                <a:cs typeface="Times New Roman" panose="02020603050405020304" charset="0"/>
+              </a:rPr>
+              <a:t>Automated Insights</a:t>
+            </a:r>
+            <a:r>
+              <a:rPr lang="en-US" altLang="en-US" sz="2800" dirty="0">
+                <a:latin typeface="Times New Roman" panose="02020603050405020304" charset="0"/>
+                <a:cs typeface="Times New Roman" panose="02020603050405020304" charset="0"/>
+              </a:rPr>
+              <a:t>: Analyze historical transaction data to auto-generate spending summaries, budget</a:t>
+            </a:r>
+            <a:r>
+              <a:rPr lang="en-GB" altLang="en-US" sz="2800" dirty="0">
+                <a:latin typeface="Times New Roman" panose="02020603050405020304" charset="0"/>
+                <a:cs typeface="Times New Roman" panose="02020603050405020304" charset="0"/>
+              </a:rPr>
+              <a:t> against </a:t>
+            </a:r>
+            <a:r>
+              <a:rPr lang="en-US" altLang="en-US" sz="2800" dirty="0">
+                <a:latin typeface="Times New Roman" panose="02020603050405020304" charset="0"/>
+                <a:cs typeface="Times New Roman" panose="02020603050405020304" charset="0"/>
+              </a:rPr>
+              <a:t>actual alerts, and goal progress forecasts</a:t>
+            </a:r>
+            <a:r>
+              <a:rPr lang="en-GB" altLang="en-US" sz="2800" dirty="0">
+                <a:latin typeface="Times New Roman" panose="02020603050405020304" charset="0"/>
+                <a:cs typeface="Times New Roman" panose="02020603050405020304" charset="0"/>
+              </a:rPr>
+              <a:t>.</a:t>
+            </a:r>
+            <a:endParaRPr lang="en-GB" altLang="en-US" sz="2800" dirty="0">
               <a:latin typeface="Times New Roman" panose="02020603050405020304" charset="0"/>
               <a:cs typeface="Times New Roman" panose="02020603050405020304" charset="0"/>
             </a:endParaRPr>
@@ -4436,492 +4642,6 @@
 </file>
 
 <file path=ppt/slides/slide14.xml><?xml version="1.0" encoding="utf-8"?>
-<p:sld xmlns:a="http://schemas.openxmlformats.org/drawingml/2006/main" xmlns:r="http://schemas.openxmlformats.org/officeDocument/2006/relationships" xmlns:p="http://schemas.openxmlformats.org/presentationml/2006/main">
-  <p:cSld>
-    <p:spTree>
-      <p:nvGrpSpPr>
-        <p:cNvPr id="1" name=""/>
-        <p:cNvGrpSpPr/>
-        <p:nvPr/>
-      </p:nvGrpSpPr>
-      <p:grpSpPr/>
-      <p:sp>
-        <p:nvSpPr>
-          <p:cNvPr id="5" name="Content Placeholder 4"/>
-          <p:cNvSpPr>
-            <a:spLocks noGrp="1"/>
-          </p:cNvSpPr>
-          <p:nvPr>
-            <p:ph idx="1"/>
-          </p:nvPr>
-        </p:nvSpPr>
-        <p:spPr>
-          <a:xfrm>
-            <a:off x="271145" y="417195"/>
-            <a:ext cx="11544935" cy="6002020"/>
-          </a:xfrm>
-        </p:spPr>
-        <p:txBody>
-          <a:bodyPr>
-            <a:noAutofit/>
-          </a:bodyPr>
-          <a:p>
-            <a:r>
-              <a:rPr lang="en-US" altLang="en-US" sz="3200" b="1">
-                <a:latin typeface="Times New Roman" panose="02020603050405020304" charset="0"/>
-                <a:cs typeface="Times New Roman" panose="02020603050405020304" charset="0"/>
-              </a:rPr>
-              <a:t>Challenge: Third-Party Email Delivery on Cloud Hosting</a:t>
-            </a:r>
-            <a:endParaRPr lang="en-US" altLang="en-US" sz="3200" b="1">
-              <a:latin typeface="Times New Roman" panose="02020603050405020304" charset="0"/>
-              <a:cs typeface="Times New Roman" panose="02020603050405020304" charset="0"/>
-            </a:endParaRPr>
-          </a:p>
-          <a:p>
-            <a:endParaRPr lang="en-US" altLang="en-US" sz="3200">
-              <a:latin typeface="Times New Roman" panose="02020603050405020304" charset="0"/>
-              <a:cs typeface="Times New Roman" panose="02020603050405020304" charset="0"/>
-            </a:endParaRPr>
-          </a:p>
-          <a:p>
-            <a:r>
-              <a:rPr lang="en-US" altLang="en-US" sz="3200">
-                <a:latin typeface="Times New Roman" panose="02020603050405020304" charset="0"/>
-                <a:cs typeface="Times New Roman" panose="02020603050405020304" charset="0"/>
-              </a:rPr>
-              <a:t>Built password recovery using Nodemailer over Gmail SMTP</a:t>
-            </a:r>
-            <a:endParaRPr lang="en-US" altLang="en-US" sz="3200">
-              <a:latin typeface="Times New Roman" panose="02020603050405020304" charset="0"/>
-              <a:cs typeface="Times New Roman" panose="02020603050405020304" charset="0"/>
-            </a:endParaRPr>
-          </a:p>
-          <a:p>
-            <a:r>
-              <a:rPr lang="en-US" altLang="en-US" sz="3200">
-                <a:latin typeface="Times New Roman" panose="02020603050405020304" charset="0"/>
-                <a:cs typeface="Times New Roman" panose="02020603050405020304" charset="0"/>
-              </a:rPr>
-              <a:t>Discovered Railway's hosting environment lacks reliable outbound SMTP connectivity (blocked/limited IPv6 egress on standard mail ports)</a:t>
-            </a:r>
-            <a:endParaRPr lang="en-US" altLang="en-US" sz="3200">
-              <a:latin typeface="Times New Roman" panose="02020603050405020304" charset="0"/>
-              <a:cs typeface="Times New Roman" panose="02020603050405020304" charset="0"/>
-            </a:endParaRPr>
-          </a:p>
-          <a:p>
-            <a:r>
-              <a:rPr lang="en-US" altLang="en-US" sz="3200">
-                <a:latin typeface="Times New Roman" panose="02020603050405020304" charset="0"/>
-                <a:cs typeface="Times New Roman" panose="02020603050405020304" charset="0"/>
-              </a:rPr>
-              <a:t>Diagnosing and resolving a hosting-specific networking issue carried real time cost within a tight 3-week timeline</a:t>
-            </a:r>
-            <a:endParaRPr lang="en-US" altLang="en-US" sz="3200">
-              <a:latin typeface="Times New Roman" panose="02020603050405020304" charset="0"/>
-              <a:cs typeface="Times New Roman" panose="02020603050405020304" charset="0"/>
-            </a:endParaRPr>
-          </a:p>
-          <a:p>
-            <a:endParaRPr lang="en-US" altLang="en-US" sz="3200">
-              <a:latin typeface="Times New Roman" panose="02020603050405020304" charset="0"/>
-              <a:cs typeface="Times New Roman" panose="02020603050405020304" charset="0"/>
-            </a:endParaRPr>
-          </a:p>
-          <a:p>
-            <a:r>
-              <a:rPr lang="en-US" altLang="en-US" sz="3200">
-                <a:latin typeface="Times New Roman" panose="02020603050405020304" charset="0"/>
-                <a:cs typeface="Times New Roman" panose="02020603050405020304" charset="0"/>
-              </a:rPr>
-              <a:t>Resolution: Deprioritized in favor of finishing core MVP features (auth, transactions, budgets, goals); scoped in for a future release once the delivery issue can be properly resolved.</a:t>
-            </a:r>
-            <a:endParaRPr lang="en-US" altLang="en-US" sz="3200">
-              <a:latin typeface="Times New Roman" panose="02020603050405020304" charset="0"/>
-              <a:cs typeface="Times New Roman" panose="02020603050405020304" charset="0"/>
-            </a:endParaRPr>
-          </a:p>
-        </p:txBody>
-      </p:sp>
-    </p:spTree>
-  </p:cSld>
-  <p:clrMapOvr>
-    <a:masterClrMapping/>
-  </p:clrMapOvr>
-</p:sld>
-</file>
-
-<file path=ppt/slides/slide15.xml><?xml version="1.0" encoding="utf-8"?>
-<p:sld xmlns:a="http://schemas.openxmlformats.org/drawingml/2006/main" xmlns:r="http://schemas.openxmlformats.org/officeDocument/2006/relationships" xmlns:p="http://schemas.openxmlformats.org/presentationml/2006/main">
-  <p:cSld>
-    <p:spTree>
-      <p:nvGrpSpPr>
-        <p:cNvPr id="1" name=""/>
-        <p:cNvGrpSpPr/>
-        <p:nvPr/>
-      </p:nvGrpSpPr>
-      <p:grpSpPr>
-        <a:xfrm>
-          <a:off x="0" y="0"/>
-          <a:ext cx="0" cy="0"/>
-          <a:chOff x="0" y="0"/>
-          <a:chExt cx="0" cy="0"/>
-        </a:xfrm>
-      </p:grpSpPr>
-      <p:sp>
-        <p:nvSpPr>
-          <p:cNvPr id="2" name="TextBox 1"/>
-          <p:cNvSpPr txBox="1"/>
-          <p:nvPr/>
-        </p:nvSpPr>
-        <p:spPr>
-          <a:xfrm>
-            <a:off x="228600" y="160020"/>
-            <a:ext cx="11544300" cy="6438900"/>
-          </a:xfrm>
-          <a:prstGeom prst="rect">
-            <a:avLst/>
-          </a:prstGeom>
-          <a:noFill/>
-        </p:spPr>
-        <p:txBody>
-          <a:bodyPr wrap="square" rtlCol="0">
-            <a:noAutofit/>
-          </a:bodyPr>
-          <a:lstStyle/>
-          <a:p>
-            <a:r>
-              <a:rPr lang="en-US" altLang="en-US" sz="2800" b="1" u="sng" dirty="0">
-                <a:latin typeface="Times New Roman" panose="02020603050405020304" charset="0"/>
-                <a:cs typeface="Times New Roman" panose="02020603050405020304" charset="0"/>
-              </a:rPr>
-              <a:t>Future Considerations</a:t>
-            </a:r>
-            <a:endParaRPr lang="en-US" altLang="en-US" sz="2800" dirty="0">
-              <a:latin typeface="Times New Roman" panose="02020603050405020304" charset="0"/>
-              <a:cs typeface="Times New Roman" panose="02020603050405020304" charset="0"/>
-            </a:endParaRPr>
-          </a:p>
-          <a:p>
-            <a:r>
-              <a:rPr lang="en-US" altLang="en-US" sz="2800" b="1" dirty="0">
-                <a:latin typeface="Times New Roman" panose="02020603050405020304" charset="0"/>
-                <a:cs typeface="Times New Roman" panose="02020603050405020304" charset="0"/>
-              </a:rPr>
-              <a:t>Scalability</a:t>
-            </a:r>
-            <a:r>
-              <a:rPr lang="en-GB" altLang="en-US" sz="2800" b="1" dirty="0">
-                <a:latin typeface="Times New Roman" panose="02020603050405020304" charset="0"/>
-                <a:cs typeface="Times New Roman" panose="02020603050405020304" charset="0"/>
-              </a:rPr>
-              <a:t> and </a:t>
-            </a:r>
-            <a:r>
-              <a:rPr lang="en-US" altLang="en-US" sz="2800" b="1" dirty="0">
-                <a:latin typeface="Times New Roman" panose="02020603050405020304" charset="0"/>
-                <a:cs typeface="Times New Roman" panose="02020603050405020304" charset="0"/>
-              </a:rPr>
-              <a:t>Containerization</a:t>
-            </a:r>
-            <a:r>
-              <a:rPr lang="en-GB" altLang="en-US" sz="2800" b="1" dirty="0">
-                <a:latin typeface="Times New Roman" panose="02020603050405020304" charset="0"/>
-                <a:cs typeface="Times New Roman" panose="02020603050405020304" charset="0"/>
-              </a:rPr>
-              <a:t>. </a:t>
-            </a:r>
-            <a:r>
-              <a:rPr lang="en-US" altLang="en-US" sz="2800" dirty="0">
-                <a:latin typeface="Times New Roman" panose="02020603050405020304" charset="0"/>
-                <a:cs typeface="Times New Roman" panose="02020603050405020304" charset="0"/>
-              </a:rPr>
-              <a:t>Package backend services in Docker to standardize the runtime environment and simplify moving between hosting providers</a:t>
-            </a:r>
-            <a:r>
-              <a:rPr lang="en-GB" altLang="en-US" sz="2800" dirty="0">
-                <a:latin typeface="Times New Roman" panose="02020603050405020304" charset="0"/>
-                <a:cs typeface="Times New Roman" panose="02020603050405020304" charset="0"/>
-              </a:rPr>
-              <a:t>.</a:t>
-            </a:r>
-            <a:endParaRPr lang="en-US" altLang="en-US" sz="2800" dirty="0">
-              <a:latin typeface="Times New Roman" panose="02020603050405020304" charset="0"/>
-              <a:cs typeface="Times New Roman" panose="02020603050405020304" charset="0"/>
-            </a:endParaRPr>
-          </a:p>
-          <a:p>
-            <a:r>
-              <a:rPr lang="en-US" altLang="en-US" sz="2800" b="1" dirty="0">
-                <a:latin typeface="Times New Roman" panose="02020603050405020304" charset="0"/>
-                <a:cs typeface="Times New Roman" panose="02020603050405020304" charset="0"/>
-              </a:rPr>
-              <a:t>Tech Stack </a:t>
-            </a:r>
-            <a:r>
-              <a:rPr lang="en-GB" altLang="en-US" sz="2800" b="1" dirty="0">
-                <a:latin typeface="Times New Roman" panose="02020603050405020304" charset="0"/>
-                <a:cs typeface="Times New Roman" panose="02020603050405020304" charset="0"/>
-              </a:rPr>
-              <a:t>changes and evolution. </a:t>
-            </a:r>
-            <a:r>
-              <a:rPr lang="en-US" altLang="en-US" sz="2800" dirty="0">
-                <a:latin typeface="Times New Roman" panose="02020603050405020304" charset="0"/>
-                <a:cs typeface="Times New Roman" panose="02020603050405020304" charset="0"/>
-              </a:rPr>
-              <a:t>Migrate</a:t>
-            </a:r>
-            <a:r>
-              <a:rPr lang="en-GB" altLang="en-US" sz="2800" dirty="0">
-                <a:latin typeface="Times New Roman" panose="02020603050405020304" charset="0"/>
-                <a:cs typeface="Times New Roman" panose="02020603050405020304" charset="0"/>
-              </a:rPr>
-              <a:t> from</a:t>
-            </a:r>
-            <a:r>
-              <a:rPr lang="en-US" altLang="en-US" sz="2800" dirty="0">
-                <a:latin typeface="Times New Roman" panose="02020603050405020304" charset="0"/>
-                <a:cs typeface="Times New Roman" panose="02020603050405020304" charset="0"/>
-              </a:rPr>
-              <a:t> MySQL</a:t>
-            </a:r>
-            <a:r>
-              <a:rPr lang="en-GB" altLang="en-US" sz="2800" dirty="0">
-                <a:latin typeface="Times New Roman" panose="02020603050405020304" charset="0"/>
-                <a:cs typeface="Times New Roman" panose="02020603050405020304" charset="0"/>
-              </a:rPr>
-              <a:t> to </a:t>
-            </a:r>
-            <a:r>
-              <a:rPr lang="en-US" altLang="en-US" sz="2800" dirty="0">
-                <a:latin typeface="Times New Roman" panose="02020603050405020304" charset="0"/>
-                <a:cs typeface="Times New Roman" panose="02020603050405020304" charset="0"/>
-              </a:rPr>
-              <a:t>PostgreSQL for better performance on growing transaction history; evaluate Postgres-native hosts (Render, Supabase</a:t>
-            </a:r>
-            <a:r>
-              <a:rPr lang="en-GB" altLang="en-US" sz="2800" dirty="0">
-                <a:latin typeface="Times New Roman" panose="02020603050405020304" charset="0"/>
-                <a:cs typeface="Times New Roman" panose="02020603050405020304" charset="0"/>
-              </a:rPr>
-              <a:t>, Firebase</a:t>
-            </a:r>
-            <a:r>
-              <a:rPr lang="en-US" altLang="en-US" sz="2800" dirty="0">
-                <a:latin typeface="Times New Roman" panose="02020603050405020304" charset="0"/>
-                <a:cs typeface="Times New Roman" panose="02020603050405020304" charset="0"/>
-              </a:rPr>
-              <a:t>) as Railway alternatives</a:t>
-            </a:r>
-            <a:r>
-              <a:rPr lang="en-GB" altLang="en-US" sz="2800" dirty="0">
-                <a:latin typeface="Times New Roman" panose="02020603050405020304" charset="0"/>
-                <a:cs typeface="Times New Roman" panose="02020603050405020304" charset="0"/>
-              </a:rPr>
-              <a:t> for backend hosting.</a:t>
-            </a:r>
-            <a:endParaRPr lang="en-US" altLang="en-US" sz="2800" dirty="0">
-              <a:latin typeface="Times New Roman" panose="02020603050405020304" charset="0"/>
-              <a:cs typeface="Times New Roman" panose="02020603050405020304" charset="0"/>
-            </a:endParaRPr>
-          </a:p>
-          <a:p>
-            <a:r>
-              <a:rPr lang="en-US" altLang="en-US" sz="2800" b="1" dirty="0">
-                <a:latin typeface="Times New Roman" panose="02020603050405020304" charset="0"/>
-                <a:cs typeface="Times New Roman" panose="02020603050405020304" charset="0"/>
-              </a:rPr>
-              <a:t>App Distribution</a:t>
-            </a:r>
-            <a:r>
-              <a:rPr lang="en-GB" altLang="en-US" sz="2800" b="1" dirty="0">
-                <a:latin typeface="Times New Roman" panose="02020603050405020304" charset="0"/>
-                <a:cs typeface="Times New Roman" panose="02020603050405020304" charset="0"/>
-              </a:rPr>
-              <a:t>.</a:t>
-            </a:r>
-            <a:r>
-              <a:rPr lang="en-US" altLang="en-US" sz="2800" dirty="0">
-                <a:latin typeface="Times New Roman" panose="02020603050405020304" charset="0"/>
-                <a:cs typeface="Times New Roman" panose="02020603050405020304" charset="0"/>
-              </a:rPr>
-              <a:t> Move from </a:t>
-            </a:r>
-            <a:r>
-              <a:rPr lang="en-GB" altLang="en-US" sz="2800" dirty="0">
-                <a:latin typeface="Times New Roman" panose="02020603050405020304" charset="0"/>
-                <a:cs typeface="Times New Roman" panose="02020603050405020304" charset="0"/>
-              </a:rPr>
-              <a:t>usb-debuging</a:t>
-            </a:r>
-            <a:r>
-              <a:rPr lang="en-US" altLang="en-US" sz="2800" dirty="0">
-                <a:latin typeface="Times New Roman" panose="02020603050405020304" charset="0"/>
-                <a:cs typeface="Times New Roman" panose="02020603050405020304" charset="0"/>
-              </a:rPr>
-              <a:t> </a:t>
-            </a:r>
-            <a:r>
-              <a:rPr lang="en-GB" altLang="en-US" sz="2800" dirty="0">
-                <a:latin typeface="Times New Roman" panose="02020603050405020304" charset="0"/>
-                <a:cs typeface="Times New Roman" panose="02020603050405020304" charset="0"/>
-              </a:rPr>
-              <a:t>for installation</a:t>
-            </a:r>
-            <a:r>
-              <a:rPr lang="en-US" altLang="en-US" sz="2800" dirty="0">
-                <a:latin typeface="Times New Roman" panose="02020603050405020304" charset="0"/>
-                <a:cs typeface="Times New Roman" panose="02020603050405020304" charset="0"/>
-              </a:rPr>
-              <a:t> to direct APK distribution (Firebase App Distribution </a:t>
-            </a:r>
-            <a:r>
-              <a:rPr lang="en-GB" altLang="en-US" sz="2800" dirty="0">
-                <a:latin typeface="Times New Roman" panose="02020603050405020304" charset="0"/>
-                <a:cs typeface="Times New Roman" panose="02020603050405020304" charset="0"/>
-              </a:rPr>
-              <a:t>or even</a:t>
-            </a:r>
-            <a:r>
-              <a:rPr lang="en-US" altLang="en-US" sz="2800" dirty="0">
-                <a:latin typeface="Times New Roman" panose="02020603050405020304" charset="0"/>
-                <a:cs typeface="Times New Roman" panose="02020603050405020304" charset="0"/>
-              </a:rPr>
-              <a:t> Google Play internal testing) so users can install Malihub on </a:t>
-            </a:r>
-            <a:r>
-              <a:rPr lang="en-GB" altLang="en-US" sz="2800" dirty="0">
-                <a:latin typeface="Times New Roman" panose="02020603050405020304" charset="0"/>
-                <a:cs typeface="Times New Roman" panose="02020603050405020304" charset="0"/>
-              </a:rPr>
-              <a:t>their</a:t>
-            </a:r>
-            <a:r>
-              <a:rPr lang="en-US" altLang="en-US" sz="2800" dirty="0">
-                <a:latin typeface="Times New Roman" panose="02020603050405020304" charset="0"/>
-                <a:cs typeface="Times New Roman" panose="02020603050405020304" charset="0"/>
-              </a:rPr>
-              <a:t> device</a:t>
-            </a:r>
-            <a:r>
-              <a:rPr lang="en-GB" altLang="en-US" sz="2800" dirty="0">
-                <a:latin typeface="Times New Roman" panose="02020603050405020304" charset="0"/>
-                <a:cs typeface="Times New Roman" panose="02020603050405020304" charset="0"/>
-              </a:rPr>
-              <a:t>s</a:t>
-            </a:r>
-            <a:r>
-              <a:rPr lang="en-US" altLang="en-US" sz="2800" dirty="0">
-                <a:latin typeface="Times New Roman" panose="02020603050405020304" charset="0"/>
-                <a:cs typeface="Times New Roman" panose="02020603050405020304" charset="0"/>
-              </a:rPr>
-              <a:t> </a:t>
-            </a:r>
-            <a:r>
-              <a:rPr lang="en-GB" sz="2800" dirty="0">
-                <a:latin typeface="Times New Roman" panose="02020603050405020304" charset="0"/>
-                <a:cs typeface="Times New Roman" panose="02020603050405020304" charset="0"/>
-              </a:rPr>
-              <a:t>conveniently.</a:t>
-            </a:r>
-            <a:endParaRPr lang="en-US" altLang="en-US" sz="2800" dirty="0">
-              <a:latin typeface="Times New Roman" panose="02020603050405020304" charset="0"/>
-              <a:cs typeface="Times New Roman" panose="02020603050405020304" charset="0"/>
-            </a:endParaRPr>
-          </a:p>
-          <a:p>
-            <a:r>
-              <a:rPr lang="en-US" altLang="en-US" sz="2800" b="1" dirty="0">
-                <a:latin typeface="Times New Roman" panose="02020603050405020304" charset="0"/>
-                <a:cs typeface="Times New Roman" panose="02020603050405020304" charset="0"/>
-              </a:rPr>
-              <a:t>Automated Safeguards</a:t>
-            </a:r>
-            <a:r>
-              <a:rPr lang="en-US" altLang="en-US" sz="2800" dirty="0">
-                <a:latin typeface="Times New Roman" panose="02020603050405020304" charset="0"/>
-                <a:cs typeface="Times New Roman" panose="02020603050405020304" charset="0"/>
-              </a:rPr>
-              <a:t>: Introduce unit and integration tests for financial calculations, run automatically before every deployment</a:t>
-            </a:r>
-            <a:r>
-              <a:rPr lang="en-GB" altLang="en-US" sz="2800" dirty="0">
-                <a:latin typeface="Times New Roman" panose="02020603050405020304" charset="0"/>
-                <a:cs typeface="Times New Roman" panose="02020603050405020304" charset="0"/>
-              </a:rPr>
-              <a:t>.</a:t>
-            </a:r>
-            <a:endParaRPr lang="en-GB" altLang="en-US" sz="2800" dirty="0">
-              <a:latin typeface="Times New Roman" panose="02020603050405020304" charset="0"/>
-              <a:cs typeface="Times New Roman" panose="02020603050405020304" charset="0"/>
-            </a:endParaRPr>
-          </a:p>
-          <a:p>
-            <a:r>
-              <a:rPr lang="en-US" altLang="en-US" sz="2800" b="1" dirty="0">
-                <a:latin typeface="Times New Roman" panose="02020603050405020304" charset="0"/>
-                <a:cs typeface="Times New Roman" panose="02020603050405020304" charset="0"/>
-              </a:rPr>
-              <a:t>Automated Insights</a:t>
-            </a:r>
-            <a:r>
-              <a:rPr lang="en-US" altLang="en-US" sz="2800" dirty="0">
-                <a:latin typeface="Times New Roman" panose="02020603050405020304" charset="0"/>
-                <a:cs typeface="Times New Roman" panose="02020603050405020304" charset="0"/>
-              </a:rPr>
-              <a:t>: Analyze historical transaction data to auto-generate spending summaries, budget</a:t>
-            </a:r>
-            <a:r>
-              <a:rPr lang="en-GB" altLang="en-US" sz="2800" dirty="0">
-                <a:latin typeface="Times New Roman" panose="02020603050405020304" charset="0"/>
-                <a:cs typeface="Times New Roman" panose="02020603050405020304" charset="0"/>
-              </a:rPr>
-              <a:t> against </a:t>
-            </a:r>
-            <a:r>
-              <a:rPr lang="en-US" altLang="en-US" sz="2800" dirty="0">
-                <a:latin typeface="Times New Roman" panose="02020603050405020304" charset="0"/>
-                <a:cs typeface="Times New Roman" panose="02020603050405020304" charset="0"/>
-              </a:rPr>
-              <a:t>actual alerts, and goal progress forecasts</a:t>
-            </a:r>
-            <a:r>
-              <a:rPr lang="en-GB" altLang="en-US" sz="2800" dirty="0">
-                <a:latin typeface="Times New Roman" panose="02020603050405020304" charset="0"/>
-                <a:cs typeface="Times New Roman" panose="02020603050405020304" charset="0"/>
-              </a:rPr>
-              <a:t>.</a:t>
-            </a:r>
-            <a:endParaRPr lang="en-GB" altLang="en-US" sz="2800" dirty="0">
-              <a:latin typeface="Times New Roman" panose="02020603050405020304" charset="0"/>
-              <a:cs typeface="Times New Roman" panose="02020603050405020304" charset="0"/>
-            </a:endParaRPr>
-          </a:p>
-        </p:txBody>
-      </p:sp>
-    </p:spTree>
-  </p:cSld>
-  <p:clrMapOvr>
-    <a:masterClrMapping/>
-  </p:clrMapOvr>
-  <mc:AlternateContent xmlns:mc="http://schemas.openxmlformats.org/markup-compatibility/2006">
-    <mc:Choice xmlns:p14="http://schemas.microsoft.com/office/powerpoint/2010/main" Requires="p14">
-      <p:transition spd="slow" p14:dur="3400">
-        <p14:reveal/>
-      </p:transition>
-    </mc:Choice>
-    <mc:Fallback>
-      <p:transition spd="slow">
-        <p:fade/>
-      </p:transition>
-    </mc:Fallback>
-  </mc:AlternateContent>
-</p:sld>
-</file>
-
-<file path=ppt/slides/slide16.xml><?xml version="1.0" encoding="utf-8"?>
 <p:sld xmlns:a="http://schemas.openxmlformats.org/drawingml/2006/main" xmlns:r="http://schemas.openxmlformats.org/officeDocument/2006/relationships" xmlns:p="http://schemas.openxmlformats.org/presentationml/2006/main">
   <p:cSld>
     <p:spTree>

--- a/MALIHUB POWERPOINT PRESENTATION.pptx
+++ b/MALIHUB POWERPOINT PRESENTATION.pptx
@@ -18,10 +18,12 @@
     <p:sldId id="263" r:id="rId11"/>
     <p:sldId id="264" r:id="rId12"/>
     <p:sldId id="265" r:id="rId13"/>
-    <p:sldId id="266" r:id="rId14"/>
-    <p:sldId id="272" r:id="rId15"/>
-    <p:sldId id="267" r:id="rId16"/>
-    <p:sldId id="268" r:id="rId17"/>
+    <p:sldId id="273" r:id="rId14"/>
+    <p:sldId id="274" r:id="rId15"/>
+    <p:sldId id="266" r:id="rId16"/>
+    <p:sldId id="272" r:id="rId17"/>
+    <p:sldId id="267" r:id="rId18"/>
+    <p:sldId id="268" r:id="rId19"/>
   </p:sldIdLst>
   <p:sldSz cx="12192000" cy="6858000"/>
   <p:notesSz cx="6858000" cy="9144000"/>
@@ -3954,184 +3956,312 @@
         <p:cNvGrpSpPr/>
         <p:nvPr/>
       </p:nvGrpSpPr>
-      <p:grpSpPr>
-        <a:xfrm>
-          <a:off x="0" y="0"/>
-          <a:ext cx="0" cy="0"/>
-          <a:chOff x="0" y="0"/>
-          <a:chExt cx="0" cy="0"/>
-        </a:xfrm>
-      </p:grpSpPr>
-      <p:sp>
-        <p:nvSpPr>
-          <p:cNvPr id="2" name="TextBox 1"/>
-          <p:cNvSpPr txBox="1"/>
-          <p:nvPr/>
+      <p:grpSpPr/>
+      <p:sp>
+        <p:nvSpPr>
+          <p:cNvPr id="4" name="Title 3"/>
+          <p:cNvSpPr>
+            <a:spLocks noGrp="1"/>
+          </p:cNvSpPr>
+          <p:nvPr>
+            <p:ph type="title"/>
+          </p:nvPr>
         </p:nvSpPr>
         <p:spPr>
           <a:xfrm>
-            <a:off x="101600" y="0"/>
-            <a:ext cx="11988800" cy="6433820"/>
+            <a:off x="838200" y="365125"/>
+            <a:ext cx="10515600" cy="1017270"/>
           </a:xfrm>
-          <a:prstGeom prst="rect">
-            <a:avLst/>
-          </a:prstGeom>
-          <a:noFill/>
         </p:spPr>
         <p:txBody>
-          <a:bodyPr wrap="square" rtlCol="0">
-            <a:noAutofit/>
+          <a:bodyPr/>
+          <a:p>
+            <a:r>
+              <a:rPr lang="en-GB" altLang="en-US" b="1" u="sng">
+                <a:latin typeface="Times New Roman" panose="02020603050405020304" charset="0"/>
+                <a:cs typeface="Times New Roman" panose="02020603050405020304" charset="0"/>
+              </a:rPr>
+              <a:t>BACKEND</a:t>
+            </a:r>
+            <a:endParaRPr lang="en-GB" altLang="en-US" b="1" u="sng">
+              <a:latin typeface="Times New Roman" panose="02020603050405020304" charset="0"/>
+              <a:cs typeface="Times New Roman" panose="02020603050405020304" charset="0"/>
+            </a:endParaRPr>
+          </a:p>
+        </p:txBody>
+      </p:sp>
+      <p:sp>
+        <p:nvSpPr>
+          <p:cNvPr id="5" name="Content Placeholder 4"/>
+          <p:cNvSpPr>
+            <a:spLocks noGrp="1"/>
+          </p:cNvSpPr>
+          <p:nvPr>
+            <p:ph idx="1"/>
+          </p:nvPr>
+        </p:nvSpPr>
+        <p:spPr>
+          <a:xfrm>
+            <a:off x="302260" y="1300480"/>
+            <a:ext cx="11724005" cy="5245100"/>
+          </a:xfrm>
+        </p:spPr>
+        <p:txBody>
+          <a:bodyPr>
+            <a:normAutofit fontScale="70000"/>
           </a:bodyPr>
-          <a:lstStyle/>
-          <a:p>
-            <a:endParaRPr lang="en-US" sz="2400" b="1" u="sng" dirty="0">
-              <a:latin typeface="Times New Roman" panose="02020603050405020304" charset="0"/>
-              <a:cs typeface="Times New Roman" panose="02020603050405020304" charset="0"/>
-            </a:endParaRPr>
-          </a:p>
-          <a:p>
-            <a:r>
-              <a:rPr lang="en-US" sz="2400" b="1" u="sng" dirty="0">
-                <a:latin typeface="Times New Roman" panose="02020603050405020304" charset="0"/>
-                <a:cs typeface="Times New Roman" panose="02020603050405020304" charset="0"/>
-              </a:rPr>
-              <a:t>Technical Challenges &amp; Solutions</a:t>
-            </a:r>
-            <a:endParaRPr lang="en-US" sz="2400" b="1" u="sng" dirty="0">
-              <a:latin typeface="Times New Roman" panose="02020603050405020304" charset="0"/>
-              <a:cs typeface="Times New Roman" panose="02020603050405020304" charset="0"/>
-            </a:endParaRPr>
-          </a:p>
-          <a:p>
-            <a:endParaRPr lang="en-US" sz="2400" b="1" u="sng" dirty="0">
-              <a:latin typeface="Times New Roman" panose="02020603050405020304" charset="0"/>
-              <a:cs typeface="Times New Roman" panose="02020603050405020304" charset="0"/>
-            </a:endParaRPr>
-          </a:p>
-          <a:p>
-            <a:r>
-              <a:rPr lang="en-US" sz="2400" b="1" u="sng" dirty="0">
-                <a:latin typeface="Times New Roman" panose="02020603050405020304" charset="0"/>
-                <a:cs typeface="Times New Roman" panose="02020603050405020304" charset="0"/>
-              </a:rPr>
-              <a:t>Challenge: High Hardware Resource Demand</a:t>
-            </a:r>
-            <a:endParaRPr lang="en-US" sz="2400" b="1" u="sng" dirty="0">
-              <a:latin typeface="Times New Roman" panose="02020603050405020304" charset="0"/>
-              <a:cs typeface="Times New Roman" panose="02020603050405020304" charset="0"/>
-            </a:endParaRPr>
-          </a:p>
-          <a:p>
-            <a:r>
-              <a:rPr lang="en-US" sz="2400" dirty="0">
-                <a:latin typeface="Times New Roman" panose="02020603050405020304" charset="0"/>
-                <a:cs typeface="Times New Roman" panose="02020603050405020304" charset="0"/>
-              </a:rPr>
-              <a:t>Running the Android Studio</a:t>
-            </a:r>
-            <a:r>
-              <a:rPr lang="en-GB" altLang="en-US" sz="2400" dirty="0">
-                <a:latin typeface="Times New Roman" panose="02020603050405020304" charset="0"/>
-                <a:cs typeface="Times New Roman" panose="02020603050405020304" charset="0"/>
-              </a:rPr>
-              <a:t>’s </a:t>
-            </a:r>
-            <a:r>
-              <a:rPr lang="en-US" sz="2400" dirty="0">
-                <a:latin typeface="Times New Roman" panose="02020603050405020304" charset="0"/>
-                <a:cs typeface="Times New Roman" panose="02020603050405020304" charset="0"/>
-              </a:rPr>
-              <a:t>IDE alongside heavy virtual mobile devices (Android Emulators) took up massive amounts of memory and resources on our laptops. This slowed down development and caused frequent system freezes.</a:t>
-            </a:r>
-            <a:endParaRPr lang="en-US" sz="2400" dirty="0">
-              <a:latin typeface="Times New Roman" panose="02020603050405020304" charset="0"/>
-              <a:cs typeface="Times New Roman" panose="02020603050405020304" charset="0"/>
-            </a:endParaRPr>
-          </a:p>
-          <a:p>
-            <a:r>
-              <a:rPr lang="en-GB" altLang="en-US" sz="2400" dirty="0">
-                <a:latin typeface="Times New Roman" panose="02020603050405020304" charset="0"/>
-                <a:cs typeface="Times New Roman" panose="02020603050405020304" charset="0"/>
-              </a:rPr>
-              <a:t>As a solution,</a:t>
-            </a:r>
-            <a:r>
-              <a:rPr lang="en-US" sz="2400" dirty="0">
-                <a:latin typeface="Times New Roman" panose="02020603050405020304" charset="0"/>
-                <a:cs typeface="Times New Roman" panose="02020603050405020304" charset="0"/>
-              </a:rPr>
-              <a:t> shifted to testing and running the Flutter applications directly on our physical mobile devices via USB debugging. This bypassed the emulators entirely, freed up computer resources, and significantly sped up our code testing loop.</a:t>
-            </a:r>
-            <a:endParaRPr lang="en-US" sz="2400" dirty="0">
-              <a:latin typeface="Times New Roman" panose="02020603050405020304" charset="0"/>
-              <a:cs typeface="Times New Roman" panose="02020603050405020304" charset="0"/>
-            </a:endParaRPr>
-          </a:p>
-          <a:p>
-            <a:endParaRPr lang="en-US" sz="2400" dirty="0">
-              <a:latin typeface="Times New Roman" panose="02020603050405020304" charset="0"/>
-              <a:cs typeface="Times New Roman" panose="02020603050405020304" charset="0"/>
-            </a:endParaRPr>
-          </a:p>
-          <a:p>
-            <a:r>
-              <a:rPr lang="en-US" sz="2400" b="1" u="sng" dirty="0">
-                <a:latin typeface="Times New Roman" panose="02020603050405020304" charset="0"/>
-                <a:cs typeface="Times New Roman" panose="02020603050405020304" charset="0"/>
-              </a:rPr>
-              <a:t>Challenge: Team Database Schema Synchronization</a:t>
-            </a:r>
-            <a:r>
-              <a:rPr lang="en-GB" altLang="en-US" sz="2400" b="1" u="sng" dirty="0">
-                <a:latin typeface="Times New Roman" panose="02020603050405020304" charset="0"/>
-                <a:cs typeface="Times New Roman" panose="02020603050405020304" charset="0"/>
-              </a:rPr>
-              <a:t> </a:t>
-            </a:r>
-            <a:endParaRPr lang="en-US" sz="2400" b="1" u="sng" dirty="0">
-              <a:latin typeface="Times New Roman" panose="02020603050405020304" charset="0"/>
-              <a:cs typeface="Times New Roman" panose="02020603050405020304" charset="0"/>
-            </a:endParaRPr>
-          </a:p>
-          <a:p>
-            <a:r>
-              <a:rPr lang="en-US" sz="2400" dirty="0">
-                <a:latin typeface="Times New Roman" panose="02020603050405020304" charset="0"/>
-                <a:cs typeface="Times New Roman" panose="02020603050405020304" charset="0"/>
-              </a:rPr>
-              <a:t>Merging different git branches occasionally caused local database states to go out of sync.</a:t>
-            </a:r>
-            <a:endParaRPr lang="en-US" sz="2400" dirty="0">
-              <a:latin typeface="Times New Roman" panose="02020603050405020304" charset="0"/>
-              <a:cs typeface="Times New Roman" panose="02020603050405020304" charset="0"/>
-            </a:endParaRPr>
-          </a:p>
-          <a:p>
-            <a:r>
-              <a:rPr lang="en-GB" altLang="en-US" sz="2400" dirty="0">
-                <a:latin typeface="Times New Roman" panose="02020603050405020304" charset="0"/>
-                <a:cs typeface="Times New Roman" panose="02020603050405020304" charset="0"/>
-              </a:rPr>
-              <a:t>As a troubleshoot, we</a:t>
-            </a:r>
-            <a:r>
-              <a:rPr lang="en-US" sz="2400" dirty="0">
-                <a:latin typeface="Times New Roman" panose="02020603050405020304" charset="0"/>
-                <a:cs typeface="Times New Roman" panose="02020603050405020304" charset="0"/>
-              </a:rPr>
-              <a:t> established a strict protocol where team members ran Prisma migration synchronization commands immediately after pulling code updates.</a:t>
-            </a:r>
-            <a:endParaRPr lang="en-US" sz="2400" dirty="0">
-              <a:latin typeface="Times New Roman" panose="02020603050405020304" charset="0"/>
-              <a:cs typeface="Times New Roman" panose="02020603050405020304" charset="0"/>
-            </a:endParaRPr>
-          </a:p>
-          <a:p>
-            <a:endParaRPr lang="en-US" dirty="0">
-              <a:latin typeface="Times New Roman" panose="02020603050405020304" charset="0"/>
-              <a:cs typeface="Times New Roman" panose="02020603050405020304" charset="0"/>
-            </a:endParaRPr>
+          <a:p>
+            <a:pPr marL="0" indent="0">
+              <a:buNone/>
+            </a:pPr>
+            <a:r>
+              <a:rPr lang="en-US" altLang="en-US" sz="4000">
+                <a:latin typeface="Times New Roman" panose="02020603050405020304" charset="0"/>
+                <a:cs typeface="Times New Roman" panose="02020603050405020304" charset="0"/>
+              </a:rPr>
+              <a:t>Node.js + Express</a:t>
+            </a:r>
+            <a:r>
+              <a:rPr lang="en-GB" altLang="en-US" sz="4000">
+                <a:latin typeface="Times New Roman" panose="02020603050405020304" charset="0"/>
+                <a:cs typeface="Times New Roman" panose="02020603050405020304" charset="0"/>
+              </a:rPr>
+              <a:t> to create </a:t>
+            </a:r>
+            <a:r>
+              <a:rPr lang="en-US" altLang="en-US" sz="4000">
+                <a:latin typeface="Times New Roman" panose="02020603050405020304" charset="0"/>
+                <a:cs typeface="Times New Roman" panose="02020603050405020304" charset="0"/>
+              </a:rPr>
+              <a:t>REST API server</a:t>
+            </a:r>
+            <a:r>
+              <a:rPr lang="en-GB" altLang="en-US" sz="4000">
+                <a:latin typeface="Times New Roman" panose="02020603050405020304" charset="0"/>
+                <a:cs typeface="Times New Roman" panose="02020603050405020304" charset="0"/>
+              </a:rPr>
+              <a:t>.</a:t>
+            </a:r>
+            <a:endParaRPr lang="en-US" altLang="en-US" sz="4000">
+              <a:latin typeface="Times New Roman" panose="02020603050405020304" charset="0"/>
+              <a:cs typeface="Times New Roman" panose="02020603050405020304" charset="0"/>
+            </a:endParaRPr>
+          </a:p>
+          <a:p>
+            <a:pPr marL="0" indent="0">
+              <a:buNone/>
+            </a:pPr>
+            <a:r>
+              <a:rPr lang="en-US" altLang="en-US" sz="4000">
+                <a:latin typeface="Times New Roman" panose="02020603050405020304" charset="0"/>
+                <a:cs typeface="Times New Roman" panose="02020603050405020304" charset="0"/>
+              </a:rPr>
+              <a:t>Prisma ORM</a:t>
+            </a:r>
+            <a:r>
+              <a:rPr lang="en-GB" altLang="en-US" sz="4000">
+                <a:latin typeface="Times New Roman" panose="02020603050405020304" charset="0"/>
+                <a:cs typeface="Times New Roman" panose="02020603050405020304" charset="0"/>
+              </a:rPr>
+              <a:t> for </a:t>
+            </a:r>
+            <a:r>
+              <a:rPr lang="en-US" altLang="en-US" sz="4000">
+                <a:latin typeface="Times New Roman" panose="02020603050405020304" charset="0"/>
+                <a:cs typeface="Times New Roman" panose="02020603050405020304" charset="0"/>
+              </a:rPr>
+              <a:t>type-safe database access layer</a:t>
+            </a:r>
+            <a:r>
+              <a:rPr lang="en-GB" altLang="en-US" sz="4000">
+                <a:latin typeface="Times New Roman" panose="02020603050405020304" charset="0"/>
+                <a:cs typeface="Times New Roman" panose="02020603050405020304" charset="0"/>
+              </a:rPr>
+              <a:t>.</a:t>
+            </a:r>
+            <a:endParaRPr lang="en-US" altLang="en-US" sz="4000">
+              <a:latin typeface="Times New Roman" panose="02020603050405020304" charset="0"/>
+              <a:cs typeface="Times New Roman" panose="02020603050405020304" charset="0"/>
+            </a:endParaRPr>
+          </a:p>
+          <a:p>
+            <a:pPr marL="0" indent="0">
+              <a:buNone/>
+            </a:pPr>
+            <a:r>
+              <a:rPr lang="en-US" altLang="en-US" sz="4000">
+                <a:latin typeface="Times New Roman" panose="02020603050405020304" charset="0"/>
+                <a:cs typeface="Times New Roman" panose="02020603050405020304" charset="0"/>
+              </a:rPr>
+              <a:t>MySQL </a:t>
+            </a:r>
+            <a:r>
+              <a:rPr lang="en-GB" altLang="en-US" sz="4000">
+                <a:latin typeface="Times New Roman" panose="02020603050405020304" charset="0"/>
+                <a:cs typeface="Times New Roman" panose="02020603050405020304" charset="0"/>
+              </a:rPr>
+              <a:t> to create </a:t>
+            </a:r>
+            <a:r>
+              <a:rPr lang="en-US" altLang="en-US" sz="4000">
+                <a:latin typeface="Times New Roman" panose="02020603050405020304" charset="0"/>
+                <a:cs typeface="Times New Roman" panose="02020603050405020304" charset="0"/>
+              </a:rPr>
+              <a:t>relational database</a:t>
+            </a:r>
+            <a:r>
+              <a:rPr lang="en-GB" altLang="en-US" sz="4000">
+                <a:latin typeface="Times New Roman" panose="02020603050405020304" charset="0"/>
+                <a:cs typeface="Times New Roman" panose="02020603050405020304" charset="0"/>
+              </a:rPr>
+              <a:t>.</a:t>
+            </a:r>
+            <a:endParaRPr lang="en-US" altLang="en-US" sz="4000">
+              <a:latin typeface="Times New Roman" panose="02020603050405020304" charset="0"/>
+              <a:cs typeface="Times New Roman" panose="02020603050405020304" charset="0"/>
+            </a:endParaRPr>
+          </a:p>
+          <a:p>
+            <a:pPr marL="0" indent="0">
+              <a:buNone/>
+            </a:pPr>
+            <a:r>
+              <a:rPr lang="en-US" altLang="en-US" sz="4000" b="1" u="sng">
+                <a:latin typeface="Times New Roman" panose="02020603050405020304" charset="0"/>
+                <a:cs typeface="Times New Roman" panose="02020603050405020304" charset="0"/>
+              </a:rPr>
+              <a:t>Core Responsibilities</a:t>
+            </a:r>
+            <a:endParaRPr lang="en-US" altLang="en-US" sz="4000" b="1" u="sng">
+              <a:latin typeface="Times New Roman" panose="02020603050405020304" charset="0"/>
+              <a:cs typeface="Times New Roman" panose="02020603050405020304" charset="0"/>
+            </a:endParaRPr>
+          </a:p>
+          <a:p>
+            <a:pPr marL="0" indent="0">
+              <a:buNone/>
+            </a:pPr>
+            <a:r>
+              <a:rPr lang="en-US" altLang="en-US" sz="4000">
+                <a:latin typeface="Times New Roman" panose="02020603050405020304" charset="0"/>
+                <a:cs typeface="Times New Roman" panose="02020603050405020304" charset="0"/>
+              </a:rPr>
+              <a:t>User authentication &amp; authorization</a:t>
+            </a:r>
+            <a:r>
+              <a:rPr lang="en-GB" altLang="en-US" sz="4000">
+                <a:latin typeface="Times New Roman" panose="02020603050405020304" charset="0"/>
+                <a:cs typeface="Times New Roman" panose="02020603050405020304" charset="0"/>
+              </a:rPr>
+              <a:t>. </a:t>
+            </a:r>
+            <a:r>
+              <a:rPr lang="en-US" altLang="en-US" sz="4000">
+                <a:latin typeface="Times New Roman" panose="02020603050405020304" charset="0"/>
+                <a:cs typeface="Times New Roman" panose="02020603050405020304" charset="0"/>
+              </a:rPr>
+              <a:t>JWT (7-day expiry) + bcrypt password hashing</a:t>
+            </a:r>
+            <a:r>
+              <a:rPr lang="en-GB" altLang="en-US" sz="4000">
+                <a:latin typeface="Times New Roman" panose="02020603050405020304" charset="0"/>
+                <a:cs typeface="Times New Roman" panose="02020603050405020304" charset="0"/>
+              </a:rPr>
+              <a:t>.</a:t>
+            </a:r>
+            <a:endParaRPr lang="en-US" altLang="en-US" sz="4000">
+              <a:latin typeface="Times New Roman" panose="02020603050405020304" charset="0"/>
+              <a:cs typeface="Times New Roman" panose="02020603050405020304" charset="0"/>
+            </a:endParaRPr>
+          </a:p>
+          <a:p>
+            <a:pPr marL="0" indent="0">
+              <a:buNone/>
+            </a:pPr>
+            <a:r>
+              <a:rPr lang="en-US" altLang="en-US" sz="4000">
+                <a:latin typeface="Times New Roman" panose="02020603050405020304" charset="0"/>
+                <a:cs typeface="Times New Roman" panose="02020603050405020304" charset="0"/>
+              </a:rPr>
+              <a:t>REST APIs for Accounts, Transactions, Categories, Budgets, and Financial Goals</a:t>
+            </a:r>
+            <a:r>
+              <a:rPr lang="en-GB" altLang="en-US" sz="4000">
+                <a:latin typeface="Times New Roman" panose="02020603050405020304" charset="0"/>
+                <a:cs typeface="Times New Roman" panose="02020603050405020304" charset="0"/>
+              </a:rPr>
+              <a:t>.</a:t>
+            </a:r>
+            <a:endParaRPr lang="en-US" altLang="en-US" sz="4000">
+              <a:latin typeface="Times New Roman" panose="02020603050405020304" charset="0"/>
+              <a:cs typeface="Times New Roman" panose="02020603050405020304" charset="0"/>
+            </a:endParaRPr>
+          </a:p>
+          <a:p>
+            <a:pPr marL="0" indent="0">
+              <a:buNone/>
+            </a:pPr>
+            <a:r>
+              <a:rPr lang="en-US" altLang="en-US" sz="4000">
+                <a:latin typeface="Times New Roman" panose="02020603050405020304" charset="0"/>
+                <a:cs typeface="Times New Roman" panose="02020603050405020304" charset="0"/>
+              </a:rPr>
+              <a:t>Server-side computation of budget metrics (spent, remaining, % used)</a:t>
+            </a:r>
+            <a:r>
+              <a:rPr lang="en-GB" altLang="en-US" sz="4000">
+                <a:latin typeface="Times New Roman" panose="02020603050405020304" charset="0"/>
+                <a:cs typeface="Times New Roman" panose="02020603050405020304" charset="0"/>
+              </a:rPr>
+              <a:t>, </a:t>
+            </a:r>
+            <a:r>
+              <a:rPr lang="en-US" altLang="en-US" sz="4000">
+                <a:latin typeface="Times New Roman" panose="02020603050405020304" charset="0"/>
+                <a:cs typeface="Times New Roman" panose="02020603050405020304" charset="0"/>
+              </a:rPr>
+              <a:t>kept out of the client to ensure one source of truth</a:t>
+            </a:r>
+            <a:r>
+              <a:rPr lang="en-GB" altLang="en-US" sz="4000">
+                <a:latin typeface="Times New Roman" panose="02020603050405020304" charset="0"/>
+                <a:cs typeface="Times New Roman" panose="02020603050405020304" charset="0"/>
+              </a:rPr>
+              <a:t>.</a:t>
+            </a:r>
+            <a:endParaRPr lang="en-US" altLang="en-US" sz="4000">
+              <a:latin typeface="Times New Roman" panose="02020603050405020304" charset="0"/>
+              <a:cs typeface="Times New Roman" panose="02020603050405020304" charset="0"/>
+            </a:endParaRPr>
+          </a:p>
+          <a:p>
+            <a:pPr marL="0" indent="0">
+              <a:buNone/>
+            </a:pPr>
+            <a:r>
+              <a:rPr lang="en-US" altLang="en-US" sz="4000">
+                <a:latin typeface="Times New Roman" panose="02020603050405020304" charset="0"/>
+                <a:cs typeface="Times New Roman" panose="02020603050405020304" charset="0"/>
+              </a:rPr>
+              <a:t>Notification inbox management (fetch, mark-as-read, delete)</a:t>
+            </a:r>
+            <a:r>
+              <a:rPr lang="en-GB" altLang="en-US" sz="4000">
+                <a:latin typeface="Times New Roman" panose="02020603050405020304" charset="0"/>
+                <a:cs typeface="Times New Roman" panose="02020603050405020304" charset="0"/>
+              </a:rPr>
+              <a:t>.</a:t>
+            </a:r>
+            <a:endParaRPr lang="en-US" altLang="en-US" sz="4000">
+              <a:latin typeface="Times New Roman" panose="02020603050405020304" charset="0"/>
+              <a:cs typeface="Times New Roman" panose="02020603050405020304" charset="0"/>
+            </a:endParaRPr>
+          </a:p>
+          <a:p>
+            <a:endParaRPr lang="en-US" altLang="en-US"/>
+          </a:p>
+          <a:p>
+            <a:endParaRPr lang="en-US" altLang="en-US"/>
           </a:p>
         </p:txBody>
       </p:sp>
@@ -4140,18 +4270,6 @@
   <p:clrMapOvr>
     <a:masterClrMapping/>
   </p:clrMapOvr>
-  <mc:AlternateContent xmlns:mc="http://schemas.openxmlformats.org/markup-compatibility/2006">
-    <mc:Choice xmlns:p14="http://schemas.microsoft.com/office/powerpoint/2010/main" Requires="p14">
-      <p:transition spd="slow" p14:dur="3400">
-        <p14:reveal/>
-      </p:transition>
-    </mc:Choice>
-    <mc:Fallback>
-      <p:transition spd="slow">
-        <p:fade/>
-      </p:transition>
-    </mc:Fallback>
-  </mc:AlternateContent>
 </p:sld>
 </file>
 
@@ -4177,87 +4295,125 @@
         </p:nvSpPr>
         <p:spPr>
           <a:xfrm>
-            <a:off x="271145" y="417195"/>
-            <a:ext cx="11544935" cy="6002020"/>
+            <a:off x="260350" y="269240"/>
+            <a:ext cx="11093450" cy="5908040"/>
           </a:xfrm>
         </p:spPr>
         <p:txBody>
-          <a:bodyPr>
-            <a:noAutofit/>
-          </a:bodyPr>
-          <a:p>
-            <a:r>
-              <a:rPr lang="en-US" altLang="en-US" sz="3200" b="1">
-                <a:latin typeface="Times New Roman" panose="02020603050405020304" charset="0"/>
-                <a:cs typeface="Times New Roman" panose="02020603050405020304" charset="0"/>
-              </a:rPr>
-              <a:t>Challenge: Third-Party Email Delivery on Cloud Hosting</a:t>
-            </a:r>
-            <a:endParaRPr lang="en-US" altLang="en-US" sz="3200" b="1">
-              <a:latin typeface="Times New Roman" panose="02020603050405020304" charset="0"/>
-              <a:cs typeface="Times New Roman" panose="02020603050405020304" charset="0"/>
-            </a:endParaRPr>
-          </a:p>
-          <a:p>
-            <a:endParaRPr lang="en-US" altLang="en-US" sz="3200">
-              <a:latin typeface="Times New Roman" panose="02020603050405020304" charset="0"/>
-              <a:cs typeface="Times New Roman" panose="02020603050405020304" charset="0"/>
-            </a:endParaRPr>
-          </a:p>
-          <a:p>
-            <a:r>
-              <a:rPr lang="en-US" altLang="en-US" sz="3200">
-                <a:latin typeface="Times New Roman" panose="02020603050405020304" charset="0"/>
-                <a:cs typeface="Times New Roman" panose="02020603050405020304" charset="0"/>
-              </a:rPr>
-              <a:t>Built password recovery using Nodemailer over Gmail SMTP</a:t>
-            </a:r>
-            <a:endParaRPr lang="en-US" altLang="en-US" sz="3200">
-              <a:latin typeface="Times New Roman" panose="02020603050405020304" charset="0"/>
-              <a:cs typeface="Times New Roman" panose="02020603050405020304" charset="0"/>
-            </a:endParaRPr>
-          </a:p>
-          <a:p>
-            <a:r>
-              <a:rPr lang="en-US" altLang="en-US" sz="3200">
-                <a:latin typeface="Times New Roman" panose="02020603050405020304" charset="0"/>
-                <a:cs typeface="Times New Roman" panose="02020603050405020304" charset="0"/>
-              </a:rPr>
-              <a:t>Discovered Railway's hosting environment lacks reliable outbound SMTP connectivity (blocked/limited IPv6 egress on standard mail ports)</a:t>
-            </a:r>
-            <a:endParaRPr lang="en-US" altLang="en-US" sz="3200">
-              <a:latin typeface="Times New Roman" panose="02020603050405020304" charset="0"/>
-              <a:cs typeface="Times New Roman" panose="02020603050405020304" charset="0"/>
-            </a:endParaRPr>
-          </a:p>
-          <a:p>
-            <a:r>
-              <a:rPr lang="en-US" altLang="en-US" sz="3200">
-                <a:latin typeface="Times New Roman" panose="02020603050405020304" charset="0"/>
-                <a:cs typeface="Times New Roman" panose="02020603050405020304" charset="0"/>
-              </a:rPr>
-              <a:t>Diagnosing and resolving a hosting-specific networking issue carried real time cost within a tight 3-week timeline</a:t>
-            </a:r>
-            <a:endParaRPr lang="en-US" altLang="en-US" sz="3200">
-              <a:latin typeface="Times New Roman" panose="02020603050405020304" charset="0"/>
-              <a:cs typeface="Times New Roman" panose="02020603050405020304" charset="0"/>
-            </a:endParaRPr>
-          </a:p>
-          <a:p>
-            <a:endParaRPr lang="en-US" altLang="en-US" sz="3200">
-              <a:latin typeface="Times New Roman" panose="02020603050405020304" charset="0"/>
-              <a:cs typeface="Times New Roman" panose="02020603050405020304" charset="0"/>
-            </a:endParaRPr>
-          </a:p>
-          <a:p>
-            <a:r>
-              <a:rPr lang="en-US" altLang="en-US" sz="3200">
-                <a:latin typeface="Times New Roman" panose="02020603050405020304" charset="0"/>
-                <a:cs typeface="Times New Roman" panose="02020603050405020304" charset="0"/>
-              </a:rPr>
-              <a:t>Resolution: Deprioritized in favor of finishing core MVP features (auth, transactions, budgets, goals); scoped in for a future release once the delivery issue can be properly resolved.</a:t>
-            </a:r>
-            <a:endParaRPr lang="en-US" altLang="en-US" sz="3200">
+          <a:bodyPr/>
+          <a:p>
+            <a:pPr marL="0" indent="0">
+              <a:buNone/>
+            </a:pPr>
+            <a:r>
+              <a:rPr lang="en-US" altLang="en-US" sz="3600" b="1" u="sng">
+                <a:latin typeface="Times New Roman" panose="02020603050405020304" charset="0"/>
+                <a:cs typeface="Times New Roman" panose="02020603050405020304" charset="0"/>
+                <a:sym typeface="+mn-ea"/>
+              </a:rPr>
+              <a:t>Deployment</a:t>
+            </a:r>
+            <a:endParaRPr lang="en-US" altLang="en-US" sz="3600" b="1" u="sng">
+              <a:latin typeface="Times New Roman" panose="02020603050405020304" charset="0"/>
+              <a:cs typeface="Times New Roman" panose="02020603050405020304" charset="0"/>
+            </a:endParaRPr>
+          </a:p>
+          <a:p>
+            <a:pPr marL="0" indent="0">
+              <a:buNone/>
+            </a:pPr>
+            <a:r>
+              <a:rPr lang="en-US" altLang="en-US" sz="3600">
+                <a:latin typeface="Times New Roman" panose="02020603050405020304" charset="0"/>
+                <a:cs typeface="Times New Roman" panose="02020603050405020304" charset="0"/>
+                <a:sym typeface="+mn-ea"/>
+              </a:rPr>
+              <a:t>Hosted on Railway</a:t>
+            </a:r>
+            <a:r>
+              <a:rPr lang="en-GB" altLang="en-US" sz="3600">
+                <a:latin typeface="Times New Roman" panose="02020603050405020304" charset="0"/>
+                <a:cs typeface="Times New Roman" panose="02020603050405020304" charset="0"/>
+                <a:sym typeface="+mn-ea"/>
+              </a:rPr>
+              <a:t> by a MySQL database service created by establishing a connection though ports with a local MySQL server. </a:t>
+            </a:r>
+            <a:endParaRPr lang="en-US" altLang="en-US" sz="3600">
+              <a:latin typeface="Times New Roman" panose="02020603050405020304" charset="0"/>
+              <a:cs typeface="Times New Roman" panose="02020603050405020304" charset="0"/>
+            </a:endParaRPr>
+          </a:p>
+          <a:p>
+            <a:pPr marL="0" indent="0">
+              <a:buNone/>
+            </a:pPr>
+            <a:r>
+              <a:rPr lang="en-US" altLang="en-US" sz="3600">
+                <a:latin typeface="Times New Roman" panose="02020603050405020304" charset="0"/>
+                <a:cs typeface="Times New Roman" panose="02020603050405020304" charset="0"/>
+                <a:sym typeface="+mn-ea"/>
+              </a:rPr>
+              <a:t>Continuous deployment</a:t>
+            </a:r>
+            <a:r>
+              <a:rPr lang="en-GB" altLang="en-US" sz="3600">
+                <a:latin typeface="Times New Roman" panose="02020603050405020304" charset="0"/>
+                <a:cs typeface="Times New Roman" panose="02020603050405020304" charset="0"/>
+                <a:sym typeface="+mn-ea"/>
+              </a:rPr>
+              <a:t>, </a:t>
+            </a:r>
+            <a:r>
+              <a:rPr lang="en-US" altLang="en-US" sz="3600">
+                <a:latin typeface="Times New Roman" panose="02020603050405020304" charset="0"/>
+                <a:cs typeface="Times New Roman" panose="02020603050405020304" charset="0"/>
+                <a:sym typeface="+mn-ea"/>
+              </a:rPr>
+              <a:t>auto-deploys on every push to GitHub</a:t>
+            </a:r>
+            <a:r>
+              <a:rPr lang="en-GB" altLang="en-US" sz="3600">
+                <a:latin typeface="Times New Roman" panose="02020603050405020304" charset="0"/>
+                <a:cs typeface="Times New Roman" panose="02020603050405020304" charset="0"/>
+                <a:sym typeface="+mn-ea"/>
+              </a:rPr>
+              <a:t>.</a:t>
+            </a:r>
+            <a:endParaRPr lang="en-US" altLang="en-US" sz="3600">
+              <a:latin typeface="Times New Roman" panose="02020603050405020304" charset="0"/>
+              <a:cs typeface="Times New Roman" panose="02020603050405020304" charset="0"/>
+            </a:endParaRPr>
+          </a:p>
+          <a:p>
+            <a:pPr marL="0" indent="0">
+              <a:buNone/>
+            </a:pPr>
+            <a:r>
+              <a:rPr lang="en-US" altLang="en-US" sz="3600">
+                <a:latin typeface="Times New Roman" panose="02020603050405020304" charset="0"/>
+                <a:cs typeface="Times New Roman" panose="02020603050405020304" charset="0"/>
+                <a:sym typeface="+mn-ea"/>
+              </a:rPr>
+              <a:t>Fixed environment variables (e.g. JWT_SECRET) to keep user sessions stable across redeploys</a:t>
+            </a:r>
+            <a:r>
+              <a:rPr lang="en-GB" altLang="en-US" sz="3600">
+                <a:latin typeface="Times New Roman" panose="02020603050405020304" charset="0"/>
+                <a:cs typeface="Times New Roman" panose="02020603050405020304" charset="0"/>
+                <a:sym typeface="+mn-ea"/>
+              </a:rPr>
+              <a:t>.</a:t>
+            </a:r>
+            <a:endParaRPr lang="en-US" altLang="en-US" sz="3600">
+              <a:latin typeface="Times New Roman" panose="02020603050405020304" charset="0"/>
+              <a:cs typeface="Times New Roman" panose="02020603050405020304" charset="0"/>
+            </a:endParaRPr>
+          </a:p>
+          <a:p>
+            <a:pPr marL="0" indent="0">
+              <a:buNone/>
+            </a:pPr>
+            <a:endParaRPr lang="en-US" sz="3600">
               <a:latin typeface="Times New Roman" panose="02020603050405020304" charset="0"/>
               <a:cs typeface="Times New Roman" panose="02020603050405020304" charset="0"/>
             </a:endParaRPr>
@@ -4297,8 +4453,8 @@
         </p:nvSpPr>
         <p:spPr>
           <a:xfrm>
-            <a:off x="228600" y="160020"/>
-            <a:ext cx="11544300" cy="6438900"/>
+            <a:off x="101600" y="0"/>
+            <a:ext cx="11988800" cy="6433820"/>
           </a:xfrm>
           <a:prstGeom prst="rect">
             <a:avLst/>
@@ -4311,310 +4467,151 @@
           </a:bodyPr>
           <a:lstStyle/>
           <a:p>
-            <a:r>
-              <a:rPr lang="en-US" altLang="en-US" sz="2800" b="1" u="sng" dirty="0">
-                <a:latin typeface="Times New Roman" panose="02020603050405020304" charset="0"/>
-                <a:cs typeface="Times New Roman" panose="02020603050405020304" charset="0"/>
-              </a:rPr>
-              <a:t>Future Considerations</a:t>
-            </a:r>
-            <a:endParaRPr lang="en-US" altLang="en-US" sz="2800" dirty="0">
-              <a:latin typeface="Times New Roman" panose="02020603050405020304" charset="0"/>
-              <a:cs typeface="Times New Roman" panose="02020603050405020304" charset="0"/>
-            </a:endParaRPr>
-          </a:p>
-          <a:p>
-            <a:r>
-              <a:rPr lang="en-US" altLang="en-US" sz="2800" b="1" dirty="0">
-                <a:latin typeface="Times New Roman" panose="02020603050405020304" charset="0"/>
-                <a:cs typeface="Times New Roman" panose="02020603050405020304" charset="0"/>
-              </a:rPr>
-              <a:t>Scalability</a:t>
-            </a:r>
-            <a:r>
-              <a:rPr lang="en-GB" altLang="en-US" sz="2800" b="1" dirty="0">
-                <a:latin typeface="Times New Roman" panose="02020603050405020304" charset="0"/>
-                <a:cs typeface="Times New Roman" panose="02020603050405020304" charset="0"/>
-              </a:rPr>
-              <a:t> and </a:t>
-            </a:r>
-            <a:r>
-              <a:rPr lang="en-US" altLang="en-US" sz="2800" b="1" dirty="0">
-                <a:latin typeface="Times New Roman" panose="02020603050405020304" charset="0"/>
-                <a:cs typeface="Times New Roman" panose="02020603050405020304" charset="0"/>
-              </a:rPr>
-              <a:t>Containerization</a:t>
-            </a:r>
-            <a:r>
-              <a:rPr lang="en-GB" altLang="en-US" sz="2800" b="1" dirty="0">
-                <a:latin typeface="Times New Roman" panose="02020603050405020304" charset="0"/>
-                <a:cs typeface="Times New Roman" panose="02020603050405020304" charset="0"/>
-              </a:rPr>
-              <a:t>. </a:t>
-            </a:r>
-            <a:r>
-              <a:rPr lang="en-US" altLang="en-US" sz="2800" dirty="0">
-                <a:latin typeface="Times New Roman" panose="02020603050405020304" charset="0"/>
-                <a:cs typeface="Times New Roman" panose="02020603050405020304" charset="0"/>
-              </a:rPr>
-              <a:t>Package backend services in Docker to standardize the runtime environment and simplify moving between hosting providers</a:t>
-            </a:r>
-            <a:r>
-              <a:rPr lang="en-GB" altLang="en-US" sz="2800" dirty="0">
-                <a:latin typeface="Times New Roman" panose="02020603050405020304" charset="0"/>
-                <a:cs typeface="Times New Roman" panose="02020603050405020304" charset="0"/>
-              </a:rPr>
-              <a:t>.</a:t>
-            </a:r>
-            <a:endParaRPr lang="en-US" altLang="en-US" sz="2800" dirty="0">
-              <a:latin typeface="Times New Roman" panose="02020603050405020304" charset="0"/>
-              <a:cs typeface="Times New Roman" panose="02020603050405020304" charset="0"/>
-            </a:endParaRPr>
-          </a:p>
-          <a:p>
-            <a:r>
-              <a:rPr lang="en-US" altLang="en-US" sz="2800" b="1" dirty="0">
-                <a:latin typeface="Times New Roman" panose="02020603050405020304" charset="0"/>
-                <a:cs typeface="Times New Roman" panose="02020603050405020304" charset="0"/>
-              </a:rPr>
-              <a:t>Tech Stack </a:t>
-            </a:r>
-            <a:r>
-              <a:rPr lang="en-GB" altLang="en-US" sz="2800" b="1" dirty="0">
-                <a:latin typeface="Times New Roman" panose="02020603050405020304" charset="0"/>
-                <a:cs typeface="Times New Roman" panose="02020603050405020304" charset="0"/>
-              </a:rPr>
-              <a:t>changes and evolution. </a:t>
-            </a:r>
-            <a:r>
-              <a:rPr lang="en-US" altLang="en-US" sz="2800" dirty="0">
-                <a:latin typeface="Times New Roman" panose="02020603050405020304" charset="0"/>
-                <a:cs typeface="Times New Roman" panose="02020603050405020304" charset="0"/>
-              </a:rPr>
-              <a:t>Migrate</a:t>
-            </a:r>
-            <a:r>
-              <a:rPr lang="en-GB" altLang="en-US" sz="2800" dirty="0">
-                <a:latin typeface="Times New Roman" panose="02020603050405020304" charset="0"/>
-                <a:cs typeface="Times New Roman" panose="02020603050405020304" charset="0"/>
-              </a:rPr>
-              <a:t> from</a:t>
-            </a:r>
-            <a:r>
-              <a:rPr lang="en-US" altLang="en-US" sz="2800" dirty="0">
-                <a:latin typeface="Times New Roman" panose="02020603050405020304" charset="0"/>
-                <a:cs typeface="Times New Roman" panose="02020603050405020304" charset="0"/>
-              </a:rPr>
-              <a:t> MySQL</a:t>
-            </a:r>
-            <a:r>
-              <a:rPr lang="en-GB" altLang="en-US" sz="2800" dirty="0">
-                <a:latin typeface="Times New Roman" panose="02020603050405020304" charset="0"/>
-                <a:cs typeface="Times New Roman" panose="02020603050405020304" charset="0"/>
-              </a:rPr>
-              <a:t> to </a:t>
-            </a:r>
-            <a:r>
-              <a:rPr lang="en-US" altLang="en-US" sz="2800" dirty="0">
-                <a:latin typeface="Times New Roman" panose="02020603050405020304" charset="0"/>
-                <a:cs typeface="Times New Roman" panose="02020603050405020304" charset="0"/>
-              </a:rPr>
-              <a:t>PostgreSQL for better performance on growing transaction history; evaluate Postgres-native hosts (Render, Supabase</a:t>
-            </a:r>
-            <a:r>
-              <a:rPr lang="en-GB" altLang="en-US" sz="2800" dirty="0">
-                <a:latin typeface="Times New Roman" panose="02020603050405020304" charset="0"/>
-                <a:cs typeface="Times New Roman" panose="02020603050405020304" charset="0"/>
-              </a:rPr>
-              <a:t>, Firebase</a:t>
-            </a:r>
-            <a:r>
-              <a:rPr lang="en-US" altLang="en-US" sz="2800" dirty="0">
-                <a:latin typeface="Times New Roman" panose="02020603050405020304" charset="0"/>
-                <a:cs typeface="Times New Roman" panose="02020603050405020304" charset="0"/>
-              </a:rPr>
-              <a:t>) as Railway alternatives</a:t>
-            </a:r>
-            <a:r>
-              <a:rPr lang="en-GB" altLang="en-US" sz="2800" dirty="0">
-                <a:latin typeface="Times New Roman" panose="02020603050405020304" charset="0"/>
-                <a:cs typeface="Times New Roman" panose="02020603050405020304" charset="0"/>
-              </a:rPr>
-              <a:t> for backend hosting.</a:t>
-            </a:r>
-            <a:endParaRPr lang="en-US" altLang="en-US" sz="2800" dirty="0">
-              <a:latin typeface="Times New Roman" panose="02020603050405020304" charset="0"/>
-              <a:cs typeface="Times New Roman" panose="02020603050405020304" charset="0"/>
-            </a:endParaRPr>
-          </a:p>
-          <a:p>
-            <a:r>
-              <a:rPr lang="en-US" altLang="en-US" sz="2800" b="1" dirty="0">
-                <a:latin typeface="Times New Roman" panose="02020603050405020304" charset="0"/>
-                <a:cs typeface="Times New Roman" panose="02020603050405020304" charset="0"/>
-              </a:rPr>
-              <a:t>App Distribution</a:t>
-            </a:r>
-            <a:r>
-              <a:rPr lang="en-GB" altLang="en-US" sz="2800" b="1" dirty="0">
-                <a:latin typeface="Times New Roman" panose="02020603050405020304" charset="0"/>
-                <a:cs typeface="Times New Roman" panose="02020603050405020304" charset="0"/>
-              </a:rPr>
-              <a:t>.</a:t>
-            </a:r>
-            <a:r>
-              <a:rPr lang="en-US" altLang="en-US" sz="2800" dirty="0">
-                <a:latin typeface="Times New Roman" panose="02020603050405020304" charset="0"/>
-                <a:cs typeface="Times New Roman" panose="02020603050405020304" charset="0"/>
-              </a:rPr>
-              <a:t> Move from </a:t>
-            </a:r>
-            <a:r>
-              <a:rPr lang="en-GB" altLang="en-US" sz="2800" dirty="0">
-                <a:latin typeface="Times New Roman" panose="02020603050405020304" charset="0"/>
-                <a:cs typeface="Times New Roman" panose="02020603050405020304" charset="0"/>
-              </a:rPr>
-              <a:t>usb-debuging</a:t>
-            </a:r>
-            <a:r>
-              <a:rPr lang="en-US" altLang="en-US" sz="2800" dirty="0">
+            <a:endParaRPr lang="en-US" sz="2400" b="1" u="sng" dirty="0">
+              <a:latin typeface="Times New Roman" panose="02020603050405020304" charset="0"/>
+              <a:cs typeface="Times New Roman" panose="02020603050405020304" charset="0"/>
+            </a:endParaRPr>
+          </a:p>
+          <a:p>
+            <a:r>
+              <a:rPr lang="en-US" sz="2400" b="1" u="sng" dirty="0">
+                <a:latin typeface="Times New Roman" panose="02020603050405020304" charset="0"/>
+                <a:cs typeface="Times New Roman" panose="02020603050405020304" charset="0"/>
+              </a:rPr>
+              <a:t>Technical Challenges &amp; Solutions</a:t>
+            </a:r>
+            <a:endParaRPr lang="en-US" sz="2400" b="1" u="sng" dirty="0">
+              <a:latin typeface="Times New Roman" panose="02020603050405020304" charset="0"/>
+              <a:cs typeface="Times New Roman" panose="02020603050405020304" charset="0"/>
+            </a:endParaRPr>
+          </a:p>
+          <a:p>
+            <a:endParaRPr lang="en-US" sz="2400" b="1" u="sng" dirty="0">
+              <a:latin typeface="Times New Roman" panose="02020603050405020304" charset="0"/>
+              <a:cs typeface="Times New Roman" panose="02020603050405020304" charset="0"/>
+            </a:endParaRPr>
+          </a:p>
+          <a:p>
+            <a:r>
+              <a:rPr lang="en-US" sz="2400" b="1" u="sng" dirty="0">
+                <a:latin typeface="Times New Roman" panose="02020603050405020304" charset="0"/>
+                <a:cs typeface="Times New Roman" panose="02020603050405020304" charset="0"/>
+              </a:rPr>
+              <a:t>Challenge: High Hardware Resource Demand</a:t>
+            </a:r>
+            <a:endParaRPr lang="en-US" sz="2400" b="1" u="sng" dirty="0">
+              <a:latin typeface="Times New Roman" panose="02020603050405020304" charset="0"/>
+              <a:cs typeface="Times New Roman" panose="02020603050405020304" charset="0"/>
+            </a:endParaRPr>
+          </a:p>
+          <a:p>
+            <a:r>
+              <a:rPr lang="en-US" sz="2400" dirty="0">
+                <a:latin typeface="Times New Roman" panose="02020603050405020304" charset="0"/>
+                <a:cs typeface="Times New Roman" panose="02020603050405020304" charset="0"/>
+              </a:rPr>
+              <a:t>Running the Android Studio</a:t>
+            </a:r>
+            <a:r>
+              <a:rPr lang="en-GB" altLang="en-US" sz="2400" dirty="0">
+                <a:latin typeface="Times New Roman" panose="02020603050405020304" charset="0"/>
+                <a:cs typeface="Times New Roman" panose="02020603050405020304" charset="0"/>
+              </a:rPr>
+              <a:t>’s </a:t>
+            </a:r>
+            <a:r>
+              <a:rPr lang="en-US" sz="2400" dirty="0">
+                <a:latin typeface="Times New Roman" panose="02020603050405020304" charset="0"/>
+                <a:cs typeface="Times New Roman" panose="02020603050405020304" charset="0"/>
+              </a:rPr>
+              <a:t>IDE alongside heavy virtual mobile devices (Android Emulators) took up massive amounts of memory and resources on our laptops. This slowed down development and caused frequent system freezes.</a:t>
+            </a:r>
+            <a:endParaRPr lang="en-US" sz="2400" dirty="0">
+              <a:latin typeface="Times New Roman" panose="02020603050405020304" charset="0"/>
+              <a:cs typeface="Times New Roman" panose="02020603050405020304" charset="0"/>
+            </a:endParaRPr>
+          </a:p>
+          <a:p>
+            <a:r>
+              <a:rPr lang="en-GB" altLang="en-US" sz="2400" dirty="0">
+                <a:latin typeface="Times New Roman" panose="02020603050405020304" charset="0"/>
+                <a:cs typeface="Times New Roman" panose="02020603050405020304" charset="0"/>
+              </a:rPr>
+              <a:t>As a solution,</a:t>
+            </a:r>
+            <a:r>
+              <a:rPr lang="en-US" sz="2400" dirty="0">
+                <a:latin typeface="Times New Roman" panose="02020603050405020304" charset="0"/>
+                <a:cs typeface="Times New Roman" panose="02020603050405020304" charset="0"/>
+              </a:rPr>
+              <a:t> shifted to testing and running the Flutter applications directly on our physical mobile devices via USB debugging. This bypassed the emulators entirely, freed up computer resources, and significantly sped up our code testing loop.</a:t>
+            </a:r>
+            <a:endParaRPr lang="en-US" sz="2400" dirty="0">
+              <a:latin typeface="Times New Roman" panose="02020603050405020304" charset="0"/>
+              <a:cs typeface="Times New Roman" panose="02020603050405020304" charset="0"/>
+            </a:endParaRPr>
+          </a:p>
+          <a:p>
+            <a:endParaRPr lang="en-US" sz="2400" dirty="0">
+              <a:latin typeface="Times New Roman" panose="02020603050405020304" charset="0"/>
+              <a:cs typeface="Times New Roman" panose="02020603050405020304" charset="0"/>
+            </a:endParaRPr>
+          </a:p>
+          <a:p>
+            <a:r>
+              <a:rPr lang="en-US" sz="2400" b="1" u="sng" dirty="0">
+                <a:latin typeface="Times New Roman" panose="02020603050405020304" charset="0"/>
+                <a:cs typeface="Times New Roman" panose="02020603050405020304" charset="0"/>
+              </a:rPr>
+              <a:t>Challenge: Team Database Schema Synchronization</a:t>
+            </a:r>
+            <a:r>
+              <a:rPr lang="en-GB" altLang="en-US" sz="2400" b="1" u="sng" dirty="0">
                 <a:latin typeface="Times New Roman" panose="02020603050405020304" charset="0"/>
                 <a:cs typeface="Times New Roman" panose="02020603050405020304" charset="0"/>
               </a:rPr>
               <a:t> </a:t>
             </a:r>
-            <a:r>
-              <a:rPr lang="en-GB" altLang="en-US" sz="2800" dirty="0">
-                <a:latin typeface="Times New Roman" panose="02020603050405020304" charset="0"/>
-                <a:cs typeface="Times New Roman" panose="02020603050405020304" charset="0"/>
-              </a:rPr>
-              <a:t>for installation</a:t>
-            </a:r>
-            <a:r>
-              <a:rPr lang="en-US" altLang="en-US" sz="2800" dirty="0">
-                <a:latin typeface="Times New Roman" panose="02020603050405020304" charset="0"/>
-                <a:cs typeface="Times New Roman" panose="02020603050405020304" charset="0"/>
-              </a:rPr>
-              <a:t> to direct APK distribution (Firebase App Distribution </a:t>
-            </a:r>
-            <a:r>
-              <a:rPr lang="en-GB" altLang="en-US" sz="2800" dirty="0">
-                <a:latin typeface="Times New Roman" panose="02020603050405020304" charset="0"/>
-                <a:cs typeface="Times New Roman" panose="02020603050405020304" charset="0"/>
-              </a:rPr>
-              <a:t>or even</a:t>
-            </a:r>
-            <a:r>
-              <a:rPr lang="en-US" altLang="en-US" sz="2800" dirty="0">
-                <a:latin typeface="Times New Roman" panose="02020603050405020304" charset="0"/>
-                <a:cs typeface="Times New Roman" panose="02020603050405020304" charset="0"/>
-              </a:rPr>
-              <a:t> Google Play internal testing) so users can install Malihub on </a:t>
-            </a:r>
-            <a:r>
-              <a:rPr lang="en-GB" altLang="en-US" sz="2800" dirty="0">
-                <a:latin typeface="Times New Roman" panose="02020603050405020304" charset="0"/>
-                <a:cs typeface="Times New Roman" panose="02020603050405020304" charset="0"/>
-              </a:rPr>
-              <a:t>their</a:t>
-            </a:r>
-            <a:r>
-              <a:rPr lang="en-US" altLang="en-US" sz="2800" dirty="0">
-                <a:latin typeface="Times New Roman" panose="02020603050405020304" charset="0"/>
-                <a:cs typeface="Times New Roman" panose="02020603050405020304" charset="0"/>
-              </a:rPr>
-              <a:t> device</a:t>
-            </a:r>
-            <a:r>
-              <a:rPr lang="en-GB" altLang="en-US" sz="2800" dirty="0">
-                <a:latin typeface="Times New Roman" panose="02020603050405020304" charset="0"/>
-                <a:cs typeface="Times New Roman" panose="02020603050405020304" charset="0"/>
-              </a:rPr>
-              <a:t>s</a:t>
-            </a:r>
-            <a:r>
-              <a:rPr lang="en-US" altLang="en-US" sz="2800" dirty="0">
-                <a:latin typeface="Times New Roman" panose="02020603050405020304" charset="0"/>
-                <a:cs typeface="Times New Roman" panose="02020603050405020304" charset="0"/>
-              </a:rPr>
-              <a:t> </a:t>
-            </a:r>
-            <a:r>
-              <a:rPr lang="en-GB" sz="2800" dirty="0">
-                <a:latin typeface="Times New Roman" panose="02020603050405020304" charset="0"/>
-                <a:cs typeface="Times New Roman" panose="02020603050405020304" charset="0"/>
-              </a:rPr>
-              <a:t>conveniently.</a:t>
-            </a:r>
-            <a:endParaRPr lang="en-US" altLang="en-US" sz="2800" dirty="0">
-              <a:latin typeface="Times New Roman" panose="02020603050405020304" charset="0"/>
-              <a:cs typeface="Times New Roman" panose="02020603050405020304" charset="0"/>
-            </a:endParaRPr>
-          </a:p>
-          <a:p>
-            <a:r>
-              <a:rPr lang="en-US" altLang="en-US" sz="2800" b="1" dirty="0">
-                <a:latin typeface="Times New Roman" panose="02020603050405020304" charset="0"/>
-                <a:cs typeface="Times New Roman" panose="02020603050405020304" charset="0"/>
-              </a:rPr>
-              <a:t>Automated Safeguards</a:t>
-            </a:r>
-            <a:r>
-              <a:rPr lang="en-US" altLang="en-US" sz="2800" dirty="0">
-                <a:latin typeface="Times New Roman" panose="02020603050405020304" charset="0"/>
-                <a:cs typeface="Times New Roman" panose="02020603050405020304" charset="0"/>
-              </a:rPr>
-              <a:t>: Introduce unit and integration tests for financial calculations, run automatically before every deployment</a:t>
-            </a:r>
-            <a:r>
-              <a:rPr lang="en-GB" altLang="en-US" sz="2800" dirty="0">
-                <a:latin typeface="Times New Roman" panose="02020603050405020304" charset="0"/>
-                <a:cs typeface="Times New Roman" panose="02020603050405020304" charset="0"/>
-              </a:rPr>
-              <a:t>.</a:t>
-            </a:r>
-            <a:endParaRPr lang="en-GB" altLang="en-US" sz="2800" dirty="0">
-              <a:latin typeface="Times New Roman" panose="02020603050405020304" charset="0"/>
-              <a:cs typeface="Times New Roman" panose="02020603050405020304" charset="0"/>
-            </a:endParaRPr>
-          </a:p>
-          <a:p>
-            <a:r>
-              <a:rPr lang="en-US" altLang="en-US" sz="2800" b="1" dirty="0">
-                <a:latin typeface="Times New Roman" panose="02020603050405020304" charset="0"/>
-                <a:cs typeface="Times New Roman" panose="02020603050405020304" charset="0"/>
-              </a:rPr>
-              <a:t>Automated Insights</a:t>
-            </a:r>
-            <a:r>
-              <a:rPr lang="en-US" altLang="en-US" sz="2800" dirty="0">
-                <a:latin typeface="Times New Roman" panose="02020603050405020304" charset="0"/>
-                <a:cs typeface="Times New Roman" panose="02020603050405020304" charset="0"/>
-              </a:rPr>
-              <a:t>: Analyze historical transaction data to auto-generate spending summaries, budget</a:t>
-            </a:r>
-            <a:r>
-              <a:rPr lang="en-GB" altLang="en-US" sz="2800" dirty="0">
-                <a:latin typeface="Times New Roman" panose="02020603050405020304" charset="0"/>
-                <a:cs typeface="Times New Roman" panose="02020603050405020304" charset="0"/>
-              </a:rPr>
-              <a:t> against </a:t>
-            </a:r>
-            <a:r>
-              <a:rPr lang="en-US" altLang="en-US" sz="2800" dirty="0">
-                <a:latin typeface="Times New Roman" panose="02020603050405020304" charset="0"/>
-                <a:cs typeface="Times New Roman" panose="02020603050405020304" charset="0"/>
-              </a:rPr>
-              <a:t>actual alerts, and goal progress forecasts</a:t>
-            </a:r>
-            <a:r>
-              <a:rPr lang="en-GB" altLang="en-US" sz="2800" dirty="0">
-                <a:latin typeface="Times New Roman" panose="02020603050405020304" charset="0"/>
-                <a:cs typeface="Times New Roman" panose="02020603050405020304" charset="0"/>
-              </a:rPr>
-              <a:t>.</a:t>
-            </a:r>
-            <a:endParaRPr lang="en-GB" altLang="en-US" sz="2800" dirty="0">
+            <a:endParaRPr lang="en-US" sz="2400" b="1" u="sng" dirty="0">
+              <a:latin typeface="Times New Roman" panose="02020603050405020304" charset="0"/>
+              <a:cs typeface="Times New Roman" panose="02020603050405020304" charset="0"/>
+            </a:endParaRPr>
+          </a:p>
+          <a:p>
+            <a:r>
+              <a:rPr lang="en-US" sz="2400" dirty="0">
+                <a:latin typeface="Times New Roman" panose="02020603050405020304" charset="0"/>
+                <a:cs typeface="Times New Roman" panose="02020603050405020304" charset="0"/>
+              </a:rPr>
+              <a:t>Merging different git branches occasionally caused local database states to go out of sync.</a:t>
+            </a:r>
+            <a:endParaRPr lang="en-US" sz="2400" dirty="0">
+              <a:latin typeface="Times New Roman" panose="02020603050405020304" charset="0"/>
+              <a:cs typeface="Times New Roman" panose="02020603050405020304" charset="0"/>
+            </a:endParaRPr>
+          </a:p>
+          <a:p>
+            <a:r>
+              <a:rPr lang="en-GB" altLang="en-US" sz="2400" dirty="0">
+                <a:latin typeface="Times New Roman" panose="02020603050405020304" charset="0"/>
+                <a:cs typeface="Times New Roman" panose="02020603050405020304" charset="0"/>
+              </a:rPr>
+              <a:t>As a troubleshoot, we</a:t>
+            </a:r>
+            <a:r>
+              <a:rPr lang="en-US" sz="2400" dirty="0">
+                <a:latin typeface="Times New Roman" panose="02020603050405020304" charset="0"/>
+                <a:cs typeface="Times New Roman" panose="02020603050405020304" charset="0"/>
+              </a:rPr>
+              <a:t> established a strict protocol where team members ran Prisma migration synchronization commands immediately after pulling code updates.</a:t>
+            </a:r>
+            <a:endParaRPr lang="en-US" sz="2400" dirty="0">
+              <a:latin typeface="Times New Roman" panose="02020603050405020304" charset="0"/>
+              <a:cs typeface="Times New Roman" panose="02020603050405020304" charset="0"/>
+            </a:endParaRPr>
+          </a:p>
+          <a:p>
+            <a:endParaRPr lang="en-US" dirty="0">
               <a:latin typeface="Times New Roman" panose="02020603050405020304" charset="0"/>
               <a:cs typeface="Times New Roman" panose="02020603050405020304" charset="0"/>
             </a:endParaRPr>
@@ -4653,6 +4650,513 @@
       <p:grpSpPr/>
       <p:sp>
         <p:nvSpPr>
+          <p:cNvPr id="5" name="Content Placeholder 4"/>
+          <p:cNvSpPr>
+            <a:spLocks noGrp="1"/>
+          </p:cNvSpPr>
+          <p:nvPr>
+            <p:ph idx="1"/>
+          </p:nvPr>
+        </p:nvSpPr>
+        <p:spPr>
+          <a:xfrm>
+            <a:off x="271145" y="417195"/>
+            <a:ext cx="11544935" cy="6002020"/>
+          </a:xfrm>
+        </p:spPr>
+        <p:txBody>
+          <a:bodyPr>
+            <a:noAutofit/>
+          </a:bodyPr>
+          <a:p>
+            <a:pPr marL="0" indent="0">
+              <a:buNone/>
+            </a:pPr>
+            <a:r>
+              <a:rPr lang="en-US" altLang="en-US" sz="3200" b="1" u="sng">
+                <a:latin typeface="Times New Roman" panose="02020603050405020304" charset="0"/>
+                <a:cs typeface="Times New Roman" panose="02020603050405020304" charset="0"/>
+              </a:rPr>
+              <a:t>Challenge: Third-Party Email Delivery on Cloud Hosting</a:t>
+            </a:r>
+            <a:endParaRPr lang="en-US" altLang="en-US" sz="3200" b="1" u="sng">
+              <a:latin typeface="Times New Roman" panose="02020603050405020304" charset="0"/>
+              <a:cs typeface="Times New Roman" panose="02020603050405020304" charset="0"/>
+            </a:endParaRPr>
+          </a:p>
+          <a:p>
+            <a:pPr marL="0" indent="0">
+              <a:buNone/>
+            </a:pPr>
+            <a:endParaRPr lang="en-US" altLang="en-US" sz="3200">
+              <a:latin typeface="Times New Roman" panose="02020603050405020304" charset="0"/>
+              <a:cs typeface="Times New Roman" panose="02020603050405020304" charset="0"/>
+            </a:endParaRPr>
+          </a:p>
+          <a:p>
+            <a:pPr marL="0" indent="0">
+              <a:buNone/>
+            </a:pPr>
+            <a:r>
+              <a:rPr lang="en-US" altLang="en-US" sz="3200">
+                <a:latin typeface="Times New Roman" panose="02020603050405020304" charset="0"/>
+                <a:cs typeface="Times New Roman" panose="02020603050405020304" charset="0"/>
+              </a:rPr>
+              <a:t>Built password recovery using Nodemailer over Gmail SMTP</a:t>
+            </a:r>
+            <a:endParaRPr lang="en-US" altLang="en-US" sz="3200">
+              <a:latin typeface="Times New Roman" panose="02020603050405020304" charset="0"/>
+              <a:cs typeface="Times New Roman" panose="02020603050405020304" charset="0"/>
+            </a:endParaRPr>
+          </a:p>
+          <a:p>
+            <a:pPr marL="0" indent="0">
+              <a:buNone/>
+            </a:pPr>
+            <a:r>
+              <a:rPr lang="en-US" altLang="en-US" sz="3200">
+                <a:latin typeface="Times New Roman" panose="02020603050405020304" charset="0"/>
+                <a:cs typeface="Times New Roman" panose="02020603050405020304" charset="0"/>
+              </a:rPr>
+              <a:t>Discovered Railway's hosting environment lacks reliable outbound SMTP connectivity (blocked/limited IPv6 egress on standard mail ports)</a:t>
+            </a:r>
+            <a:endParaRPr lang="en-US" altLang="en-US" sz="3200">
+              <a:latin typeface="Times New Roman" panose="02020603050405020304" charset="0"/>
+              <a:cs typeface="Times New Roman" panose="02020603050405020304" charset="0"/>
+            </a:endParaRPr>
+          </a:p>
+          <a:p>
+            <a:pPr marL="0" indent="0">
+              <a:buNone/>
+            </a:pPr>
+            <a:r>
+              <a:rPr lang="en-US" altLang="en-US" sz="3200">
+                <a:latin typeface="Times New Roman" panose="02020603050405020304" charset="0"/>
+                <a:cs typeface="Times New Roman" panose="02020603050405020304" charset="0"/>
+              </a:rPr>
+              <a:t>Diagnosing and resolving a hosting-specific networking issue carried real time cost within a tight 3-week timeline</a:t>
+            </a:r>
+            <a:endParaRPr lang="en-US" altLang="en-US" sz="3200">
+              <a:latin typeface="Times New Roman" panose="02020603050405020304" charset="0"/>
+              <a:cs typeface="Times New Roman" panose="02020603050405020304" charset="0"/>
+            </a:endParaRPr>
+          </a:p>
+          <a:p>
+            <a:pPr marL="0" indent="0">
+              <a:buNone/>
+            </a:pPr>
+            <a:endParaRPr lang="en-US" altLang="en-US" sz="3200">
+              <a:latin typeface="Times New Roman" panose="02020603050405020304" charset="0"/>
+              <a:cs typeface="Times New Roman" panose="02020603050405020304" charset="0"/>
+            </a:endParaRPr>
+          </a:p>
+          <a:p>
+            <a:pPr marL="0" indent="0">
+              <a:buNone/>
+            </a:pPr>
+            <a:r>
+              <a:rPr lang="en-US" altLang="en-US" sz="3200">
+                <a:latin typeface="Times New Roman" panose="02020603050405020304" charset="0"/>
+                <a:cs typeface="Times New Roman" panose="02020603050405020304" charset="0"/>
+              </a:rPr>
+              <a:t>Resolution: Deprioritized in favor of finishing core MVP features (auth, transactions, budgets, goals); scoped in for a future release once the delivery issue can be properly resolved.</a:t>
+            </a:r>
+            <a:endParaRPr lang="en-US" altLang="en-US" sz="3200">
+              <a:latin typeface="Times New Roman" panose="02020603050405020304" charset="0"/>
+              <a:cs typeface="Times New Roman" panose="02020603050405020304" charset="0"/>
+            </a:endParaRPr>
+          </a:p>
+        </p:txBody>
+      </p:sp>
+    </p:spTree>
+  </p:cSld>
+  <p:clrMapOvr>
+    <a:masterClrMapping/>
+  </p:clrMapOvr>
+</p:sld>
+</file>
+
+<file path=ppt/slides/slide15.xml><?xml version="1.0" encoding="utf-8"?>
+<p:sld xmlns:a="http://schemas.openxmlformats.org/drawingml/2006/main" xmlns:r="http://schemas.openxmlformats.org/officeDocument/2006/relationships" xmlns:p="http://schemas.openxmlformats.org/presentationml/2006/main">
+  <p:cSld>
+    <p:spTree>
+      <p:nvGrpSpPr>
+        <p:cNvPr id="1" name=""/>
+        <p:cNvGrpSpPr/>
+        <p:nvPr/>
+      </p:nvGrpSpPr>
+      <p:grpSpPr>
+        <a:xfrm>
+          <a:off x="0" y="0"/>
+          <a:ext cx="0" cy="0"/>
+          <a:chOff x="0" y="0"/>
+          <a:chExt cx="0" cy="0"/>
+        </a:xfrm>
+      </p:grpSpPr>
+      <p:sp>
+        <p:nvSpPr>
+          <p:cNvPr id="2" name="TextBox 1"/>
+          <p:cNvSpPr txBox="1"/>
+          <p:nvPr/>
+        </p:nvSpPr>
+        <p:spPr>
+          <a:xfrm>
+            <a:off x="228600" y="160020"/>
+            <a:ext cx="11544300" cy="6438900"/>
+          </a:xfrm>
+          <a:prstGeom prst="rect">
+            <a:avLst/>
+          </a:prstGeom>
+          <a:noFill/>
+        </p:spPr>
+        <p:txBody>
+          <a:bodyPr wrap="square" rtlCol="0">
+            <a:noAutofit/>
+          </a:bodyPr>
+          <a:lstStyle/>
+          <a:p>
+            <a:r>
+              <a:rPr lang="en-US" altLang="en-US" sz="2800" b="1" u="sng" dirty="0">
+                <a:latin typeface="Times New Roman" panose="02020603050405020304" charset="0"/>
+                <a:cs typeface="Times New Roman" panose="02020603050405020304" charset="0"/>
+              </a:rPr>
+              <a:t>Future Considerations</a:t>
+            </a:r>
+            <a:endParaRPr lang="en-US" altLang="en-US" sz="2800" dirty="0">
+              <a:latin typeface="Times New Roman" panose="02020603050405020304" charset="0"/>
+              <a:cs typeface="Times New Roman" panose="02020603050405020304" charset="0"/>
+            </a:endParaRPr>
+          </a:p>
+          <a:p>
+            <a:r>
+              <a:rPr lang="en-US" altLang="en-US" sz="2800" b="1" dirty="0">
+                <a:latin typeface="Times New Roman" panose="02020603050405020304" charset="0"/>
+                <a:cs typeface="Times New Roman" panose="02020603050405020304" charset="0"/>
+              </a:rPr>
+              <a:t>Scalability</a:t>
+            </a:r>
+            <a:r>
+              <a:rPr lang="en-GB" altLang="en-US" sz="2800" b="1" dirty="0">
+                <a:latin typeface="Times New Roman" panose="02020603050405020304" charset="0"/>
+                <a:cs typeface="Times New Roman" panose="02020603050405020304" charset="0"/>
+              </a:rPr>
+              <a:t> and </a:t>
+            </a:r>
+            <a:r>
+              <a:rPr lang="en-US" altLang="en-US" sz="2800" b="1" dirty="0">
+                <a:latin typeface="Times New Roman" panose="02020603050405020304" charset="0"/>
+                <a:cs typeface="Times New Roman" panose="02020603050405020304" charset="0"/>
+              </a:rPr>
+              <a:t>Containerization</a:t>
+            </a:r>
+            <a:r>
+              <a:rPr lang="en-GB" altLang="en-US" sz="2800" b="1" dirty="0">
+                <a:latin typeface="Times New Roman" panose="02020603050405020304" charset="0"/>
+                <a:cs typeface="Times New Roman" panose="02020603050405020304" charset="0"/>
+              </a:rPr>
+              <a:t>. </a:t>
+            </a:r>
+            <a:r>
+              <a:rPr lang="en-US" altLang="en-US" sz="2800" dirty="0">
+                <a:latin typeface="Times New Roman" panose="02020603050405020304" charset="0"/>
+                <a:cs typeface="Times New Roman" panose="02020603050405020304" charset="0"/>
+              </a:rPr>
+              <a:t>Package backend services in Docker to standardize the runtime environment and simplify moving between hosting providers</a:t>
+            </a:r>
+            <a:r>
+              <a:rPr lang="en-GB" altLang="en-US" sz="2800" dirty="0">
+                <a:latin typeface="Times New Roman" panose="02020603050405020304" charset="0"/>
+                <a:cs typeface="Times New Roman" panose="02020603050405020304" charset="0"/>
+              </a:rPr>
+              <a:t>.</a:t>
+            </a:r>
+            <a:endParaRPr lang="en-US" altLang="en-US" sz="2800" dirty="0">
+              <a:latin typeface="Times New Roman" panose="02020603050405020304" charset="0"/>
+              <a:cs typeface="Times New Roman" panose="02020603050405020304" charset="0"/>
+            </a:endParaRPr>
+          </a:p>
+          <a:p>
+            <a:r>
+              <a:rPr lang="en-US" altLang="en-US" sz="2800" b="1" dirty="0">
+                <a:latin typeface="Times New Roman" panose="02020603050405020304" charset="0"/>
+                <a:cs typeface="Times New Roman" panose="02020603050405020304" charset="0"/>
+              </a:rPr>
+              <a:t>Tech Stack </a:t>
+            </a:r>
+            <a:r>
+              <a:rPr lang="en-GB" altLang="en-US" sz="2800" b="1" dirty="0">
+                <a:latin typeface="Times New Roman" panose="02020603050405020304" charset="0"/>
+                <a:cs typeface="Times New Roman" panose="02020603050405020304" charset="0"/>
+              </a:rPr>
+              <a:t>changes and evolution. </a:t>
+            </a:r>
+            <a:r>
+              <a:rPr lang="en-US" altLang="en-US" sz="2800" dirty="0">
+                <a:latin typeface="Times New Roman" panose="02020603050405020304" charset="0"/>
+                <a:cs typeface="Times New Roman" panose="02020603050405020304" charset="0"/>
+              </a:rPr>
+              <a:t>Migrate</a:t>
+            </a:r>
+            <a:r>
+              <a:rPr lang="en-GB" altLang="en-US" sz="2800" dirty="0">
+                <a:latin typeface="Times New Roman" panose="02020603050405020304" charset="0"/>
+                <a:cs typeface="Times New Roman" panose="02020603050405020304" charset="0"/>
+              </a:rPr>
+              <a:t> from</a:t>
+            </a:r>
+            <a:r>
+              <a:rPr lang="en-US" altLang="en-US" sz="2800" dirty="0">
+                <a:latin typeface="Times New Roman" panose="02020603050405020304" charset="0"/>
+                <a:cs typeface="Times New Roman" panose="02020603050405020304" charset="0"/>
+              </a:rPr>
+              <a:t> MySQL</a:t>
+            </a:r>
+            <a:r>
+              <a:rPr lang="en-GB" altLang="en-US" sz="2800" dirty="0">
+                <a:latin typeface="Times New Roman" panose="02020603050405020304" charset="0"/>
+                <a:cs typeface="Times New Roman" panose="02020603050405020304" charset="0"/>
+              </a:rPr>
+              <a:t> to </a:t>
+            </a:r>
+            <a:r>
+              <a:rPr lang="en-US" altLang="en-US" sz="2800" dirty="0">
+                <a:latin typeface="Times New Roman" panose="02020603050405020304" charset="0"/>
+                <a:cs typeface="Times New Roman" panose="02020603050405020304" charset="0"/>
+              </a:rPr>
+              <a:t>PostgreSQL for better performance on growing transaction history; evaluate Postgres-native hosts (Render, Supabase</a:t>
+            </a:r>
+            <a:r>
+              <a:rPr lang="en-GB" altLang="en-US" sz="2800" dirty="0">
+                <a:latin typeface="Times New Roman" panose="02020603050405020304" charset="0"/>
+                <a:cs typeface="Times New Roman" panose="02020603050405020304" charset="0"/>
+              </a:rPr>
+              <a:t>, Firebase</a:t>
+            </a:r>
+            <a:r>
+              <a:rPr lang="en-US" altLang="en-US" sz="2800" dirty="0">
+                <a:latin typeface="Times New Roman" panose="02020603050405020304" charset="0"/>
+                <a:cs typeface="Times New Roman" panose="02020603050405020304" charset="0"/>
+              </a:rPr>
+              <a:t>) as Railway alternatives</a:t>
+            </a:r>
+            <a:r>
+              <a:rPr lang="en-GB" altLang="en-US" sz="2800" dirty="0">
+                <a:latin typeface="Times New Roman" panose="02020603050405020304" charset="0"/>
+                <a:cs typeface="Times New Roman" panose="02020603050405020304" charset="0"/>
+              </a:rPr>
+              <a:t> for backend hosting.</a:t>
+            </a:r>
+            <a:endParaRPr lang="en-US" altLang="en-US" sz="2800" dirty="0">
+              <a:latin typeface="Times New Roman" panose="02020603050405020304" charset="0"/>
+              <a:cs typeface="Times New Roman" panose="02020603050405020304" charset="0"/>
+            </a:endParaRPr>
+          </a:p>
+          <a:p>
+            <a:r>
+              <a:rPr lang="en-US" altLang="en-US" sz="2800" b="1" dirty="0">
+                <a:latin typeface="Times New Roman" panose="02020603050405020304" charset="0"/>
+                <a:cs typeface="Times New Roman" panose="02020603050405020304" charset="0"/>
+              </a:rPr>
+              <a:t>App Distribution</a:t>
+            </a:r>
+            <a:r>
+              <a:rPr lang="en-GB" altLang="en-US" sz="2800" b="1" dirty="0">
+                <a:latin typeface="Times New Roman" panose="02020603050405020304" charset="0"/>
+                <a:cs typeface="Times New Roman" panose="02020603050405020304" charset="0"/>
+              </a:rPr>
+              <a:t>.</a:t>
+            </a:r>
+            <a:r>
+              <a:rPr lang="en-US" altLang="en-US" sz="2800" dirty="0">
+                <a:latin typeface="Times New Roman" panose="02020603050405020304" charset="0"/>
+                <a:cs typeface="Times New Roman" panose="02020603050405020304" charset="0"/>
+              </a:rPr>
+              <a:t> Move from </a:t>
+            </a:r>
+            <a:r>
+              <a:rPr lang="en-GB" altLang="en-US" sz="2800" dirty="0">
+                <a:latin typeface="Times New Roman" panose="02020603050405020304" charset="0"/>
+                <a:cs typeface="Times New Roman" panose="02020603050405020304" charset="0"/>
+              </a:rPr>
+              <a:t>usb-debuging</a:t>
+            </a:r>
+            <a:r>
+              <a:rPr lang="en-US" altLang="en-US" sz="2800" dirty="0">
+                <a:latin typeface="Times New Roman" panose="02020603050405020304" charset="0"/>
+                <a:cs typeface="Times New Roman" panose="02020603050405020304" charset="0"/>
+              </a:rPr>
+              <a:t> </a:t>
+            </a:r>
+            <a:r>
+              <a:rPr lang="en-GB" altLang="en-US" sz="2800" dirty="0">
+                <a:latin typeface="Times New Roman" panose="02020603050405020304" charset="0"/>
+                <a:cs typeface="Times New Roman" panose="02020603050405020304" charset="0"/>
+              </a:rPr>
+              <a:t>for installation</a:t>
+            </a:r>
+            <a:r>
+              <a:rPr lang="en-US" altLang="en-US" sz="2800" dirty="0">
+                <a:latin typeface="Times New Roman" panose="02020603050405020304" charset="0"/>
+                <a:cs typeface="Times New Roman" panose="02020603050405020304" charset="0"/>
+              </a:rPr>
+              <a:t> to direct APK distribution (Firebase App Distribution </a:t>
+            </a:r>
+            <a:r>
+              <a:rPr lang="en-GB" altLang="en-US" sz="2800" dirty="0">
+                <a:latin typeface="Times New Roman" panose="02020603050405020304" charset="0"/>
+                <a:cs typeface="Times New Roman" panose="02020603050405020304" charset="0"/>
+              </a:rPr>
+              <a:t>or even</a:t>
+            </a:r>
+            <a:r>
+              <a:rPr lang="en-US" altLang="en-US" sz="2800" dirty="0">
+                <a:latin typeface="Times New Roman" panose="02020603050405020304" charset="0"/>
+                <a:cs typeface="Times New Roman" panose="02020603050405020304" charset="0"/>
+              </a:rPr>
+              <a:t> Google Play internal testing) so users can install Malihub on </a:t>
+            </a:r>
+            <a:r>
+              <a:rPr lang="en-GB" altLang="en-US" sz="2800" dirty="0">
+                <a:latin typeface="Times New Roman" panose="02020603050405020304" charset="0"/>
+                <a:cs typeface="Times New Roman" panose="02020603050405020304" charset="0"/>
+              </a:rPr>
+              <a:t>their</a:t>
+            </a:r>
+            <a:r>
+              <a:rPr lang="en-US" altLang="en-US" sz="2800" dirty="0">
+                <a:latin typeface="Times New Roman" panose="02020603050405020304" charset="0"/>
+                <a:cs typeface="Times New Roman" panose="02020603050405020304" charset="0"/>
+              </a:rPr>
+              <a:t> device</a:t>
+            </a:r>
+            <a:r>
+              <a:rPr lang="en-GB" altLang="en-US" sz="2800" dirty="0">
+                <a:latin typeface="Times New Roman" panose="02020603050405020304" charset="0"/>
+                <a:cs typeface="Times New Roman" panose="02020603050405020304" charset="0"/>
+              </a:rPr>
+              <a:t>s</a:t>
+            </a:r>
+            <a:r>
+              <a:rPr lang="en-US" altLang="en-US" sz="2800" dirty="0">
+                <a:latin typeface="Times New Roman" panose="02020603050405020304" charset="0"/>
+                <a:cs typeface="Times New Roman" panose="02020603050405020304" charset="0"/>
+              </a:rPr>
+              <a:t> </a:t>
+            </a:r>
+            <a:r>
+              <a:rPr lang="en-GB" sz="2800" dirty="0">
+                <a:latin typeface="Times New Roman" panose="02020603050405020304" charset="0"/>
+                <a:cs typeface="Times New Roman" panose="02020603050405020304" charset="0"/>
+              </a:rPr>
+              <a:t>conveniently.</a:t>
+            </a:r>
+            <a:endParaRPr lang="en-US" altLang="en-US" sz="2800" dirty="0">
+              <a:latin typeface="Times New Roman" panose="02020603050405020304" charset="0"/>
+              <a:cs typeface="Times New Roman" panose="02020603050405020304" charset="0"/>
+            </a:endParaRPr>
+          </a:p>
+          <a:p>
+            <a:r>
+              <a:rPr lang="en-US" altLang="en-US" sz="2800" b="1" dirty="0">
+                <a:latin typeface="Times New Roman" panose="02020603050405020304" charset="0"/>
+                <a:cs typeface="Times New Roman" panose="02020603050405020304" charset="0"/>
+              </a:rPr>
+              <a:t>Automated Safeguards</a:t>
+            </a:r>
+            <a:r>
+              <a:rPr lang="en-US" altLang="en-US" sz="2800" dirty="0">
+                <a:latin typeface="Times New Roman" panose="02020603050405020304" charset="0"/>
+                <a:cs typeface="Times New Roman" panose="02020603050405020304" charset="0"/>
+              </a:rPr>
+              <a:t>: Introduce unit and integration tests for financial calculations, run automatically before every deployment</a:t>
+            </a:r>
+            <a:r>
+              <a:rPr lang="en-GB" altLang="en-US" sz="2800" dirty="0">
+                <a:latin typeface="Times New Roman" panose="02020603050405020304" charset="0"/>
+                <a:cs typeface="Times New Roman" panose="02020603050405020304" charset="0"/>
+              </a:rPr>
+              <a:t>.</a:t>
+            </a:r>
+            <a:endParaRPr lang="en-GB" altLang="en-US" sz="2800" dirty="0">
+              <a:latin typeface="Times New Roman" panose="02020603050405020304" charset="0"/>
+              <a:cs typeface="Times New Roman" panose="02020603050405020304" charset="0"/>
+            </a:endParaRPr>
+          </a:p>
+          <a:p>
+            <a:r>
+              <a:rPr lang="en-US" altLang="en-US" sz="2800" b="1" dirty="0">
+                <a:latin typeface="Times New Roman" panose="02020603050405020304" charset="0"/>
+                <a:cs typeface="Times New Roman" panose="02020603050405020304" charset="0"/>
+              </a:rPr>
+              <a:t>Automated Insights</a:t>
+            </a:r>
+            <a:r>
+              <a:rPr lang="en-US" altLang="en-US" sz="2800" dirty="0">
+                <a:latin typeface="Times New Roman" panose="02020603050405020304" charset="0"/>
+                <a:cs typeface="Times New Roman" panose="02020603050405020304" charset="0"/>
+              </a:rPr>
+              <a:t>: Analyze historical transaction data to auto-generate spending summaries, budget</a:t>
+            </a:r>
+            <a:r>
+              <a:rPr lang="en-GB" altLang="en-US" sz="2800" dirty="0">
+                <a:latin typeface="Times New Roman" panose="02020603050405020304" charset="0"/>
+                <a:cs typeface="Times New Roman" panose="02020603050405020304" charset="0"/>
+              </a:rPr>
+              <a:t> against </a:t>
+            </a:r>
+            <a:r>
+              <a:rPr lang="en-US" altLang="en-US" sz="2800" dirty="0">
+                <a:latin typeface="Times New Roman" panose="02020603050405020304" charset="0"/>
+                <a:cs typeface="Times New Roman" panose="02020603050405020304" charset="0"/>
+              </a:rPr>
+              <a:t>actual alerts, and goal progress forecasts</a:t>
+            </a:r>
+            <a:r>
+              <a:rPr lang="en-GB" altLang="en-US" sz="2800" dirty="0">
+                <a:latin typeface="Times New Roman" panose="02020603050405020304" charset="0"/>
+                <a:cs typeface="Times New Roman" panose="02020603050405020304" charset="0"/>
+              </a:rPr>
+              <a:t>.</a:t>
+            </a:r>
+            <a:endParaRPr lang="en-GB" altLang="en-US" sz="2800" dirty="0">
+              <a:latin typeface="Times New Roman" panose="02020603050405020304" charset="0"/>
+              <a:cs typeface="Times New Roman" panose="02020603050405020304" charset="0"/>
+            </a:endParaRPr>
+          </a:p>
+        </p:txBody>
+      </p:sp>
+    </p:spTree>
+  </p:cSld>
+  <p:clrMapOvr>
+    <a:masterClrMapping/>
+  </p:clrMapOvr>
+  <mc:AlternateContent xmlns:mc="http://schemas.openxmlformats.org/markup-compatibility/2006">
+    <mc:Choice xmlns:p14="http://schemas.microsoft.com/office/powerpoint/2010/main" Requires="p14">
+      <p:transition spd="slow" p14:dur="3400">
+        <p14:reveal/>
+      </p:transition>
+    </mc:Choice>
+    <mc:Fallback>
+      <p:transition spd="slow">
+        <p:fade/>
+      </p:transition>
+    </mc:Fallback>
+  </mc:AlternateContent>
+</p:sld>
+</file>
+
+<file path=ppt/slides/slide16.xml><?xml version="1.0" encoding="utf-8"?>
+<p:sld xmlns:a="http://schemas.openxmlformats.org/drawingml/2006/main" xmlns:r="http://schemas.openxmlformats.org/officeDocument/2006/relationships" xmlns:p="http://schemas.openxmlformats.org/presentationml/2006/main">
+  <p:cSld>
+    <p:spTree>
+      <p:nvGrpSpPr>
+        <p:cNvPr id="1" name=""/>
+        <p:cNvGrpSpPr/>
+        <p:nvPr/>
+      </p:nvGrpSpPr>
+      <p:grpSpPr/>
+      <p:sp>
+        <p:nvSpPr>
           <p:cNvPr id="4" name="Title 3"/>
           <p:cNvSpPr>
             <a:spLocks noGrp="1"/>
@@ -4691,36 +5195,6 @@
                 <a:cs typeface="Times New Roman" panose="02020603050405020304" charset="0"/>
               </a:rPr>
             </a:br>
-            <a:r>
-              <a:rPr lang="en-GB" altLang="en-US" sz="2800" b="1">
-                <a:solidFill>
-                  <a:schemeClr val="tx1"/>
-                </a:solidFill>
-                <a:latin typeface="Times New Roman" panose="02020603050405020304" charset="0"/>
-                <a:cs typeface="Times New Roman" panose="02020603050405020304" charset="0"/>
-              </a:rPr>
-              <a:t> (FOR FURTHER QUESTIONS AND DEEPER UNDERSTANDING OF THE MVP, FEEL FREE TO GO THROUGH MALIHUB’S SRS DOC AT </a:t>
-            </a:r>
-            <a:r>
-              <a:rPr lang="en-US" altLang="en-US" sz="2800" b="1">
-                <a:solidFill>
-                  <a:schemeClr val="tx1"/>
-                </a:solidFill>
-                <a:latin typeface="Times New Roman" panose="02020603050405020304" charset="0"/>
-                <a:cs typeface="Times New Roman" panose="02020603050405020304" charset="0"/>
-              </a:rPr>
-              <a:t>https://github.com/p1-my2/Malihub</a:t>
-            </a:r>
-            <a:r>
-              <a:rPr lang="en-GB" altLang="en-US" sz="2800" b="1">
-                <a:solidFill>
-                  <a:schemeClr val="tx1"/>
-                </a:solidFill>
-                <a:latin typeface="Times New Roman" panose="02020603050405020304" charset="0"/>
-                <a:cs typeface="Times New Roman" panose="02020603050405020304" charset="0"/>
-              </a:rPr>
-              <a:t>)</a:t>
-            </a:r>
             <a:endParaRPr lang="en-GB" altLang="en-US" sz="2800" b="1">
               <a:solidFill>
                 <a:schemeClr val="tx1"/>

--- a/MALIHUB POWERPOINT PRESENTATION.pptx
+++ b/MALIHUB POWERPOINT PRESENTATION.pptx
@@ -6203,7 +6203,7 @@
         <p:spPr>
           <a:xfrm>
             <a:off x="177800" y="228600"/>
-            <a:ext cx="11722100" cy="6277610"/>
+            <a:ext cx="11722100" cy="6498590"/>
           </a:xfrm>
           <a:prstGeom prst="rect">
             <a:avLst/>
@@ -6212,7 +6212,7 @@
         </p:spPr>
         <p:txBody>
           <a:bodyPr wrap="square" rtlCol="0">
-            <a:spAutoFit/>
+            <a:noAutofit/>
           </a:bodyPr>
           <a:lstStyle/>
           <a:p>
@@ -6243,7 +6243,112 @@
               </a:rPr>
               <a:t> Organized into relational tables to keep user records structured.</a:t>
             </a:r>
-            <a:endParaRPr lang="en-US" sz="3200" dirty="0">
+            <a:r>
+              <a:rPr lang="en-GB" altLang="en-US" sz="3200" dirty="0">
+                <a:latin typeface="Times New Roman" panose="02020603050405020304" charset="0"/>
+                <a:cs typeface="Times New Roman" panose="02020603050405020304" charset="0"/>
+              </a:rPr>
+              <a:t>i.e, </a:t>
+            </a:r>
+            <a:r>
+              <a:rPr lang="en-US" altLang="en-US" sz="3200" dirty="0">
+                <a:latin typeface="Times New Roman" panose="02020603050405020304" charset="0"/>
+                <a:cs typeface="Times New Roman" panose="02020603050405020304" charset="0"/>
+              </a:rPr>
+              <a:t>User</a:t>
+            </a:r>
+            <a:r>
+              <a:rPr lang="en-GB" altLang="en-US" sz="3200" dirty="0">
+                <a:latin typeface="Times New Roman" panose="02020603050405020304" charset="0"/>
+                <a:cs typeface="Times New Roman" panose="02020603050405020304" charset="0"/>
+              </a:rPr>
+              <a:t>, </a:t>
+            </a:r>
+            <a:r>
+              <a:rPr lang="en-US" altLang="en-US" sz="3200" dirty="0">
+                <a:latin typeface="Times New Roman" panose="02020603050405020304" charset="0"/>
+                <a:cs typeface="Times New Roman" panose="02020603050405020304" charset="0"/>
+              </a:rPr>
+              <a:t>Account</a:t>
+            </a:r>
+            <a:r>
+              <a:rPr lang="en-GB" altLang="en-US" sz="3200" dirty="0">
+                <a:latin typeface="Times New Roman" panose="02020603050405020304" charset="0"/>
+                <a:cs typeface="Times New Roman" panose="02020603050405020304" charset="0"/>
+              </a:rPr>
+              <a:t>, </a:t>
+            </a:r>
+            <a:r>
+              <a:rPr lang="en-US" altLang="en-US" sz="3200" dirty="0">
+                <a:latin typeface="Times New Roman" panose="02020603050405020304" charset="0"/>
+                <a:cs typeface="Times New Roman" panose="02020603050405020304" charset="0"/>
+              </a:rPr>
+              <a:t>Category</a:t>
+            </a:r>
+            <a:r>
+              <a:rPr lang="en-GB" altLang="en-US" sz="3200" dirty="0">
+                <a:latin typeface="Times New Roman" panose="02020603050405020304" charset="0"/>
+                <a:cs typeface="Times New Roman" panose="02020603050405020304" charset="0"/>
+              </a:rPr>
+              <a:t>, </a:t>
+            </a:r>
+            <a:r>
+              <a:rPr lang="en-US" altLang="en-US" sz="3200" dirty="0">
+                <a:latin typeface="Times New Roman" panose="02020603050405020304" charset="0"/>
+                <a:cs typeface="Times New Roman" panose="02020603050405020304" charset="0"/>
+              </a:rPr>
+              <a:t>Transaction</a:t>
+            </a:r>
+            <a:r>
+              <a:rPr lang="en-GB" altLang="en-US" sz="3200" dirty="0">
+                <a:latin typeface="Times New Roman" panose="02020603050405020304" charset="0"/>
+                <a:cs typeface="Times New Roman" panose="02020603050405020304" charset="0"/>
+              </a:rPr>
+              <a:t>, </a:t>
+            </a:r>
+            <a:r>
+              <a:rPr lang="en-US" altLang="en-US" sz="3200" dirty="0">
+                <a:latin typeface="Times New Roman" panose="02020603050405020304" charset="0"/>
+                <a:cs typeface="Times New Roman" panose="02020603050405020304" charset="0"/>
+              </a:rPr>
+              <a:t>Budget</a:t>
+            </a:r>
+            <a:r>
+              <a:rPr lang="en-GB" altLang="en-US" sz="3200" dirty="0">
+                <a:latin typeface="Times New Roman" panose="02020603050405020304" charset="0"/>
+                <a:cs typeface="Times New Roman" panose="02020603050405020304" charset="0"/>
+              </a:rPr>
+              <a:t>, </a:t>
+            </a:r>
+            <a:r>
+              <a:rPr lang="en-US" altLang="en-US" sz="3200" dirty="0">
+                <a:latin typeface="Times New Roman" panose="02020603050405020304" charset="0"/>
+                <a:cs typeface="Times New Roman" panose="02020603050405020304" charset="0"/>
+              </a:rPr>
+              <a:t>Financial Goal</a:t>
+            </a:r>
+            <a:r>
+              <a:rPr lang="en-GB" altLang="en-US" sz="3200" dirty="0">
+                <a:latin typeface="Times New Roman" panose="02020603050405020304" charset="0"/>
+                <a:cs typeface="Times New Roman" panose="02020603050405020304" charset="0"/>
+              </a:rPr>
+              <a:t> and </a:t>
+            </a:r>
+            <a:r>
+              <a:rPr lang="en-US" altLang="en-US" sz="3200" dirty="0">
+                <a:latin typeface="Times New Roman" panose="02020603050405020304" charset="0"/>
+                <a:cs typeface="Times New Roman" panose="02020603050405020304" charset="0"/>
+              </a:rPr>
+              <a:t>Notification</a:t>
+            </a:r>
+            <a:r>
+              <a:rPr lang="en-GB" altLang="en-US" sz="3200" dirty="0">
+                <a:latin typeface="Times New Roman" panose="02020603050405020304" charset="0"/>
+                <a:cs typeface="Times New Roman" panose="02020603050405020304" charset="0"/>
+              </a:rPr>
+              <a:t>.</a:t>
+            </a:r>
+            <a:endParaRPr lang="en-US" altLang="en-US" sz="3200" dirty="0">
               <a:latin typeface="Times New Roman" panose="02020603050405020304" charset="0"/>
               <a:cs typeface="Times New Roman" panose="02020603050405020304" charset="0"/>
             </a:endParaRPr>
